--- a/decks/Day 1/Section2-Steering-Claude-Code.pptx
+++ b/decks/Day 1/Section2-Steering-Claude-Code.pptx
@@ -20,10 +20,7 @@
     <p:sldId id="268" r:id="rId14"/>
     <p:sldId id="269" r:id="rId15"/>
   </p:sldIdLst>
-  <p:notesMasterIdLst>
-    <p:notesMasterId r:id="rId16"/>
-  </p:notesMasterIdLst>
-  <p:sldSz cx="9144000" cy="5143500"/>
+  <p:sldSz cx="9144000" cy="5143500" type="screen16x9"/>
   <p:notesSz cx="5143500" cy="9144000"/>
   <p:defaultTextStyle>
     <a:lvl1pPr marL="0" algn="l" defTabSz="914400" rtl="0" eaLnBrk="1" latinLnBrk="0" hangingPunct="1">
@@ -117,356 +114,12 @@
       </a:defRPr>
     </a:lvl9pPr>
   </p:defaultTextStyle>
+  <p:extLst>
+    <p:ext uri="{EFAFB233-063F-42B5-8137-9DF3F51BA10A}">
+      <p15:sldGuideLst xmlns:p15="http://schemas.microsoft.com/office/powerpoint/2012/main"/>
+    </p:ext>
+  </p:extLst>
 </p:presentation>
-</file>
-
-<file path=ppt/notesMasters/notesMaster1.xml><?xml version="1.0" encoding="utf-8"?>
-<p:notesMaster xmlns:a="http://schemas.openxmlformats.org/drawingml/2006/main" xmlns:r="http://schemas.openxmlformats.org/officeDocument/2006/relationships" xmlns:p="http://schemas.openxmlformats.org/presentationml/2006/main">
-  <p:cSld>
-    <p:bg>
-      <p:bgRef idx="1001">
-        <a:schemeClr val="bg1"/>
-      </p:bgRef>
-    </p:bg>
-    <p:spTree>
-      <p:nvGrpSpPr>
-        <p:cNvPr id="1" name=""/>
-        <p:cNvGrpSpPr/>
-        <p:nvPr/>
-      </p:nvGrpSpPr>
-      <p:grpSpPr>
-        <a:xfrm>
-          <a:off x="0" y="0"/>
-          <a:ext cx="0" cy="0"/>
-          <a:chOff x="0" y="0"/>
-          <a:chExt cx="0" cy="0"/>
-        </a:xfrm>
-      </p:grpSpPr>
-      <p:sp>
-        <p:nvSpPr>
-          <p:cNvPr id="2" name="Header Placeholder 1"/>
-          <p:cNvSpPr>
-            <a:spLocks noGrp="1"/>
-          </p:cNvSpPr>
-          <p:nvPr>
-            <p:ph type="hdr" sz="quarter"/>
-          </p:nvPr>
-        </p:nvSpPr>
-        <p:spPr>
-          <a:xfrm>
-            <a:off x="0" y="0"/>
-            <a:ext cx="2971800" cy="458788"/>
-          </a:xfrm>
-          <a:prstGeom prst="rect">
-            <a:avLst/>
-          </a:prstGeom>
-        </p:spPr>
-        <p:txBody>
-          <a:bodyPr vert="horz" lIns="91440" tIns="45720" rIns="91440" bIns="45720" rtlCol="0"/>
-          <a:lstStyle>
-            <a:lvl1pPr algn="l">
-              <a:defRPr sz="1200"/>
-            </a:lvl1pPr>
-          </a:lstStyle>
-          <a:p>
-            <a:endParaRPr lang="en-US"/>
-          </a:p>
-        </p:txBody>
-      </p:sp>
-      <p:sp>
-        <p:nvSpPr>
-          <p:cNvPr id="3" name="Date Placeholder 2"/>
-          <p:cNvSpPr>
-            <a:spLocks noGrp="1"/>
-          </p:cNvSpPr>
-          <p:nvPr>
-            <p:ph type="dt" idx="1"/>
-          </p:nvPr>
-        </p:nvSpPr>
-        <p:spPr>
-          <a:xfrm>
-            <a:off x="3884613" y="0"/>
-            <a:ext cx="2971800" cy="458788"/>
-          </a:xfrm>
-          <a:prstGeom prst="rect">
-            <a:avLst/>
-          </a:prstGeom>
-        </p:spPr>
-        <p:txBody>
-          <a:bodyPr vert="horz" lIns="91440" tIns="45720" rIns="91440" bIns="45720" rtlCol="0"/>
-          <a:lstStyle>
-            <a:lvl1pPr algn="r">
-              <a:defRPr sz="1200"/>
-            </a:lvl1pPr>
-          </a:lstStyle>
-          <a:p>
-            <a:fld id="{5282F153-3F37-0F45-9E97-73ACFA13230C}" type="datetimeFigureOut">
-              <a:rPr lang="en-US"/>
-              <a:t>7/23/19</a:t>
-            </a:fld>
-            <a:endParaRPr lang="en-US"/>
-          </a:p>
-        </p:txBody>
-      </p:sp>
-      <p:sp>
-        <p:nvSpPr>
-          <p:cNvPr id="4" name="Slide Image Placeholder 3"/>
-          <p:cNvSpPr>
-            <a:spLocks noGrp="1" noRot="1" noChangeAspect="1"/>
-          </p:cNvSpPr>
-          <p:nvPr>
-            <p:ph type="sldImg" idx="2"/>
-          </p:nvPr>
-        </p:nvSpPr>
-        <p:spPr>
-          <a:xfrm>
-            <a:off x="685800" y="1143000"/>
-            <a:ext cx="5486400" cy="3086100"/>
-          </a:xfrm>
-          <a:prstGeom prst="rect">
-            <a:avLst/>
-          </a:prstGeom>
-          <a:noFill/>
-          <a:ln w="12700">
-            <a:solidFill>
-              <a:prstClr val="black"/>
-            </a:solidFill>
-          </a:ln>
-        </p:spPr>
-        <p:txBody>
-          <a:bodyPr vert="horz" lIns="91440" tIns="45720" rIns="91440" bIns="45720" rtlCol="0" anchor="ctr"/>
-          <a:lstStyle/>
-          <a:p>
-            <a:endParaRPr lang="en-US"/>
-          </a:p>
-        </p:txBody>
-      </p:sp>
-      <p:sp>
-        <p:nvSpPr>
-          <p:cNvPr id="5" name="Notes Placeholder 4"/>
-          <p:cNvSpPr>
-            <a:spLocks noGrp="1"/>
-          </p:cNvSpPr>
-          <p:nvPr>
-            <p:ph type="body" sz="quarter" idx="3"/>
-          </p:nvPr>
-        </p:nvSpPr>
-        <p:spPr>
-          <a:xfrm>
-            <a:off x="685800" y="4400550"/>
-            <a:ext cx="5486400" cy="3600450"/>
-          </a:xfrm>
-          <a:prstGeom prst="rect">
-            <a:avLst/>
-          </a:prstGeom>
-        </p:spPr>
-        <p:txBody>
-          <a:bodyPr vert="horz" lIns="91440" tIns="45720" rIns="91440" bIns="45720" rtlCol="0"/>
-          <a:lstStyle/>
-          <a:p>
-            <a:pPr lvl="0"/>
-            <a:r>
-              <a:rPr lang="en-US"/>
-              <a:t>Click to edit Master text styles</a:t>
-            </a:r>
-          </a:p>
-          <a:p>
-            <a:pPr lvl="1"/>
-            <a:r>
-              <a:rPr lang="en-US"/>
-              <a:t>Second level</a:t>
-            </a:r>
-          </a:p>
-          <a:p>
-            <a:pPr lvl="2"/>
-            <a:r>
-              <a:rPr lang="en-US"/>
-              <a:t>Third level</a:t>
-            </a:r>
-          </a:p>
-          <a:p>
-            <a:pPr lvl="3"/>
-            <a:r>
-              <a:rPr lang="en-US"/>
-              <a:t>Fourth level</a:t>
-            </a:r>
-          </a:p>
-          <a:p>
-            <a:pPr lvl="4"/>
-            <a:r>
-              <a:rPr lang="en-US"/>
-              <a:t>Fifth level</a:t>
-            </a:r>
-          </a:p>
-        </p:txBody>
-      </p:sp>
-      <p:sp>
-        <p:nvSpPr>
-          <p:cNvPr id="6" name="Footer Placeholder 5"/>
-          <p:cNvSpPr>
-            <a:spLocks noGrp="1"/>
-          </p:cNvSpPr>
-          <p:nvPr>
-            <p:ph type="ftr" sz="quarter" idx="4"/>
-          </p:nvPr>
-        </p:nvSpPr>
-        <p:spPr>
-          <a:xfrm>
-            <a:off x="0" y="8685213"/>
-            <a:ext cx="2971800" cy="458787"/>
-          </a:xfrm>
-          <a:prstGeom prst="rect">
-            <a:avLst/>
-          </a:prstGeom>
-        </p:spPr>
-        <p:txBody>
-          <a:bodyPr vert="horz" lIns="91440" tIns="45720" rIns="91440" bIns="45720" rtlCol="0" anchor="b"/>
-          <a:lstStyle>
-            <a:lvl1pPr algn="l">
-              <a:defRPr sz="1200"/>
-            </a:lvl1pPr>
-          </a:lstStyle>
-          <a:p>
-            <a:endParaRPr lang="en-US"/>
-          </a:p>
-        </p:txBody>
-      </p:sp>
-      <p:sp>
-        <p:nvSpPr>
-          <p:cNvPr id="7" name="Slide Number Placeholder 6"/>
-          <p:cNvSpPr>
-            <a:spLocks noGrp="1"/>
-          </p:cNvSpPr>
-          <p:nvPr>
-            <p:ph type="sldNum" sz="quarter" idx="5"/>
-          </p:nvPr>
-        </p:nvSpPr>
-        <p:spPr>
-          <a:xfrm>
-            <a:off x="3884613" y="8685213"/>
-            <a:ext cx="2971800" cy="458787"/>
-          </a:xfrm>
-          <a:prstGeom prst="rect">
-            <a:avLst/>
-          </a:prstGeom>
-        </p:spPr>
-        <p:txBody>
-          <a:bodyPr vert="horz" lIns="91440" tIns="45720" rIns="91440" bIns="45720" rtlCol="0" anchor="b"/>
-          <a:lstStyle>
-            <a:lvl1pPr algn="r">
-              <a:defRPr sz="1200"/>
-            </a:lvl1pPr>
-          </a:lstStyle>
-          <a:p>
-            <a:fld id="{CE5E9CC1-C706-0F49-92D6-E571CC5EEA8F}" type="slidenum">
-              <a:rPr lang="en-US"/>
-              <a:t>‹#›</a:t>
-            </a:fld>
-            <a:endParaRPr lang="en-US"/>
-          </a:p>
-        </p:txBody>
-      </p:sp>
-    </p:spTree>
-    <p:extLst>
-      <p:ext uri="{BB962C8B-B14F-4D97-AF65-F5344CB8AC3E}">
-        <p14:creationId xmlns:p14="http://schemas.microsoft.com/office/powerpoint/2010/main" val="1024086991"/>
-      </p:ext>
-    </p:extLst>
-  </p:cSld>
-  <p:clrMap bg1="lt1" tx1="dk1" bg2="lt2" tx2="dk2" accent1="accent1" accent2="accent2" accent3="accent3" accent4="accent4" accent5="accent5" accent6="accent6" hlink="hlink" folHlink="folHlink"/>
-  <p:notesStyle>
-    <a:lvl1pPr marL="0" algn="l" defTabSz="914400" rtl="0" eaLnBrk="1" latinLnBrk="0" hangingPunct="1">
-      <a:defRPr sz="1200" kern="1200">
-        <a:solidFill>
-          <a:schemeClr val="tx1"/>
-        </a:solidFill>
-        <a:latin typeface="+mn-lt"/>
-        <a:ea typeface="+mn-ea"/>
-        <a:cs typeface="+mn-cs"/>
-      </a:defRPr>
-    </a:lvl1pPr>
-    <a:lvl2pPr marL="457200" algn="l" defTabSz="914400" rtl="0" eaLnBrk="1" latinLnBrk="0" hangingPunct="1">
-      <a:defRPr sz="1200" kern="1200">
-        <a:solidFill>
-          <a:schemeClr val="tx1"/>
-        </a:solidFill>
-        <a:latin typeface="+mn-lt"/>
-        <a:ea typeface="+mn-ea"/>
-        <a:cs typeface="+mn-cs"/>
-      </a:defRPr>
-    </a:lvl2pPr>
-    <a:lvl3pPr marL="914400" algn="l" defTabSz="914400" rtl="0" eaLnBrk="1" latinLnBrk="0" hangingPunct="1">
-      <a:defRPr sz="1200" kern="1200">
-        <a:solidFill>
-          <a:schemeClr val="tx1"/>
-        </a:solidFill>
-        <a:latin typeface="+mn-lt"/>
-        <a:ea typeface="+mn-ea"/>
-        <a:cs typeface="+mn-cs"/>
-      </a:defRPr>
-    </a:lvl3pPr>
-    <a:lvl4pPr marL="1371600" algn="l" defTabSz="914400" rtl="0" eaLnBrk="1" latinLnBrk="0" hangingPunct="1">
-      <a:defRPr sz="1200" kern="1200">
-        <a:solidFill>
-          <a:schemeClr val="tx1"/>
-        </a:solidFill>
-        <a:latin typeface="+mn-lt"/>
-        <a:ea typeface="+mn-ea"/>
-        <a:cs typeface="+mn-cs"/>
-      </a:defRPr>
-    </a:lvl4pPr>
-    <a:lvl5pPr marL="1828800" algn="l" defTabSz="914400" rtl="0" eaLnBrk="1" latinLnBrk="0" hangingPunct="1">
-      <a:defRPr sz="1200" kern="1200">
-        <a:solidFill>
-          <a:schemeClr val="tx1"/>
-        </a:solidFill>
-        <a:latin typeface="+mn-lt"/>
-        <a:ea typeface="+mn-ea"/>
-        <a:cs typeface="+mn-cs"/>
-      </a:defRPr>
-    </a:lvl5pPr>
-    <a:lvl6pPr marL="2286000" algn="l" defTabSz="914400" rtl="0" eaLnBrk="1" latinLnBrk="0" hangingPunct="1">
-      <a:defRPr sz="1200" kern="1200">
-        <a:solidFill>
-          <a:schemeClr val="tx1"/>
-        </a:solidFill>
-        <a:latin typeface="+mn-lt"/>
-        <a:ea typeface="+mn-ea"/>
-        <a:cs typeface="+mn-cs"/>
-      </a:defRPr>
-    </a:lvl6pPr>
-    <a:lvl7pPr marL="2743200" algn="l" defTabSz="914400" rtl="0" eaLnBrk="1" latinLnBrk="0" hangingPunct="1">
-      <a:defRPr sz="1200" kern="1200">
-        <a:solidFill>
-          <a:schemeClr val="tx1"/>
-        </a:solidFill>
-        <a:latin typeface="+mn-lt"/>
-        <a:ea typeface="+mn-ea"/>
-        <a:cs typeface="+mn-cs"/>
-      </a:defRPr>
-    </a:lvl7pPr>
-    <a:lvl8pPr marL="3200400" algn="l" defTabSz="914400" rtl="0" eaLnBrk="1" latinLnBrk="0" hangingPunct="1">
-      <a:defRPr sz="1200" kern="1200">
-        <a:solidFill>
-          <a:schemeClr val="tx1"/>
-        </a:solidFill>
-        <a:latin typeface="+mn-lt"/>
-        <a:ea typeface="+mn-ea"/>
-        <a:cs typeface="+mn-cs"/>
-      </a:defRPr>
-    </a:lvl8pPr>
-    <a:lvl9pPr marL="3657600" algn="l" defTabSz="914400" rtl="0" eaLnBrk="1" latinLnBrk="0" hangingPunct="1">
-      <a:defRPr sz="1200" kern="1200">
-        <a:solidFill>
-          <a:schemeClr val="tx1"/>
-        </a:solidFill>
-        <a:latin typeface="+mn-lt"/>
-        <a:ea typeface="+mn-ea"/>
-        <a:cs typeface="+mn-cs"/>
-      </a:defRPr>
-    </a:lvl9pPr>
-  </p:notesStyle>
-</p:notesMaster>
 </file>
 
 <file path=ppt/slideLayouts/slideLayout1.xml><?xml version="1.0" encoding="utf-8"?>
@@ -792,6 +445,7 @@
         <a:solidFill>
           <a:srgbClr val="F0EEE6"/>
         </a:solidFill>
+        <a:effectLst/>
       </p:bgPr>
     </p:bg>
     <p:spTree>
@@ -827,6 +481,13 @@
           </a:solidFill>
           <a:ln/>
         </p:spPr>
+        <p:txBody>
+          <a:bodyPr/>
+          <a:lstStyle/>
+          <a:p>
+            <a:endParaRPr lang="en-US"/>
+          </a:p>
+        </p:txBody>
       </p:sp>
       <p:sp>
         <p:nvSpPr>
@@ -847,17 +508,24 @@
           </a:solidFill>
           <a:ln/>
         </p:spPr>
+        <p:txBody>
+          <a:bodyPr/>
+          <a:lstStyle/>
+          <a:p>
+            <a:endParaRPr lang="en-US"/>
+          </a:p>
+        </p:txBody>
       </p:sp>
       <p:pic>
         <p:nvPicPr>
-          <p:cNvPr id="4" name="Image 0" descr="preencoded.png">    </p:cNvPr>
+          <p:cNvPr id="4" name="Image 0" descr="preencoded.png"/>
           <p:cNvPicPr>
             <a:picLocks noChangeAspect="1"/>
           </p:cNvPicPr>
           <p:nvPr/>
         </p:nvPicPr>
         <p:blipFill>
-          <a:blip r:embed="rId1"/>
+          <a:blip r:embed="rId2"/>
           <a:stretch>
             <a:fillRect/>
           </a:stretch>
@@ -893,11 +561,11 @@
           <a:bodyPr wrap="square" lIns="0" tIns="0" rIns="0" bIns="0" rtlCol="0" anchor="ctr"/>
           <a:lstStyle/>
           <a:p>
-            <a:pPr indent="0" marL="0">
-              <a:buNone/>
-            </a:pPr>
-            <a:r>
-              <a:rPr lang="en-US" sz="1400" b="1" spc="300" kern="0" dirty="0">
+            <a:pPr marL="0" indent="0">
+              <a:buNone/>
+            </a:pPr>
+            <a:r>
+              <a:rPr lang="en-US" sz="1400" b="1" kern="0" spc="300" dirty="0">
                 <a:solidFill>
                   <a:srgbClr val="D97757"/>
                 </a:solidFill>
@@ -932,7 +600,7 @@
           <a:bodyPr wrap="square" lIns="0" tIns="0" rIns="0" bIns="0" rtlCol="0" anchor="ctr"/>
           <a:lstStyle/>
           <a:p>
-            <a:pPr indent="0" marL="0">
+            <a:pPr marL="0" indent="0">
               <a:lnSpc>
                 <a:spcPct val="98000"/>
               </a:lnSpc>
@@ -952,7 +620,7 @@
             <a:endParaRPr lang="en-US" sz="5400" dirty="0"/>
           </a:p>
           <a:p>
-            <a:pPr indent="0" marL="0">
+            <a:pPr marL="0" indent="0">
               <a:lnSpc>
                 <a:spcPct val="98000"/>
               </a:lnSpc>
@@ -995,6 +663,13 @@
             <a:prstDash val="solid"/>
           </a:ln>
         </p:spPr>
+        <p:txBody>
+          <a:bodyPr/>
+          <a:lstStyle/>
+          <a:p>
+            <a:endParaRPr lang="en-US"/>
+          </a:p>
+        </p:txBody>
       </p:sp>
       <p:sp>
         <p:nvSpPr>
@@ -1017,7 +692,7 @@
           <a:bodyPr wrap="square" lIns="0" tIns="0" rIns="0" bIns="0" rtlCol="0" anchor="ctr"/>
           <a:lstStyle/>
           <a:p>
-            <a:pPr indent="0" marL="0">
+            <a:pPr marL="0" indent="0">
               <a:buNone/>
             </a:pPr>
             <a:r>
@@ -1032,45 +707,6 @@
               <a:t>105 min  ·  50 lecture / demo  +  55 lab</a:t>
             </a:r>
             <a:endParaRPr lang="en-US" sz="1700" dirty="0"/>
-          </a:p>
-        </p:txBody>
-      </p:sp>
-      <p:sp>
-        <p:nvSpPr>
-          <p:cNvPr id="9" name="Text 6"/>
-          <p:cNvSpPr/>
-          <p:nvPr/>
-        </p:nvSpPr>
-        <p:spPr>
-          <a:xfrm>
-            <a:off x="640080" y="4462272"/>
-            <a:ext cx="8046720" cy="292608"/>
-          </a:xfrm>
-          <a:prstGeom prst="rect">
-            <a:avLst/>
-          </a:prstGeom>
-          <a:noFill/>
-          <a:ln/>
-        </p:spPr>
-        <p:txBody>
-          <a:bodyPr wrap="square" lIns="0" tIns="0" rIns="0" bIns="0" rtlCol="0" anchor="ctr"/>
-          <a:lstStyle/>
-          <a:p>
-            <a:pPr indent="0" marL="0">
-              <a:buNone/>
-            </a:pPr>
-            <a:r>
-              <a:rPr lang="en-US" sz="1000" i="1" dirty="0">
-                <a:solidFill>
-                  <a:srgbClr val="615C52"/>
-                </a:solidFill>
-                <a:latin typeface="Inter" pitchFamily="34" charset="0"/>
-                <a:ea typeface="Inter" pitchFamily="34" charset="-122"/>
-                <a:cs typeface="Inter" pitchFamily="34" charset="-120"/>
-              </a:rPr>
-              <a:t>dotnetclaude.com  ·  .NET AI with Claude Workshop</a:t>
-            </a:r>
-            <a:endParaRPr lang="en-US" sz="1000" dirty="0"/>
           </a:p>
         </p:txBody>
       </p:sp>
@@ -1090,6 +726,7 @@
         <a:solidFill>
           <a:srgbClr val="F0EEE6"/>
         </a:solidFill>
+        <a:effectLst/>
       </p:bgPr>
     </p:bg>
     <p:spTree>
@@ -1127,11 +764,11 @@
           <a:bodyPr wrap="square" lIns="0" tIns="0" rIns="0" bIns="0" rtlCol="0" anchor="ctr"/>
           <a:lstStyle/>
           <a:p>
-            <a:pPr indent="0" marL="0">
-              <a:buNone/>
-            </a:pPr>
-            <a:r>
-              <a:rPr lang="en-US" sz="1100" b="1" spc="200" kern="0" dirty="0">
+            <a:pPr marL="0" indent="0">
+              <a:buNone/>
+            </a:pPr>
+            <a:r>
+              <a:rPr lang="en-US" sz="1100" b="1" kern="0" spc="200" dirty="0">
                 <a:solidFill>
                   <a:srgbClr val="D97757"/>
                 </a:solidFill>
@@ -1166,7 +803,7 @@
           <a:bodyPr wrap="square" lIns="0" tIns="0" rIns="0" bIns="0" rtlCol="0" anchor="ctr"/>
           <a:lstStyle/>
           <a:p>
-            <a:pPr indent="0" marL="0">
+            <a:pPr marL="0" indent="0">
               <a:buNone/>
             </a:pPr>
             <a:r>
@@ -1186,14 +823,14 @@
       </p:sp>
       <p:pic>
         <p:nvPicPr>
-          <p:cNvPr id="4" name="Image 0" descr="preencoded.png">    </p:cNvPr>
+          <p:cNvPr id="4" name="Image 0" descr="preencoded.png"/>
           <p:cNvPicPr>
             <a:picLocks noChangeAspect="1"/>
           </p:cNvPicPr>
           <p:nvPr/>
         </p:nvPicPr>
         <p:blipFill>
-          <a:blip r:embed="rId1"/>
+          <a:blip r:embed="rId2"/>
           <a:stretch>
             <a:fillRect/>
           </a:stretch>
@@ -1234,13 +871,20 @@
             <a:prstDash val="solid"/>
           </a:ln>
           <a:effectLst>
-            <a:outerShdw sx="100000" sy="100000" kx="0" ky="0" algn="bl" rotWithShape="0" blurRad="88900" dist="38100" dir="5400000">
+            <a:outerShdw blurRad="88900" dist="38100" dir="5400000" algn="bl" rotWithShape="0">
               <a:srgbClr val="000000">
                 <a:alpha val="10000"/>
               </a:srgbClr>
             </a:outerShdw>
           </a:effectLst>
         </p:spPr>
+        <p:txBody>
+          <a:bodyPr/>
+          <a:lstStyle/>
+          <a:p>
+            <a:endParaRPr lang="en-US"/>
+          </a:p>
+        </p:txBody>
       </p:sp>
       <p:sp>
         <p:nvSpPr>
@@ -1261,17 +905,24 @@
           </a:solidFill>
           <a:ln/>
         </p:spPr>
+        <p:txBody>
+          <a:bodyPr/>
+          <a:lstStyle/>
+          <a:p>
+            <a:endParaRPr lang="en-US"/>
+          </a:p>
+        </p:txBody>
       </p:sp>
       <p:pic>
         <p:nvPicPr>
-          <p:cNvPr id="7" name="Image 1" descr="preencoded.png">    </p:cNvPr>
+          <p:cNvPr id="7" name="Image 1" descr="preencoded.png"/>
           <p:cNvPicPr>
             <a:picLocks noChangeAspect="1"/>
           </p:cNvPicPr>
           <p:nvPr/>
         </p:nvPicPr>
         <p:blipFill>
-          <a:blip r:embed="rId2"/>
+          <a:blip r:embed="rId3"/>
           <a:stretch>
             <a:fillRect/>
           </a:stretch>
@@ -1307,7 +958,7 @@
           <a:bodyPr wrap="square" lIns="0" tIns="0" rIns="0" bIns="0" rtlCol="0" anchor="ctr"/>
           <a:lstStyle/>
           <a:p>
-            <a:pPr algn="ctr" indent="0" marL="0">
+            <a:pPr marL="0" indent="0" algn="ctr">
               <a:buNone/>
             </a:pPr>
             <a:r>
@@ -1346,7 +997,7 @@
           <a:bodyPr wrap="square" lIns="0" tIns="0" rIns="0" bIns="0" rtlCol="0" anchor="ctr"/>
           <a:lstStyle/>
           <a:p>
-            <a:pPr algn="ctr" indent="0" marL="0">
+            <a:pPr marL="0" indent="0" algn="ctr">
               <a:buNone/>
             </a:pPr>
             <a:r>
@@ -1385,7 +1036,7 @@
           <a:bodyPr wrap="square" lIns="0" tIns="0" rIns="0" bIns="0" rtlCol="0" anchor="ctr"/>
           <a:lstStyle/>
           <a:p>
-            <a:pPr algn="ctr" indent="0" marL="0">
+            <a:pPr marL="0" indent="0" algn="ctr">
               <a:buNone/>
             </a:pPr>
             <a:r>
@@ -1429,13 +1080,20 @@
             <a:prstDash val="solid"/>
           </a:ln>
           <a:effectLst>
-            <a:outerShdw sx="100000" sy="100000" kx="0" ky="0" algn="bl" rotWithShape="0" blurRad="88900" dist="38100" dir="5400000">
+            <a:outerShdw blurRad="88900" dist="38100" dir="5400000" algn="bl" rotWithShape="0">
               <a:srgbClr val="000000">
                 <a:alpha val="10000"/>
               </a:srgbClr>
             </a:outerShdw>
           </a:effectLst>
         </p:spPr>
+        <p:txBody>
+          <a:bodyPr/>
+          <a:lstStyle/>
+          <a:p>
+            <a:endParaRPr lang="en-US"/>
+          </a:p>
+        </p:txBody>
       </p:sp>
       <p:sp>
         <p:nvSpPr>
@@ -1456,17 +1114,24 @@
           </a:solidFill>
           <a:ln/>
         </p:spPr>
+        <p:txBody>
+          <a:bodyPr/>
+          <a:lstStyle/>
+          <a:p>
+            <a:endParaRPr lang="en-US"/>
+          </a:p>
+        </p:txBody>
       </p:sp>
       <p:pic>
         <p:nvPicPr>
-          <p:cNvPr id="13" name="Image 2" descr="preencoded.png">    </p:cNvPr>
+          <p:cNvPr id="13" name="Image 2" descr="preencoded.png"/>
           <p:cNvPicPr>
             <a:picLocks noChangeAspect="1"/>
           </p:cNvPicPr>
           <p:nvPr/>
         </p:nvPicPr>
         <p:blipFill>
-          <a:blip r:embed="rId3"/>
+          <a:blip r:embed="rId4"/>
           <a:stretch>
             <a:fillRect/>
           </a:stretch>
@@ -1502,7 +1167,7 @@
           <a:bodyPr wrap="square" lIns="0" tIns="0" rIns="0" bIns="0" rtlCol="0" anchor="ctr"/>
           <a:lstStyle/>
           <a:p>
-            <a:pPr algn="ctr" indent="0" marL="0">
+            <a:pPr marL="0" indent="0" algn="ctr">
               <a:buNone/>
             </a:pPr>
             <a:r>
@@ -1541,7 +1206,7 @@
           <a:bodyPr wrap="square" lIns="0" tIns="0" rIns="0" bIns="0" rtlCol="0" anchor="ctr"/>
           <a:lstStyle/>
           <a:p>
-            <a:pPr algn="ctr" indent="0" marL="0">
+            <a:pPr marL="0" indent="0" algn="ctr">
               <a:buNone/>
             </a:pPr>
             <a:r>
@@ -1580,7 +1245,7 @@
           <a:bodyPr wrap="square" lIns="0" tIns="0" rIns="0" bIns="0" rtlCol="0" anchor="ctr"/>
           <a:lstStyle/>
           <a:p>
-            <a:pPr algn="ctr" indent="0" marL="0">
+            <a:pPr marL="0" indent="0" algn="ctr">
               <a:buNone/>
             </a:pPr>
             <a:r>
@@ -1624,13 +1289,20 @@
             <a:prstDash val="solid"/>
           </a:ln>
           <a:effectLst>
-            <a:outerShdw sx="100000" sy="100000" kx="0" ky="0" algn="bl" rotWithShape="0" blurRad="88900" dist="38100" dir="5400000">
+            <a:outerShdw blurRad="88900" dist="38100" dir="5400000" algn="bl" rotWithShape="0">
               <a:srgbClr val="000000">
                 <a:alpha val="10000"/>
               </a:srgbClr>
             </a:outerShdw>
           </a:effectLst>
         </p:spPr>
+        <p:txBody>
+          <a:bodyPr/>
+          <a:lstStyle/>
+          <a:p>
+            <a:endParaRPr lang="en-US"/>
+          </a:p>
+        </p:txBody>
       </p:sp>
       <p:sp>
         <p:nvSpPr>
@@ -1651,17 +1323,24 @@
           </a:solidFill>
           <a:ln/>
         </p:spPr>
+        <p:txBody>
+          <a:bodyPr/>
+          <a:lstStyle/>
+          <a:p>
+            <a:endParaRPr lang="en-US"/>
+          </a:p>
+        </p:txBody>
       </p:sp>
       <p:pic>
         <p:nvPicPr>
-          <p:cNvPr id="19" name="Image 3" descr="preencoded.png">    </p:cNvPr>
+          <p:cNvPr id="19" name="Image 3" descr="preencoded.png"/>
           <p:cNvPicPr>
             <a:picLocks noChangeAspect="1"/>
           </p:cNvPicPr>
           <p:nvPr/>
         </p:nvPicPr>
         <p:blipFill>
-          <a:blip r:embed="rId4"/>
+          <a:blip r:embed="rId5"/>
           <a:stretch>
             <a:fillRect/>
           </a:stretch>
@@ -1697,7 +1376,7 @@
           <a:bodyPr wrap="square" lIns="0" tIns="0" rIns="0" bIns="0" rtlCol="0" anchor="ctr"/>
           <a:lstStyle/>
           <a:p>
-            <a:pPr algn="ctr" indent="0" marL="0">
+            <a:pPr marL="0" indent="0" algn="ctr">
               <a:buNone/>
             </a:pPr>
             <a:r>
@@ -1736,7 +1415,7 @@
           <a:bodyPr wrap="square" lIns="0" tIns="0" rIns="0" bIns="0" rtlCol="0" anchor="ctr"/>
           <a:lstStyle/>
           <a:p>
-            <a:pPr algn="ctr" indent="0" marL="0">
+            <a:pPr marL="0" indent="0" algn="ctr">
               <a:buNone/>
             </a:pPr>
             <a:r>
@@ -1775,7 +1454,7 @@
           <a:bodyPr wrap="square" rtlCol="0" anchor="ctr"/>
           <a:lstStyle/>
           <a:p>
-            <a:pPr indent="0" marL="0">
+            <a:pPr marL="0" indent="0">
               <a:buNone/>
             </a:pPr>
             <a:r>
@@ -1814,7 +1493,7 @@
           <a:bodyPr wrap="square" rtlCol="0" anchor="ctr"/>
           <a:lstStyle/>
           <a:p>
-            <a:pPr algn="r" indent="0" marL="0">
+            <a:pPr marL="0" indent="0" algn="r">
               <a:buNone/>
             </a:pPr>
             <a:r>
@@ -1829,45 +1508,6 @@
               <a:t>Section 2  ·  10/14</a:t>
             </a:r>
             <a:endParaRPr lang="en-US" sz="900" dirty="0"/>
-          </a:p>
-        </p:txBody>
-      </p:sp>
-      <p:sp>
-        <p:nvSpPr>
-          <p:cNvPr id="24" name="Text 18"/>
-          <p:cNvSpPr/>
-          <p:nvPr/>
-        </p:nvSpPr>
-        <p:spPr>
-          <a:xfrm>
-            <a:off x="548640" y="4462272"/>
-            <a:ext cx="8046720" cy="274320"/>
-          </a:xfrm>
-          <a:prstGeom prst="rect">
-            <a:avLst/>
-          </a:prstGeom>
-          <a:noFill/>
-          <a:ln/>
-        </p:spPr>
-        <p:txBody>
-          <a:bodyPr wrap="square" lIns="0" tIns="0" rIns="0" bIns="0" rtlCol="0" anchor="ctr"/>
-          <a:lstStyle/>
-          <a:p>
-            <a:pPr indent="0" marL="0">
-              <a:buNone/>
-            </a:pPr>
-            <a:r>
-              <a:rPr lang="en-US" sz="1000" i="1" dirty="0">
-                <a:solidFill>
-                  <a:srgbClr val="615C52"/>
-                </a:solidFill>
-                <a:latin typeface="Inter" pitchFamily="34" charset="0"/>
-                <a:ea typeface="Inter" pitchFamily="34" charset="-122"/>
-                <a:cs typeface="Inter" pitchFamily="34" charset="-120"/>
-              </a:rPr>
-              <a:t>▸ Parallelism without losing your place — fire off work and carry on.</a:t>
-            </a:r>
-            <a:endParaRPr lang="en-US" sz="1000" dirty="0"/>
           </a:p>
         </p:txBody>
       </p:sp>
@@ -1887,6 +1527,7 @@
         <a:solidFill>
           <a:srgbClr val="F0EEE6"/>
         </a:solidFill>
+        <a:effectLst/>
       </p:bgPr>
     </p:bg>
     <p:spTree>
@@ -1924,11 +1565,11 @@
           <a:bodyPr wrap="square" lIns="0" tIns="0" rIns="0" bIns="0" rtlCol="0" anchor="ctr"/>
           <a:lstStyle/>
           <a:p>
-            <a:pPr indent="0" marL="0">
-              <a:buNone/>
-            </a:pPr>
-            <a:r>
-              <a:rPr lang="en-US" sz="1100" b="1" spc="200" kern="0" dirty="0">
+            <a:pPr marL="0" indent="0">
+              <a:buNone/>
+            </a:pPr>
+            <a:r>
+              <a:rPr lang="en-US" sz="1100" b="1" kern="0" spc="200" dirty="0">
                 <a:solidFill>
                   <a:srgbClr val="D97757"/>
                 </a:solidFill>
@@ -1963,7 +1604,7 @@
           <a:bodyPr wrap="square" lIns="0" tIns="0" rIns="0" bIns="0" rtlCol="0" anchor="ctr"/>
           <a:lstStyle/>
           <a:p>
-            <a:pPr indent="0" marL="0">
+            <a:pPr marL="0" indent="0">
               <a:buNone/>
             </a:pPr>
             <a:r>
@@ -1983,404 +1624,7 @@
       </p:sp>
       <p:pic>
         <p:nvPicPr>
-          <p:cNvPr id="4" name="Image 0" descr="preencoded.png">    </p:cNvPr>
-          <p:cNvPicPr>
-            <a:picLocks noChangeAspect="1"/>
-          </p:cNvPicPr>
-          <p:nvPr/>
-        </p:nvPicPr>
-        <p:blipFill>
-          <a:blip r:embed="rId1"/>
-          <a:stretch>
-            <a:fillRect/>
-          </a:stretch>
-        </p:blipFill>
-        <p:spPr>
-          <a:xfrm>
-            <a:off x="8339328" y="402336"/>
-            <a:ext cx="310896" cy="310896"/>
-          </a:xfrm>
-          <a:prstGeom prst="rect">
-            <a:avLst/>
-          </a:prstGeom>
-        </p:spPr>
-      </p:pic>
-      <p:sp>
-        <p:nvSpPr>
-          <p:cNvPr id="5" name="Text 2"/>
-          <p:cNvSpPr/>
-          <p:nvPr/>
-        </p:nvSpPr>
-        <p:spPr>
-          <a:xfrm>
-            <a:off x="548640" y="1371600"/>
-            <a:ext cx="3657600" cy="274320"/>
-          </a:xfrm>
-          <a:prstGeom prst="rect">
-            <a:avLst/>
-          </a:prstGeom>
-          <a:noFill/>
-          <a:ln/>
-        </p:spPr>
-        <p:txBody>
-          <a:bodyPr wrap="square" lIns="0" tIns="0" rIns="0" bIns="0" rtlCol="0" anchor="ctr"/>
-          <a:lstStyle/>
-          <a:p>
-            <a:pPr indent="0" marL="0">
-              <a:buNone/>
-            </a:pPr>
-            <a:r>
-              <a:rPr lang="en-US" sz="1100" b="1" spc="100" kern="0" dirty="0">
-                <a:solidFill>
-                  <a:srgbClr val="D97757"/>
-                </a:solidFill>
-                <a:latin typeface="Inter" pitchFamily="34" charset="0"/>
-                <a:ea typeface="Inter" pitchFamily="34" charset="-122"/>
-                <a:cs typeface="Inter" pitchFamily="34" charset="-120"/>
-              </a:rPr>
-              <a:t>EVENTS</a:t>
-            </a:r>
-            <a:endParaRPr lang="en-US" sz="1100" dirty="0"/>
-          </a:p>
-        </p:txBody>
-      </p:sp>
-      <p:sp>
-        <p:nvSpPr>
-          <p:cNvPr id="6" name="Shape 3"/>
-          <p:cNvSpPr/>
-          <p:nvPr/>
-        </p:nvSpPr>
-        <p:spPr>
-          <a:xfrm>
-            <a:off x="566928" y="1746504"/>
-            <a:ext cx="109728" cy="109728"/>
-          </a:xfrm>
-          <a:prstGeom prst="ellipse">
-            <a:avLst/>
-          </a:prstGeom>
-          <a:solidFill>
-            <a:srgbClr val="D97757"/>
-          </a:solidFill>
-          <a:ln/>
-        </p:spPr>
-      </p:sp>
-      <p:sp>
-        <p:nvSpPr>
-          <p:cNvPr id="7" name="Text 4"/>
-          <p:cNvSpPr/>
-          <p:nvPr/>
-        </p:nvSpPr>
-        <p:spPr>
-          <a:xfrm>
-            <a:off x="804672" y="1691640"/>
-            <a:ext cx="2743200" cy="274320"/>
-          </a:xfrm>
-          <a:prstGeom prst="rect">
-            <a:avLst/>
-          </a:prstGeom>
-          <a:noFill/>
-          <a:ln/>
-        </p:spPr>
-        <p:txBody>
-          <a:bodyPr wrap="square" lIns="0" tIns="0" rIns="0" bIns="0" rtlCol="0" anchor="ctr"/>
-          <a:lstStyle/>
-          <a:p>
-            <a:pPr indent="0" marL="0">
-              <a:buNone/>
-            </a:pPr>
-            <a:r>
-              <a:rPr lang="en-US" sz="1400" dirty="0">
-                <a:solidFill>
-                  <a:srgbClr val="141413"/>
-                </a:solidFill>
-                <a:latin typeface="Courier New" pitchFamily="34" charset="0"/>
-                <a:ea typeface="Courier New" pitchFamily="34" charset="-122"/>
-                <a:cs typeface="Courier New" pitchFamily="34" charset="-120"/>
-              </a:rPr>
-              <a:t>SessionStart</a:t>
-            </a:r>
-            <a:endParaRPr lang="en-US" sz="1400" dirty="0"/>
-          </a:p>
-        </p:txBody>
-      </p:sp>
-      <p:sp>
-        <p:nvSpPr>
-          <p:cNvPr id="8" name="Shape 5"/>
-          <p:cNvSpPr/>
-          <p:nvPr/>
-        </p:nvSpPr>
-        <p:spPr>
-          <a:xfrm>
-            <a:off x="566928" y="2130552"/>
-            <a:ext cx="109728" cy="109728"/>
-          </a:xfrm>
-          <a:prstGeom prst="ellipse">
-            <a:avLst/>
-          </a:prstGeom>
-          <a:solidFill>
-            <a:srgbClr val="D97757"/>
-          </a:solidFill>
-          <a:ln/>
-        </p:spPr>
-      </p:sp>
-      <p:sp>
-        <p:nvSpPr>
-          <p:cNvPr id="9" name="Text 6"/>
-          <p:cNvSpPr/>
-          <p:nvPr/>
-        </p:nvSpPr>
-        <p:spPr>
-          <a:xfrm>
-            <a:off x="804672" y="2075688"/>
-            <a:ext cx="2743200" cy="274320"/>
-          </a:xfrm>
-          <a:prstGeom prst="rect">
-            <a:avLst/>
-          </a:prstGeom>
-          <a:noFill/>
-          <a:ln/>
-        </p:spPr>
-        <p:txBody>
-          <a:bodyPr wrap="square" lIns="0" tIns="0" rIns="0" bIns="0" rtlCol="0" anchor="ctr"/>
-          <a:lstStyle/>
-          <a:p>
-            <a:pPr indent="0" marL="0">
-              <a:buNone/>
-            </a:pPr>
-            <a:r>
-              <a:rPr lang="en-US" sz="1400" dirty="0">
-                <a:solidFill>
-                  <a:srgbClr val="141413"/>
-                </a:solidFill>
-                <a:latin typeface="Courier New" pitchFamily="34" charset="0"/>
-                <a:ea typeface="Courier New" pitchFamily="34" charset="-122"/>
-                <a:cs typeface="Courier New" pitchFamily="34" charset="-120"/>
-              </a:rPr>
-              <a:t>PreToolUse</a:t>
-            </a:r>
-            <a:endParaRPr lang="en-US" sz="1400" dirty="0"/>
-          </a:p>
-        </p:txBody>
-      </p:sp>
-      <p:sp>
-        <p:nvSpPr>
-          <p:cNvPr id="10" name="Shape 7"/>
-          <p:cNvSpPr/>
-          <p:nvPr/>
-        </p:nvSpPr>
-        <p:spPr>
-          <a:xfrm>
-            <a:off x="566928" y="2514600"/>
-            <a:ext cx="109728" cy="109728"/>
-          </a:xfrm>
-          <a:prstGeom prst="ellipse">
-            <a:avLst/>
-          </a:prstGeom>
-          <a:solidFill>
-            <a:srgbClr val="D97757"/>
-          </a:solidFill>
-          <a:ln/>
-        </p:spPr>
-      </p:sp>
-      <p:sp>
-        <p:nvSpPr>
-          <p:cNvPr id="11" name="Text 8"/>
-          <p:cNvSpPr/>
-          <p:nvPr/>
-        </p:nvSpPr>
-        <p:spPr>
-          <a:xfrm>
-            <a:off x="804672" y="2459736"/>
-            <a:ext cx="2743200" cy="274320"/>
-          </a:xfrm>
-          <a:prstGeom prst="rect">
-            <a:avLst/>
-          </a:prstGeom>
-          <a:noFill/>
-          <a:ln/>
-        </p:spPr>
-        <p:txBody>
-          <a:bodyPr wrap="square" lIns="0" tIns="0" rIns="0" bIns="0" rtlCol="0" anchor="ctr"/>
-          <a:lstStyle/>
-          <a:p>
-            <a:pPr indent="0" marL="0">
-              <a:buNone/>
-            </a:pPr>
-            <a:r>
-              <a:rPr lang="en-US" sz="1400" dirty="0">
-                <a:solidFill>
-                  <a:srgbClr val="141413"/>
-                </a:solidFill>
-                <a:latin typeface="Courier New" pitchFamily="34" charset="0"/>
-                <a:ea typeface="Courier New" pitchFamily="34" charset="-122"/>
-                <a:cs typeface="Courier New" pitchFamily="34" charset="-120"/>
-              </a:rPr>
-              <a:t>PostToolUse</a:t>
-            </a:r>
-            <a:endParaRPr lang="en-US" sz="1400" dirty="0"/>
-          </a:p>
-        </p:txBody>
-      </p:sp>
-      <p:sp>
-        <p:nvSpPr>
-          <p:cNvPr id="12" name="Shape 9"/>
-          <p:cNvSpPr/>
-          <p:nvPr/>
-        </p:nvSpPr>
-        <p:spPr>
-          <a:xfrm>
-            <a:off x="566928" y="2898648"/>
-            <a:ext cx="109728" cy="109728"/>
-          </a:xfrm>
-          <a:prstGeom prst="ellipse">
-            <a:avLst/>
-          </a:prstGeom>
-          <a:solidFill>
-            <a:srgbClr val="D97757"/>
-          </a:solidFill>
-          <a:ln/>
-        </p:spPr>
-      </p:sp>
-      <p:sp>
-        <p:nvSpPr>
-          <p:cNvPr id="13" name="Text 10"/>
-          <p:cNvSpPr/>
-          <p:nvPr/>
-        </p:nvSpPr>
-        <p:spPr>
-          <a:xfrm>
-            <a:off x="804672" y="2843784"/>
-            <a:ext cx="2743200" cy="274320"/>
-          </a:xfrm>
-          <a:prstGeom prst="rect">
-            <a:avLst/>
-          </a:prstGeom>
-          <a:noFill/>
-          <a:ln/>
-        </p:spPr>
-        <p:txBody>
-          <a:bodyPr wrap="square" lIns="0" tIns="0" rIns="0" bIns="0" rtlCol="0" anchor="ctr"/>
-          <a:lstStyle/>
-          <a:p>
-            <a:pPr indent="0" marL="0">
-              <a:buNone/>
-            </a:pPr>
-            <a:r>
-              <a:rPr lang="en-US" sz="1400" dirty="0">
-                <a:solidFill>
-                  <a:srgbClr val="141413"/>
-                </a:solidFill>
-                <a:latin typeface="Courier New" pitchFamily="34" charset="0"/>
-                <a:ea typeface="Courier New" pitchFamily="34" charset="-122"/>
-                <a:cs typeface="Courier New" pitchFamily="34" charset="-120"/>
-              </a:rPr>
-              <a:t>Stop</a:t>
-            </a:r>
-            <a:endParaRPr lang="en-US" sz="1400" dirty="0"/>
-          </a:p>
-        </p:txBody>
-      </p:sp>
-      <p:sp>
-        <p:nvSpPr>
-          <p:cNvPr id="14" name="Shape 11"/>
-          <p:cNvSpPr/>
-          <p:nvPr/>
-        </p:nvSpPr>
-        <p:spPr>
-          <a:xfrm>
-            <a:off x="566928" y="3282696"/>
-            <a:ext cx="109728" cy="109728"/>
-          </a:xfrm>
-          <a:prstGeom prst="ellipse">
-            <a:avLst/>
-          </a:prstGeom>
-          <a:solidFill>
-            <a:srgbClr val="D97757"/>
-          </a:solidFill>
-          <a:ln/>
-        </p:spPr>
-      </p:sp>
-      <p:sp>
-        <p:nvSpPr>
-          <p:cNvPr id="15" name="Text 12"/>
-          <p:cNvSpPr/>
-          <p:nvPr/>
-        </p:nvSpPr>
-        <p:spPr>
-          <a:xfrm>
-            <a:off x="804672" y="3227832"/>
-            <a:ext cx="2743200" cy="274320"/>
-          </a:xfrm>
-          <a:prstGeom prst="rect">
-            <a:avLst/>
-          </a:prstGeom>
-          <a:noFill/>
-          <a:ln/>
-        </p:spPr>
-        <p:txBody>
-          <a:bodyPr wrap="square" lIns="0" tIns="0" rIns="0" bIns="0" rtlCol="0" anchor="ctr"/>
-          <a:lstStyle/>
-          <a:p>
-            <a:pPr indent="0" marL="0">
-              <a:buNone/>
-            </a:pPr>
-            <a:r>
-              <a:rPr lang="en-US" sz="1400" dirty="0">
-                <a:solidFill>
-                  <a:srgbClr val="141413"/>
-                </a:solidFill>
-                <a:latin typeface="Courier New" pitchFamily="34" charset="0"/>
-                <a:ea typeface="Courier New" pitchFamily="34" charset="-122"/>
-                <a:cs typeface="Courier New" pitchFamily="34" charset="-120"/>
-              </a:rPr>
-              <a:t>PreCompact</a:t>
-            </a:r>
-            <a:endParaRPr lang="en-US" sz="1400" dirty="0"/>
-          </a:p>
-        </p:txBody>
-      </p:sp>
-      <p:sp>
-        <p:nvSpPr>
-          <p:cNvPr id="16" name="Text 13"/>
-          <p:cNvSpPr/>
-          <p:nvPr/>
-        </p:nvSpPr>
-        <p:spPr>
-          <a:xfrm>
-            <a:off x="4434840" y="1371600"/>
-            <a:ext cx="4114800" cy="274320"/>
-          </a:xfrm>
-          <a:prstGeom prst="rect">
-            <a:avLst/>
-          </a:prstGeom>
-          <a:noFill/>
-          <a:ln/>
-        </p:spPr>
-        <p:txBody>
-          <a:bodyPr wrap="square" lIns="0" tIns="0" rIns="0" bIns="0" rtlCol="0" anchor="ctr"/>
-          <a:lstStyle/>
-          <a:p>
-            <a:pPr indent="0" marL="0">
-              <a:buNone/>
-            </a:pPr>
-            <a:r>
-              <a:rPr lang="en-US" sz="1100" b="1" spc="100" kern="0" dirty="0">
-                <a:solidFill>
-                  <a:srgbClr val="D97757"/>
-                </a:solidFill>
-                <a:latin typeface="Inter" pitchFamily="34" charset="0"/>
-                <a:ea typeface="Inter" pitchFamily="34" charset="-122"/>
-                <a:cs typeface="Inter" pitchFamily="34" charset="-120"/>
-              </a:rPr>
-              <a:t>HOW THEY WORK</a:t>
-            </a:r>
-            <a:endParaRPr lang="en-US" sz="1100" dirty="0"/>
-          </a:p>
-        </p:txBody>
-      </p:sp>
-      <p:pic>
-        <p:nvPicPr>
-          <p:cNvPr id="17" name="Image 1" descr="preencoded.png">    </p:cNvPr>
+          <p:cNvPr id="4" name="Image 0" descr="preencoded.png"/>
           <p:cNvPicPr>
             <a:picLocks noChangeAspect="1"/>
           </p:cNvPicPr>
@@ -2394,8 +1638,8 @@
         </p:blipFill>
         <p:spPr>
           <a:xfrm>
-            <a:off x="4434840" y="1709928"/>
-            <a:ext cx="201168" cy="201168"/>
+            <a:off x="8339328" y="402336"/>
+            <a:ext cx="310896" cy="310896"/>
           </a:xfrm>
           <a:prstGeom prst="rect">
             <a:avLst/>
@@ -2404,14 +1648,14 @@
       </p:pic>
       <p:sp>
         <p:nvSpPr>
-          <p:cNvPr id="18" name="Text 14"/>
-          <p:cNvSpPr/>
-          <p:nvPr/>
-        </p:nvSpPr>
-        <p:spPr>
-          <a:xfrm>
-            <a:off x="4745736" y="1655064"/>
-            <a:ext cx="3931920" cy="365760"/>
+          <p:cNvPr id="5" name="Text 2"/>
+          <p:cNvSpPr/>
+          <p:nvPr/>
+        </p:nvSpPr>
+        <p:spPr>
+          <a:xfrm>
+            <a:off x="548640" y="1371600"/>
+            <a:ext cx="3657600" cy="274320"/>
           </a:xfrm>
           <a:prstGeom prst="rect">
             <a:avLst/>
@@ -2423,27 +1667,396 @@
           <a:bodyPr wrap="square" lIns="0" tIns="0" rIns="0" bIns="0" rtlCol="0" anchor="ctr"/>
           <a:lstStyle/>
           <a:p>
-            <a:pPr indent="0" marL="0">
-              <a:buNone/>
-            </a:pPr>
-            <a:r>
-              <a:rPr lang="en-US" sz="1350" dirty="0">
+            <a:pPr marL="0" indent="0">
+              <a:buNone/>
+            </a:pPr>
+            <a:r>
+              <a:rPr lang="en-US" sz="1100" b="1" kern="0" spc="100" dirty="0">
+                <a:solidFill>
+                  <a:srgbClr val="D97757"/>
+                </a:solidFill>
+                <a:latin typeface="Inter" pitchFamily="34" charset="0"/>
+                <a:ea typeface="Inter" pitchFamily="34" charset="-122"/>
+                <a:cs typeface="Inter" pitchFamily="34" charset="-120"/>
+              </a:rPr>
+              <a:t>EVENTS</a:t>
+            </a:r>
+            <a:endParaRPr lang="en-US" sz="1100" dirty="0"/>
+          </a:p>
+        </p:txBody>
+      </p:sp>
+      <p:sp>
+        <p:nvSpPr>
+          <p:cNvPr id="6" name="Shape 3"/>
+          <p:cNvSpPr/>
+          <p:nvPr/>
+        </p:nvSpPr>
+        <p:spPr>
+          <a:xfrm>
+            <a:off x="566928" y="1746504"/>
+            <a:ext cx="109728" cy="109728"/>
+          </a:xfrm>
+          <a:prstGeom prst="ellipse">
+            <a:avLst/>
+          </a:prstGeom>
+          <a:solidFill>
+            <a:srgbClr val="D97757"/>
+          </a:solidFill>
+          <a:ln/>
+        </p:spPr>
+        <p:txBody>
+          <a:bodyPr/>
+          <a:lstStyle/>
+          <a:p>
+            <a:endParaRPr lang="en-US"/>
+          </a:p>
+        </p:txBody>
+      </p:sp>
+      <p:sp>
+        <p:nvSpPr>
+          <p:cNvPr id="7" name="Text 4"/>
+          <p:cNvSpPr/>
+          <p:nvPr/>
+        </p:nvSpPr>
+        <p:spPr>
+          <a:xfrm>
+            <a:off x="804672" y="1691640"/>
+            <a:ext cx="2743200" cy="274320"/>
+          </a:xfrm>
+          <a:prstGeom prst="rect">
+            <a:avLst/>
+          </a:prstGeom>
+          <a:noFill/>
+          <a:ln/>
+        </p:spPr>
+        <p:txBody>
+          <a:bodyPr wrap="square" lIns="0" tIns="0" rIns="0" bIns="0" rtlCol="0" anchor="ctr"/>
+          <a:lstStyle/>
+          <a:p>
+            <a:pPr marL="0" indent="0">
+              <a:buNone/>
+            </a:pPr>
+            <a:r>
+              <a:rPr lang="en-US" sz="1400" dirty="0">
                 <a:solidFill>
                   <a:srgbClr val="141413"/>
                 </a:solidFill>
-                <a:latin typeface="Inter" pitchFamily="34" charset="0"/>
-                <a:ea typeface="Inter" pitchFamily="34" charset="-122"/>
-                <a:cs typeface="Inter" pitchFamily="34" charset="-120"/>
-              </a:rPr>
-              <a:t>Five hook types to choose from</a:t>
-            </a:r>
-            <a:endParaRPr lang="en-US" sz="1350" dirty="0"/>
+                <a:latin typeface="Courier New" pitchFamily="34" charset="0"/>
+                <a:ea typeface="Courier New" pitchFamily="34" charset="-122"/>
+                <a:cs typeface="Courier New" pitchFamily="34" charset="-120"/>
+              </a:rPr>
+              <a:t>SessionStart</a:t>
+            </a:r>
+            <a:endParaRPr lang="en-US" sz="1400" dirty="0"/>
+          </a:p>
+        </p:txBody>
+      </p:sp>
+      <p:sp>
+        <p:nvSpPr>
+          <p:cNvPr id="8" name="Shape 5"/>
+          <p:cNvSpPr/>
+          <p:nvPr/>
+        </p:nvSpPr>
+        <p:spPr>
+          <a:xfrm>
+            <a:off x="566928" y="2130552"/>
+            <a:ext cx="109728" cy="109728"/>
+          </a:xfrm>
+          <a:prstGeom prst="ellipse">
+            <a:avLst/>
+          </a:prstGeom>
+          <a:solidFill>
+            <a:srgbClr val="D97757"/>
+          </a:solidFill>
+          <a:ln/>
+        </p:spPr>
+        <p:txBody>
+          <a:bodyPr/>
+          <a:lstStyle/>
+          <a:p>
+            <a:endParaRPr lang="en-US"/>
+          </a:p>
+        </p:txBody>
+      </p:sp>
+      <p:sp>
+        <p:nvSpPr>
+          <p:cNvPr id="9" name="Text 6"/>
+          <p:cNvSpPr/>
+          <p:nvPr/>
+        </p:nvSpPr>
+        <p:spPr>
+          <a:xfrm>
+            <a:off x="804672" y="2075688"/>
+            <a:ext cx="2743200" cy="274320"/>
+          </a:xfrm>
+          <a:prstGeom prst="rect">
+            <a:avLst/>
+          </a:prstGeom>
+          <a:noFill/>
+          <a:ln/>
+        </p:spPr>
+        <p:txBody>
+          <a:bodyPr wrap="square" lIns="0" tIns="0" rIns="0" bIns="0" rtlCol="0" anchor="ctr"/>
+          <a:lstStyle/>
+          <a:p>
+            <a:pPr marL="0" indent="0">
+              <a:buNone/>
+            </a:pPr>
+            <a:r>
+              <a:rPr lang="en-US" sz="1400" dirty="0">
+                <a:solidFill>
+                  <a:srgbClr val="141413"/>
+                </a:solidFill>
+                <a:latin typeface="Courier New" pitchFamily="34" charset="0"/>
+                <a:ea typeface="Courier New" pitchFamily="34" charset="-122"/>
+                <a:cs typeface="Courier New" pitchFamily="34" charset="-120"/>
+              </a:rPr>
+              <a:t>PreToolUse</a:t>
+            </a:r>
+            <a:endParaRPr lang="en-US" sz="1400" dirty="0"/>
+          </a:p>
+        </p:txBody>
+      </p:sp>
+      <p:sp>
+        <p:nvSpPr>
+          <p:cNvPr id="10" name="Shape 7"/>
+          <p:cNvSpPr/>
+          <p:nvPr/>
+        </p:nvSpPr>
+        <p:spPr>
+          <a:xfrm>
+            <a:off x="566928" y="2514600"/>
+            <a:ext cx="109728" cy="109728"/>
+          </a:xfrm>
+          <a:prstGeom prst="ellipse">
+            <a:avLst/>
+          </a:prstGeom>
+          <a:solidFill>
+            <a:srgbClr val="D97757"/>
+          </a:solidFill>
+          <a:ln/>
+        </p:spPr>
+        <p:txBody>
+          <a:bodyPr/>
+          <a:lstStyle/>
+          <a:p>
+            <a:endParaRPr lang="en-US"/>
+          </a:p>
+        </p:txBody>
+      </p:sp>
+      <p:sp>
+        <p:nvSpPr>
+          <p:cNvPr id="11" name="Text 8"/>
+          <p:cNvSpPr/>
+          <p:nvPr/>
+        </p:nvSpPr>
+        <p:spPr>
+          <a:xfrm>
+            <a:off x="804672" y="2459736"/>
+            <a:ext cx="2743200" cy="274320"/>
+          </a:xfrm>
+          <a:prstGeom prst="rect">
+            <a:avLst/>
+          </a:prstGeom>
+          <a:noFill/>
+          <a:ln/>
+        </p:spPr>
+        <p:txBody>
+          <a:bodyPr wrap="square" lIns="0" tIns="0" rIns="0" bIns="0" rtlCol="0" anchor="ctr"/>
+          <a:lstStyle/>
+          <a:p>
+            <a:pPr marL="0" indent="0">
+              <a:buNone/>
+            </a:pPr>
+            <a:r>
+              <a:rPr lang="en-US" sz="1400" dirty="0">
+                <a:solidFill>
+                  <a:srgbClr val="141413"/>
+                </a:solidFill>
+                <a:latin typeface="Courier New" pitchFamily="34" charset="0"/>
+                <a:ea typeface="Courier New" pitchFamily="34" charset="-122"/>
+                <a:cs typeface="Courier New" pitchFamily="34" charset="-120"/>
+              </a:rPr>
+              <a:t>PostToolUse</a:t>
+            </a:r>
+            <a:endParaRPr lang="en-US" sz="1400" dirty="0"/>
+          </a:p>
+        </p:txBody>
+      </p:sp>
+      <p:sp>
+        <p:nvSpPr>
+          <p:cNvPr id="12" name="Shape 9"/>
+          <p:cNvSpPr/>
+          <p:nvPr/>
+        </p:nvSpPr>
+        <p:spPr>
+          <a:xfrm>
+            <a:off x="566928" y="2898648"/>
+            <a:ext cx="109728" cy="109728"/>
+          </a:xfrm>
+          <a:prstGeom prst="ellipse">
+            <a:avLst/>
+          </a:prstGeom>
+          <a:solidFill>
+            <a:srgbClr val="D97757"/>
+          </a:solidFill>
+          <a:ln/>
+        </p:spPr>
+        <p:txBody>
+          <a:bodyPr/>
+          <a:lstStyle/>
+          <a:p>
+            <a:endParaRPr lang="en-US"/>
+          </a:p>
+        </p:txBody>
+      </p:sp>
+      <p:sp>
+        <p:nvSpPr>
+          <p:cNvPr id="13" name="Text 10"/>
+          <p:cNvSpPr/>
+          <p:nvPr/>
+        </p:nvSpPr>
+        <p:spPr>
+          <a:xfrm>
+            <a:off x="804672" y="2843784"/>
+            <a:ext cx="2743200" cy="274320"/>
+          </a:xfrm>
+          <a:prstGeom prst="rect">
+            <a:avLst/>
+          </a:prstGeom>
+          <a:noFill/>
+          <a:ln/>
+        </p:spPr>
+        <p:txBody>
+          <a:bodyPr wrap="square" lIns="0" tIns="0" rIns="0" bIns="0" rtlCol="0" anchor="ctr"/>
+          <a:lstStyle/>
+          <a:p>
+            <a:pPr marL="0" indent="0">
+              <a:buNone/>
+            </a:pPr>
+            <a:r>
+              <a:rPr lang="en-US" sz="1400" dirty="0">
+                <a:solidFill>
+                  <a:srgbClr val="141413"/>
+                </a:solidFill>
+                <a:latin typeface="Courier New" pitchFamily="34" charset="0"/>
+                <a:ea typeface="Courier New" pitchFamily="34" charset="-122"/>
+                <a:cs typeface="Courier New" pitchFamily="34" charset="-120"/>
+              </a:rPr>
+              <a:t>Stop</a:t>
+            </a:r>
+            <a:endParaRPr lang="en-US" sz="1400" dirty="0"/>
+          </a:p>
+        </p:txBody>
+      </p:sp>
+      <p:sp>
+        <p:nvSpPr>
+          <p:cNvPr id="14" name="Shape 11"/>
+          <p:cNvSpPr/>
+          <p:nvPr/>
+        </p:nvSpPr>
+        <p:spPr>
+          <a:xfrm>
+            <a:off x="566928" y="3282696"/>
+            <a:ext cx="109728" cy="109728"/>
+          </a:xfrm>
+          <a:prstGeom prst="ellipse">
+            <a:avLst/>
+          </a:prstGeom>
+          <a:solidFill>
+            <a:srgbClr val="D97757"/>
+          </a:solidFill>
+          <a:ln/>
+        </p:spPr>
+        <p:txBody>
+          <a:bodyPr/>
+          <a:lstStyle/>
+          <a:p>
+            <a:endParaRPr lang="en-US"/>
+          </a:p>
+        </p:txBody>
+      </p:sp>
+      <p:sp>
+        <p:nvSpPr>
+          <p:cNvPr id="15" name="Text 12"/>
+          <p:cNvSpPr/>
+          <p:nvPr/>
+        </p:nvSpPr>
+        <p:spPr>
+          <a:xfrm>
+            <a:off x="804672" y="3227832"/>
+            <a:ext cx="2743200" cy="274320"/>
+          </a:xfrm>
+          <a:prstGeom prst="rect">
+            <a:avLst/>
+          </a:prstGeom>
+          <a:noFill/>
+          <a:ln/>
+        </p:spPr>
+        <p:txBody>
+          <a:bodyPr wrap="square" lIns="0" tIns="0" rIns="0" bIns="0" rtlCol="0" anchor="ctr"/>
+          <a:lstStyle/>
+          <a:p>
+            <a:pPr marL="0" indent="0">
+              <a:buNone/>
+            </a:pPr>
+            <a:r>
+              <a:rPr lang="en-US" sz="1400" dirty="0">
+                <a:solidFill>
+                  <a:srgbClr val="141413"/>
+                </a:solidFill>
+                <a:latin typeface="Courier New" pitchFamily="34" charset="0"/>
+                <a:ea typeface="Courier New" pitchFamily="34" charset="-122"/>
+                <a:cs typeface="Courier New" pitchFamily="34" charset="-120"/>
+              </a:rPr>
+              <a:t>PreCompact</a:t>
+            </a:r>
+            <a:endParaRPr lang="en-US" sz="1400" dirty="0"/>
+          </a:p>
+        </p:txBody>
+      </p:sp>
+      <p:sp>
+        <p:nvSpPr>
+          <p:cNvPr id="16" name="Text 13"/>
+          <p:cNvSpPr/>
+          <p:nvPr/>
+        </p:nvSpPr>
+        <p:spPr>
+          <a:xfrm>
+            <a:off x="4434840" y="1371600"/>
+            <a:ext cx="4114800" cy="274320"/>
+          </a:xfrm>
+          <a:prstGeom prst="rect">
+            <a:avLst/>
+          </a:prstGeom>
+          <a:noFill/>
+          <a:ln/>
+        </p:spPr>
+        <p:txBody>
+          <a:bodyPr wrap="square" lIns="0" tIns="0" rIns="0" bIns="0" rtlCol="0" anchor="ctr"/>
+          <a:lstStyle/>
+          <a:p>
+            <a:pPr marL="0" indent="0">
+              <a:buNone/>
+            </a:pPr>
+            <a:r>
+              <a:rPr lang="en-US" sz="1100" b="1" kern="0" spc="100" dirty="0">
+                <a:solidFill>
+                  <a:srgbClr val="D97757"/>
+                </a:solidFill>
+                <a:latin typeface="Inter" pitchFamily="34" charset="0"/>
+                <a:ea typeface="Inter" pitchFamily="34" charset="-122"/>
+                <a:cs typeface="Inter" pitchFamily="34" charset="-120"/>
+              </a:rPr>
+              <a:t>HOW THEY WORK</a:t>
+            </a:r>
+            <a:endParaRPr lang="en-US" sz="1100" dirty="0"/>
           </a:p>
         </p:txBody>
       </p:sp>
       <p:pic>
         <p:nvPicPr>
-          <p:cNvPr id="19" name="Image 2" descr="preencoded.png">    </p:cNvPr>
+          <p:cNvPr id="17" name="Image 1" descr="preencoded.png"/>
           <p:cNvPicPr>
             <a:picLocks noChangeAspect="1"/>
           </p:cNvPicPr>
@@ -2457,7 +2070,7 @@
         </p:blipFill>
         <p:spPr>
           <a:xfrm>
-            <a:off x="4434840" y="2212848"/>
+            <a:off x="4434840" y="1709928"/>
             <a:ext cx="201168" cy="201168"/>
           </a:xfrm>
           <a:prstGeom prst="rect">
@@ -2467,13 +2080,13 @@
       </p:pic>
       <p:sp>
         <p:nvSpPr>
-          <p:cNvPr id="20" name="Text 15"/>
-          <p:cNvSpPr/>
-          <p:nvPr/>
-        </p:nvSpPr>
-        <p:spPr>
-          <a:xfrm>
-            <a:off x="4745736" y="2157984"/>
+          <p:cNvPr id="18" name="Text 14"/>
+          <p:cNvSpPr/>
+          <p:nvPr/>
+        </p:nvSpPr>
+        <p:spPr>
+          <a:xfrm>
+            <a:off x="4745736" y="1655064"/>
             <a:ext cx="3931920" cy="365760"/>
           </a:xfrm>
           <a:prstGeom prst="rect">
@@ -2486,7 +2099,7 @@
           <a:bodyPr wrap="square" lIns="0" tIns="0" rIns="0" bIns="0" rtlCol="0" anchor="ctr"/>
           <a:lstStyle/>
           <a:p>
-            <a:pPr indent="0" marL="0">
+            <a:pPr marL="0" indent="0">
               <a:buNone/>
             </a:pPr>
             <a:r>
@@ -2498,7 +2111,7 @@
                 <a:ea typeface="Inter" pitchFamily="34" charset="-122"/>
                 <a:cs typeface="Inter" pitchFamily="34" charset="-120"/>
               </a:rPr>
-              <a:t>Register in settings.json or managed settings</a:t>
+              <a:t>Five hook types to choose from</a:t>
             </a:r>
             <a:endParaRPr lang="en-US" sz="1350" dirty="0"/>
           </a:p>
@@ -2506,20 +2119,83 @@
       </p:sp>
       <p:pic>
         <p:nvPicPr>
-          <p:cNvPr id="21" name="Image 3" descr="preencoded.png">    </p:cNvPr>
+          <p:cNvPr id="19" name="Image 2" descr="preencoded.png"/>
           <p:cNvPicPr>
             <a:picLocks noChangeAspect="1"/>
           </p:cNvPicPr>
           <p:nvPr/>
         </p:nvPicPr>
         <p:blipFill>
-          <a:blip r:embed="rId4"/>
+          <a:blip r:embed="rId3"/>
           <a:stretch>
             <a:fillRect/>
           </a:stretch>
         </p:blipFill>
         <p:spPr>
           <a:xfrm>
+            <a:off x="4434840" y="2212848"/>
+            <a:ext cx="201168" cy="201168"/>
+          </a:xfrm>
+          <a:prstGeom prst="rect">
+            <a:avLst/>
+          </a:prstGeom>
+        </p:spPr>
+      </p:pic>
+      <p:sp>
+        <p:nvSpPr>
+          <p:cNvPr id="20" name="Text 15"/>
+          <p:cNvSpPr/>
+          <p:nvPr/>
+        </p:nvSpPr>
+        <p:spPr>
+          <a:xfrm>
+            <a:off x="4745736" y="2157984"/>
+            <a:ext cx="3931920" cy="365760"/>
+          </a:xfrm>
+          <a:prstGeom prst="rect">
+            <a:avLst/>
+          </a:prstGeom>
+          <a:noFill/>
+          <a:ln/>
+        </p:spPr>
+        <p:txBody>
+          <a:bodyPr wrap="square" lIns="0" tIns="0" rIns="0" bIns="0" rtlCol="0" anchor="ctr"/>
+          <a:lstStyle/>
+          <a:p>
+            <a:pPr marL="0" indent="0">
+              <a:buNone/>
+            </a:pPr>
+            <a:r>
+              <a:rPr lang="en-US" sz="1350" dirty="0">
+                <a:solidFill>
+                  <a:srgbClr val="141413"/>
+                </a:solidFill>
+                <a:latin typeface="Inter" pitchFamily="34" charset="0"/>
+                <a:ea typeface="Inter" pitchFamily="34" charset="-122"/>
+                <a:cs typeface="Inter" pitchFamily="34" charset="-120"/>
+              </a:rPr>
+              <a:t>Register in settings.json or managed settings</a:t>
+            </a:r>
+            <a:endParaRPr lang="en-US" sz="1350" dirty="0"/>
+          </a:p>
+        </p:txBody>
+      </p:sp>
+      <p:pic>
+        <p:nvPicPr>
+          <p:cNvPr id="21" name="Image 3" descr="preencoded.png"/>
+          <p:cNvPicPr>
+            <a:picLocks noChangeAspect="1"/>
+          </p:cNvPicPr>
+          <p:nvPr/>
+        </p:nvPicPr>
+        <p:blipFill>
+          <a:blip r:embed="rId3"/>
+          <a:stretch>
+            <a:fillRect/>
+          </a:stretch>
+        </p:blipFill>
+        <p:spPr>
+          <a:xfrm>
             <a:off x="4434840" y="2715768"/>
             <a:ext cx="201168" cy="201168"/>
           </a:xfrm>
@@ -2549,7 +2225,7 @@
           <a:bodyPr wrap="square" lIns="0" tIns="0" rIns="0" bIns="0" rtlCol="0" anchor="ctr"/>
           <a:lstStyle/>
           <a:p>
-            <a:pPr indent="0" marL="0">
+            <a:pPr marL="0" indent="0">
               <a:buNone/>
             </a:pPr>
             <a:r>
@@ -2588,6 +2264,13 @@
           </a:solidFill>
           <a:ln/>
         </p:spPr>
+        <p:txBody>
+          <a:bodyPr/>
+          <a:lstStyle/>
+          <a:p>
+            <a:endParaRPr lang="en-US"/>
+          </a:p>
+        </p:txBody>
       </p:sp>
       <p:sp>
         <p:nvSpPr>
@@ -2610,7 +2293,7 @@
           <a:bodyPr wrap="square" lIns="0" tIns="0" rIns="0" bIns="0" rtlCol="0" anchor="ctr"/>
           <a:lstStyle/>
           <a:p>
-            <a:pPr indent="0" marL="0">
+            <a:pPr marL="0" indent="0">
               <a:buNone/>
             </a:pPr>
             <a:r>
@@ -2624,9 +2307,6 @@
               </a:rPr>
               <a:t>The real guardrail:  </a:t>
             </a:r>
-            <a:pPr indent="0" marL="0">
-              <a:buNone/>
-            </a:pPr>
             <a:r>
               <a:rPr lang="en-US" sz="1350" dirty="0">
                 <a:solidFill>
@@ -2663,7 +2343,7 @@
           <a:bodyPr wrap="square" rtlCol="0" anchor="ctr"/>
           <a:lstStyle/>
           <a:p>
-            <a:pPr indent="0" marL="0">
+            <a:pPr marL="0" indent="0">
               <a:buNone/>
             </a:pPr>
             <a:r>
@@ -2702,7 +2382,7 @@
           <a:bodyPr wrap="square" rtlCol="0" anchor="ctr"/>
           <a:lstStyle/>
           <a:p>
-            <a:pPr algn="r" indent="0" marL="0">
+            <a:pPr marL="0" indent="0" algn="r">
               <a:buNone/>
             </a:pPr>
             <a:r>
@@ -2717,45 +2397,6 @@
               <a:t>Section 2  ·  11/14</a:t>
             </a:r>
             <a:endParaRPr lang="en-US" sz="900" dirty="0"/>
-          </a:p>
-        </p:txBody>
-      </p:sp>
-      <p:sp>
-        <p:nvSpPr>
-          <p:cNvPr id="27" name="Text 21"/>
-          <p:cNvSpPr/>
-          <p:nvPr/>
-        </p:nvSpPr>
-        <p:spPr>
-          <a:xfrm>
-            <a:off x="548640" y="4462272"/>
-            <a:ext cx="8046720" cy="274320"/>
-          </a:xfrm>
-          <a:prstGeom prst="rect">
-            <a:avLst/>
-          </a:prstGeom>
-          <a:noFill/>
-          <a:ln/>
-        </p:spPr>
-        <p:txBody>
-          <a:bodyPr wrap="square" lIns="0" tIns="0" rIns="0" bIns="0" rtlCol="0" anchor="ctr"/>
-          <a:lstStyle/>
-          <a:p>
-            <a:pPr indent="0" marL="0">
-              <a:buNone/>
-            </a:pPr>
-            <a:r>
-              <a:rPr lang="en-US" sz="1000" i="1" dirty="0">
-                <a:solidFill>
-                  <a:srgbClr val="615C52"/>
-                </a:solidFill>
-                <a:latin typeface="Inter" pitchFamily="34" charset="0"/>
-                <a:ea typeface="Inter" pitchFamily="34" charset="-122"/>
-                <a:cs typeface="Inter" pitchFamily="34" charset="-120"/>
-              </a:rPr>
-              <a:t>▸ Hooks are code, so they're deterministic — the only true hard stop.</a:t>
-            </a:r>
-            <a:endParaRPr lang="en-US" sz="1000" dirty="0"/>
           </a:p>
         </p:txBody>
       </p:sp>
@@ -2775,6 +2416,7 @@
         <a:solidFill>
           <a:srgbClr val="F0EEE6"/>
         </a:solidFill>
+        <a:effectLst/>
       </p:bgPr>
     </p:bg>
     <p:spTree>
@@ -2812,11 +2454,11 @@
           <a:bodyPr wrap="square" lIns="0" tIns="0" rIns="0" bIns="0" rtlCol="0" anchor="ctr"/>
           <a:lstStyle/>
           <a:p>
-            <a:pPr indent="0" marL="0">
-              <a:buNone/>
-            </a:pPr>
-            <a:r>
-              <a:rPr lang="en-US" sz="1100" b="1" spc="200" kern="0" dirty="0">
+            <a:pPr marL="0" indent="0">
+              <a:buNone/>
+            </a:pPr>
+            <a:r>
+              <a:rPr lang="en-US" sz="1100" b="1" kern="0" spc="200" dirty="0">
                 <a:solidFill>
                   <a:srgbClr val="D97757"/>
                 </a:solidFill>
@@ -2851,7 +2493,7 @@
           <a:bodyPr wrap="square" lIns="0" tIns="0" rIns="0" bIns="0" rtlCol="0" anchor="ctr"/>
           <a:lstStyle/>
           <a:p>
-            <a:pPr indent="0" marL="0">
+            <a:pPr marL="0" indent="0">
               <a:buNone/>
             </a:pPr>
             <a:r>
@@ -2871,14 +2513,14 @@
       </p:sp>
       <p:pic>
         <p:nvPicPr>
-          <p:cNvPr id="4" name="Image 0" descr="preencoded.png">    </p:cNvPr>
+          <p:cNvPr id="4" name="Image 0" descr="preencoded.png"/>
           <p:cNvPicPr>
             <a:picLocks noChangeAspect="1"/>
           </p:cNvPicPr>
           <p:nvPr/>
         </p:nvPicPr>
         <p:blipFill>
-          <a:blip r:embed="rId1"/>
+          <a:blip r:embed="rId2"/>
           <a:stretch>
             <a:fillRect/>
           </a:stretch>
@@ -2914,11 +2556,11 @@
           <a:bodyPr wrap="square" lIns="0" tIns="0" rIns="0" bIns="0" rtlCol="0" anchor="ctr"/>
           <a:lstStyle/>
           <a:p>
-            <a:pPr indent="0" marL="0">
-              <a:buNone/>
-            </a:pPr>
-            <a:r>
-              <a:rPr lang="en-US" sz="1100" b="1" spc="100" kern="0" dirty="0">
+            <a:pPr marL="0" indent="0">
+              <a:buNone/>
+            </a:pPr>
+            <a:r>
+              <a:rPr lang="en-US" sz="1100" b="1" kern="0" spc="100" dirty="0">
                 <a:solidFill>
                   <a:srgbClr val="D97757"/>
                 </a:solidFill>
@@ -2958,13 +2600,20 @@
             <a:prstDash val="solid"/>
           </a:ln>
           <a:effectLst>
-            <a:outerShdw sx="100000" sy="100000" kx="0" ky="0" algn="bl" rotWithShape="0" blurRad="88900" dist="38100" dir="5400000">
+            <a:outerShdw blurRad="88900" dist="38100" dir="5400000" algn="bl" rotWithShape="0">
               <a:srgbClr val="000000">
                 <a:alpha val="10000"/>
               </a:srgbClr>
             </a:outerShdw>
           </a:effectLst>
         </p:spPr>
+        <p:txBody>
+          <a:bodyPr/>
+          <a:lstStyle/>
+          <a:p>
+            <a:endParaRPr lang="en-US"/>
+          </a:p>
+        </p:txBody>
       </p:sp>
       <p:sp>
         <p:nvSpPr>
@@ -2985,17 +2634,24 @@
           </a:solidFill>
           <a:ln/>
         </p:spPr>
+        <p:txBody>
+          <a:bodyPr/>
+          <a:lstStyle/>
+          <a:p>
+            <a:endParaRPr lang="en-US"/>
+          </a:p>
+        </p:txBody>
       </p:sp>
       <p:pic>
         <p:nvPicPr>
-          <p:cNvPr id="8" name="Image 1" descr="preencoded.png">    </p:cNvPr>
+          <p:cNvPr id="8" name="Image 1" descr="preencoded.png"/>
           <p:cNvPicPr>
             <a:picLocks noChangeAspect="1"/>
           </p:cNvPicPr>
           <p:nvPr/>
         </p:nvPicPr>
         <p:blipFill>
-          <a:blip r:embed="rId2"/>
+          <a:blip r:embed="rId3"/>
           <a:stretch>
             <a:fillRect/>
           </a:stretch>
@@ -3031,7 +2687,7 @@
           <a:bodyPr wrap="square" lIns="0" tIns="0" rIns="0" bIns="0" rtlCol="0" anchor="ctr"/>
           <a:lstStyle/>
           <a:p>
-            <a:pPr indent="0" marL="0">
+            <a:pPr marL="0" indent="0">
               <a:buNone/>
             </a:pPr>
             <a:r>
@@ -3075,13 +2731,20 @@
             <a:prstDash val="solid"/>
           </a:ln>
           <a:effectLst>
-            <a:outerShdw sx="100000" sy="100000" kx="0" ky="0" algn="bl" rotWithShape="0" blurRad="88900" dist="38100" dir="5400000">
+            <a:outerShdw blurRad="88900" dist="38100" dir="5400000" algn="bl" rotWithShape="0">
               <a:srgbClr val="000000">
                 <a:alpha val="10000"/>
               </a:srgbClr>
             </a:outerShdw>
           </a:effectLst>
         </p:spPr>
+        <p:txBody>
+          <a:bodyPr/>
+          <a:lstStyle/>
+          <a:p>
+            <a:endParaRPr lang="en-US"/>
+          </a:p>
+        </p:txBody>
       </p:sp>
       <p:sp>
         <p:nvSpPr>
@@ -3102,17 +2765,24 @@
           </a:solidFill>
           <a:ln/>
         </p:spPr>
+        <p:txBody>
+          <a:bodyPr/>
+          <a:lstStyle/>
+          <a:p>
+            <a:endParaRPr lang="en-US"/>
+          </a:p>
+        </p:txBody>
       </p:sp>
       <p:pic>
         <p:nvPicPr>
-          <p:cNvPr id="12" name="Image 2" descr="preencoded.png">    </p:cNvPr>
+          <p:cNvPr id="12" name="Image 2" descr="preencoded.png"/>
           <p:cNvPicPr>
             <a:picLocks noChangeAspect="1"/>
           </p:cNvPicPr>
           <p:nvPr/>
         </p:nvPicPr>
         <p:blipFill>
-          <a:blip r:embed="rId3"/>
+          <a:blip r:embed="rId4"/>
           <a:stretch>
             <a:fillRect/>
           </a:stretch>
@@ -3148,7 +2818,7 @@
           <a:bodyPr wrap="square" lIns="0" tIns="0" rIns="0" bIns="0" rtlCol="0" anchor="ctr"/>
           <a:lstStyle/>
           <a:p>
-            <a:pPr indent="0" marL="0">
+            <a:pPr marL="0" indent="0">
               <a:buNone/>
             </a:pPr>
             <a:r>
@@ -3192,13 +2862,20 @@
             <a:prstDash val="solid"/>
           </a:ln>
           <a:effectLst>
-            <a:outerShdw sx="100000" sy="100000" kx="0" ky="0" algn="bl" rotWithShape="0" blurRad="88900" dist="38100" dir="5400000">
+            <a:outerShdw blurRad="88900" dist="38100" dir="5400000" algn="bl" rotWithShape="0">
               <a:srgbClr val="000000">
                 <a:alpha val="10000"/>
               </a:srgbClr>
             </a:outerShdw>
           </a:effectLst>
         </p:spPr>
+        <p:txBody>
+          <a:bodyPr/>
+          <a:lstStyle/>
+          <a:p>
+            <a:endParaRPr lang="en-US"/>
+          </a:p>
+        </p:txBody>
       </p:sp>
       <p:sp>
         <p:nvSpPr>
@@ -3219,17 +2896,24 @@
           </a:solidFill>
           <a:ln/>
         </p:spPr>
+        <p:txBody>
+          <a:bodyPr/>
+          <a:lstStyle/>
+          <a:p>
+            <a:endParaRPr lang="en-US"/>
+          </a:p>
+        </p:txBody>
       </p:sp>
       <p:pic>
         <p:nvPicPr>
-          <p:cNvPr id="16" name="Image 3" descr="preencoded.png">    </p:cNvPr>
+          <p:cNvPr id="16" name="Image 3" descr="preencoded.png"/>
           <p:cNvPicPr>
             <a:picLocks noChangeAspect="1"/>
           </p:cNvPicPr>
           <p:nvPr/>
         </p:nvPicPr>
         <p:blipFill>
-          <a:blip r:embed="rId4"/>
+          <a:blip r:embed="rId5"/>
           <a:stretch>
             <a:fillRect/>
           </a:stretch>
@@ -3265,7 +2949,7 @@
           <a:bodyPr wrap="square" lIns="0" tIns="0" rIns="0" bIns="0" rtlCol="0" anchor="ctr"/>
           <a:lstStyle/>
           <a:p>
-            <a:pPr indent="0" marL="0">
+            <a:pPr marL="0" indent="0">
               <a:buNone/>
             </a:pPr>
             <a:r>
@@ -3309,13 +2993,20 @@
             <a:prstDash val="solid"/>
           </a:ln>
           <a:effectLst>
-            <a:outerShdw sx="100000" sy="100000" kx="0" ky="0" algn="bl" rotWithShape="0" blurRad="88900" dist="38100" dir="5400000">
+            <a:outerShdw blurRad="88900" dist="38100" dir="5400000" algn="bl" rotWithShape="0">
               <a:srgbClr val="000000">
                 <a:alpha val="10000"/>
               </a:srgbClr>
             </a:outerShdw>
           </a:effectLst>
         </p:spPr>
+        <p:txBody>
+          <a:bodyPr/>
+          <a:lstStyle/>
+          <a:p>
+            <a:endParaRPr lang="en-US"/>
+          </a:p>
+        </p:txBody>
       </p:sp>
       <p:sp>
         <p:nvSpPr>
@@ -3336,115 +3027,17 @@
           </a:solidFill>
           <a:ln/>
         </p:spPr>
+        <p:txBody>
+          <a:bodyPr/>
+          <a:lstStyle/>
+          <a:p>
+            <a:endParaRPr lang="en-US"/>
+          </a:p>
+        </p:txBody>
       </p:sp>
       <p:pic>
         <p:nvPicPr>
-          <p:cNvPr id="20" name="Image 4" descr="preencoded.png">    </p:cNvPr>
-          <p:cNvPicPr>
-            <a:picLocks noChangeAspect="1"/>
-          </p:cNvPicPr>
-          <p:nvPr/>
-        </p:nvPicPr>
-        <p:blipFill>
-          <a:blip r:embed="rId5"/>
-          <a:stretch>
-            <a:fillRect/>
-          </a:stretch>
-        </p:blipFill>
-        <p:spPr>
-          <a:xfrm>
-            <a:off x="7086234" y="2185050"/>
-            <a:ext cx="201900" cy="201900"/>
-          </a:xfrm>
-          <a:prstGeom prst="rect">
-            <a:avLst/>
-          </a:prstGeom>
-        </p:spPr>
-      </p:pic>
-      <p:sp>
-        <p:nvSpPr>
-          <p:cNvPr id="21" name="Text 14"/>
-          <p:cNvSpPr/>
-          <p:nvPr/>
-        </p:nvSpPr>
-        <p:spPr>
-          <a:xfrm>
-            <a:off x="7498080" y="1783080"/>
-            <a:ext cx="1051560" cy="1005840"/>
-          </a:xfrm>
-          <a:prstGeom prst="rect">
-            <a:avLst/>
-          </a:prstGeom>
-          <a:noFill/>
-          <a:ln/>
-        </p:spPr>
-        <p:txBody>
-          <a:bodyPr wrap="square" lIns="0" tIns="0" rIns="0" bIns="0" rtlCol="0" anchor="ctr"/>
-          <a:lstStyle/>
-          <a:p>
-            <a:pPr indent="0" marL="0">
-              <a:buNone/>
-            </a:pPr>
-            <a:r>
-              <a:rPr lang="en-US" sz="1400" b="1" dirty="0">
-                <a:solidFill>
-                  <a:srgbClr val="141413"/>
-                </a:solidFill>
-                <a:latin typeface="Inter" pitchFamily="34" charset="0"/>
-                <a:ea typeface="Inter" pitchFamily="34" charset="-122"/>
-                <a:cs typeface="Inter" pitchFamily="34" charset="-120"/>
-              </a:rPr>
-              <a:t>Output styles</a:t>
-            </a:r>
-            <a:endParaRPr lang="en-US" sz="1400" dirty="0"/>
-          </a:p>
-        </p:txBody>
-      </p:sp>
-      <p:sp>
-        <p:nvSpPr>
-          <p:cNvPr id="22" name="Shape 15"/>
-          <p:cNvSpPr/>
-          <p:nvPr/>
-        </p:nvSpPr>
-        <p:spPr>
-          <a:xfrm>
-            <a:off x="548640" y="3154680"/>
-            <a:ext cx="3931920" cy="960120"/>
-          </a:xfrm>
-          <a:prstGeom prst="roundRect">
-            <a:avLst>
-              <a:gd name="adj" fmla="val 7619"/>
-            </a:avLst>
-          </a:prstGeom>
-          <a:solidFill>
-            <a:srgbClr val="F4E4DC"/>
-          </a:solidFill>
-          <a:ln/>
-        </p:spPr>
-      </p:sp>
-      <p:sp>
-        <p:nvSpPr>
-          <p:cNvPr id="23" name="Shape 16"/>
-          <p:cNvSpPr/>
-          <p:nvPr/>
-        </p:nvSpPr>
-        <p:spPr>
-          <a:xfrm>
-            <a:off x="777240" y="3429000"/>
-            <a:ext cx="420624" cy="420624"/>
-          </a:xfrm>
-          <a:prstGeom prst="ellipse">
-            <a:avLst/>
-          </a:prstGeom>
-          <a:solidFill>
-            <a:srgbClr val="D97757"/>
-          </a:solidFill>
-          <a:ln/>
-        </p:spPr>
-      </p:sp>
-      <p:pic>
-        <p:nvPicPr>
-          <p:cNvPr id="24" name="Image 5" descr="preencoded.png">    </p:cNvPr>
+          <p:cNvPr id="20" name="Image 4" descr="preencoded.png"/>
           <p:cNvPicPr>
             <a:picLocks noChangeAspect="1"/>
           </p:cNvPicPr>
@@ -3458,6 +3051,125 @@
         </p:blipFill>
         <p:spPr>
           <a:xfrm>
+            <a:off x="7086234" y="2185050"/>
+            <a:ext cx="201900" cy="201900"/>
+          </a:xfrm>
+          <a:prstGeom prst="rect">
+            <a:avLst/>
+          </a:prstGeom>
+        </p:spPr>
+      </p:pic>
+      <p:sp>
+        <p:nvSpPr>
+          <p:cNvPr id="21" name="Text 14"/>
+          <p:cNvSpPr/>
+          <p:nvPr/>
+        </p:nvSpPr>
+        <p:spPr>
+          <a:xfrm>
+            <a:off x="7498080" y="1783080"/>
+            <a:ext cx="1051560" cy="1005840"/>
+          </a:xfrm>
+          <a:prstGeom prst="rect">
+            <a:avLst/>
+          </a:prstGeom>
+          <a:noFill/>
+          <a:ln/>
+        </p:spPr>
+        <p:txBody>
+          <a:bodyPr wrap="square" lIns="0" tIns="0" rIns="0" bIns="0" rtlCol="0" anchor="ctr"/>
+          <a:lstStyle/>
+          <a:p>
+            <a:pPr marL="0" indent="0">
+              <a:buNone/>
+            </a:pPr>
+            <a:r>
+              <a:rPr lang="en-US" sz="1400" b="1" dirty="0">
+                <a:solidFill>
+                  <a:srgbClr val="141413"/>
+                </a:solidFill>
+                <a:latin typeface="Inter" pitchFamily="34" charset="0"/>
+                <a:ea typeface="Inter" pitchFamily="34" charset="-122"/>
+                <a:cs typeface="Inter" pitchFamily="34" charset="-120"/>
+              </a:rPr>
+              <a:t>Output styles</a:t>
+            </a:r>
+            <a:endParaRPr lang="en-US" sz="1400" dirty="0"/>
+          </a:p>
+        </p:txBody>
+      </p:sp>
+      <p:sp>
+        <p:nvSpPr>
+          <p:cNvPr id="22" name="Shape 15"/>
+          <p:cNvSpPr/>
+          <p:nvPr/>
+        </p:nvSpPr>
+        <p:spPr>
+          <a:xfrm>
+            <a:off x="548640" y="3154680"/>
+            <a:ext cx="3931920" cy="960120"/>
+          </a:xfrm>
+          <a:prstGeom prst="roundRect">
+            <a:avLst>
+              <a:gd name="adj" fmla="val 7619"/>
+            </a:avLst>
+          </a:prstGeom>
+          <a:solidFill>
+            <a:srgbClr val="F4E4DC"/>
+          </a:solidFill>
+          <a:ln/>
+        </p:spPr>
+        <p:txBody>
+          <a:bodyPr/>
+          <a:lstStyle/>
+          <a:p>
+            <a:endParaRPr lang="en-US"/>
+          </a:p>
+        </p:txBody>
+      </p:sp>
+      <p:sp>
+        <p:nvSpPr>
+          <p:cNvPr id="23" name="Shape 16"/>
+          <p:cNvSpPr/>
+          <p:nvPr/>
+        </p:nvSpPr>
+        <p:spPr>
+          <a:xfrm>
+            <a:off x="777240" y="3429000"/>
+            <a:ext cx="420624" cy="420624"/>
+          </a:xfrm>
+          <a:prstGeom prst="ellipse">
+            <a:avLst/>
+          </a:prstGeom>
+          <a:solidFill>
+            <a:srgbClr val="D97757"/>
+          </a:solidFill>
+          <a:ln/>
+        </p:spPr>
+        <p:txBody>
+          <a:bodyPr/>
+          <a:lstStyle/>
+          <a:p>
+            <a:endParaRPr lang="en-US"/>
+          </a:p>
+        </p:txBody>
+      </p:sp>
+      <p:pic>
+        <p:nvPicPr>
+          <p:cNvPr id="24" name="Image 5" descr="preencoded.png"/>
+          <p:cNvPicPr>
+            <a:picLocks noChangeAspect="1"/>
+          </p:cNvPicPr>
+          <p:nvPr/>
+        </p:nvPicPr>
+        <p:blipFill>
+          <a:blip r:embed="rId7"/>
+          <a:stretch>
+            <a:fillRect/>
+          </a:stretch>
+        </p:blipFill>
+        <p:spPr>
+          <a:xfrm>
             <a:off x="886602" y="3538362"/>
             <a:ext cx="201900" cy="201900"/>
           </a:xfrm>
@@ -3487,7 +3199,7 @@
           <a:bodyPr wrap="square" lIns="0" tIns="0" rIns="0" bIns="0" rtlCol="0" anchor="ctr"/>
           <a:lstStyle/>
           <a:p>
-            <a:pPr indent="0" marL="0">
+            <a:pPr marL="0" indent="0">
               <a:buNone/>
             </a:pPr>
             <a:r>
@@ -3501,13 +3213,10 @@
               </a:rPr>
               <a:t>Check in</a:t>
             </a:r>
-            <a:pPr indent="0" marL="0">
-              <a:buNone/>
-            </a:pPr>
             <a:endParaRPr lang="en-US" sz="1500" dirty="0"/>
           </a:p>
           <a:p>
-            <a:pPr indent="0" marL="0">
+            <a:pPr marL="0" indent="0">
               <a:buNone/>
             </a:pPr>
             <a:r>
@@ -3551,6 +3260,13 @@
             <a:prstDash val="solid"/>
           </a:ln>
         </p:spPr>
+        <p:txBody>
+          <a:bodyPr/>
+          <a:lstStyle/>
+          <a:p>
+            <a:endParaRPr lang="en-US"/>
+          </a:p>
+        </p:txBody>
       </p:sp>
       <p:sp>
         <p:nvSpPr>
@@ -3571,17 +3287,24 @@
           </a:solidFill>
           <a:ln/>
         </p:spPr>
+        <p:txBody>
+          <a:bodyPr/>
+          <a:lstStyle/>
+          <a:p>
+            <a:endParaRPr lang="en-US"/>
+          </a:p>
+        </p:txBody>
       </p:sp>
       <p:pic>
         <p:nvPicPr>
-          <p:cNvPr id="28" name="Image 6" descr="preencoded.png">    </p:cNvPr>
+          <p:cNvPr id="28" name="Image 6" descr="preencoded.png"/>
           <p:cNvPicPr>
             <a:picLocks noChangeAspect="1"/>
           </p:cNvPicPr>
           <p:nvPr/>
         </p:nvPicPr>
         <p:blipFill>
-          <a:blip r:embed="rId7"/>
+          <a:blip r:embed="rId8"/>
           <a:stretch>
             <a:fillRect/>
           </a:stretch>
@@ -3617,7 +3340,7 @@
           <a:bodyPr wrap="square" lIns="0" tIns="0" rIns="0" bIns="0" rtlCol="0" anchor="ctr"/>
           <a:lstStyle/>
           <a:p>
-            <a:pPr indent="0" marL="0">
+            <a:pPr marL="0" indent="0">
               <a:buNone/>
             </a:pPr>
             <a:r>
@@ -3631,13 +3354,10 @@
               </a:rPr>
               <a:t>Publish</a:t>
             </a:r>
-            <a:pPr indent="0" marL="0">
-              <a:buNone/>
-            </a:pPr>
             <a:endParaRPr lang="en-US" sz="1500" dirty="0"/>
           </a:p>
           <a:p>
-            <a:pPr indent="0" marL="0">
+            <a:pPr marL="0" indent="0">
               <a:buNone/>
             </a:pPr>
             <a:r>
@@ -3676,7 +3396,7 @@
           <a:bodyPr wrap="square" rtlCol="0" anchor="ctr"/>
           <a:lstStyle/>
           <a:p>
-            <a:pPr indent="0" marL="0">
+            <a:pPr marL="0" indent="0">
               <a:buNone/>
             </a:pPr>
             <a:r>
@@ -3715,7 +3435,7 @@
           <a:bodyPr wrap="square" rtlCol="0" anchor="ctr"/>
           <a:lstStyle/>
           <a:p>
-            <a:pPr algn="r" indent="0" marL="0">
+            <a:pPr marL="0" indent="0" algn="r">
               <a:buNone/>
             </a:pPr>
             <a:r>
@@ -3730,45 +3450,6 @@
               <a:t>Section 2  ·  12/14</a:t>
             </a:r>
             <a:endParaRPr lang="en-US" sz="900" dirty="0"/>
-          </a:p>
-        </p:txBody>
-      </p:sp>
-      <p:sp>
-        <p:nvSpPr>
-          <p:cNvPr id="32" name="Text 23"/>
-          <p:cNvSpPr/>
-          <p:nvPr/>
-        </p:nvSpPr>
-        <p:spPr>
-          <a:xfrm>
-            <a:off x="548640" y="4462272"/>
-            <a:ext cx="8046720" cy="274320"/>
-          </a:xfrm>
-          <a:prstGeom prst="rect">
-            <a:avLst/>
-          </a:prstGeom>
-          <a:noFill/>
-          <a:ln/>
-        </p:spPr>
-        <p:txBody>
-          <a:bodyPr wrap="square" lIns="0" tIns="0" rIns="0" bIns="0" rtlCol="0" anchor="ctr"/>
-          <a:lstStyle/>
-          <a:p>
-            <a:pPr indent="0" marL="0">
-              <a:buNone/>
-            </a:pPr>
-            <a:r>
-              <a:rPr lang="en-US" sz="1000" i="1" dirty="0">
-                <a:solidFill>
-                  <a:srgbClr val="615C52"/>
-                </a:solidFill>
-                <a:latin typeface="Inter" pitchFamily="34" charset="0"/>
-                <a:ea typeface="Inter" pitchFamily="34" charset="-122"/>
-                <a:cs typeface="Inter" pitchFamily="34" charset="-120"/>
-              </a:rPr>
-              <a:t>▸ Plugins make a team's steering portable — check it in or publish it.</a:t>
-            </a:r>
-            <a:endParaRPr lang="en-US" sz="1000" dirty="0"/>
           </a:p>
         </p:txBody>
       </p:sp>
@@ -3788,6 +3469,7 @@
         <a:solidFill>
           <a:srgbClr val="F0EEE6"/>
         </a:solidFill>
+        <a:effectLst/>
       </p:bgPr>
     </p:bg>
     <p:spTree>
@@ -3825,11 +3507,11 @@
           <a:bodyPr wrap="square" lIns="0" tIns="0" rIns="0" bIns="0" rtlCol="0" anchor="ctr"/>
           <a:lstStyle/>
           <a:p>
-            <a:pPr indent="0" marL="0">
-              <a:buNone/>
-            </a:pPr>
-            <a:r>
-              <a:rPr lang="en-US" sz="1100" b="1" spc="200" kern="0" dirty="0">
+            <a:pPr marL="0" indent="0">
+              <a:buNone/>
+            </a:pPr>
+            <a:r>
+              <a:rPr lang="en-US" sz="1100" b="1" kern="0" spc="200" dirty="0">
                 <a:solidFill>
                   <a:srgbClr val="D97757"/>
                 </a:solidFill>
@@ -3864,7 +3546,7 @@
           <a:bodyPr wrap="square" lIns="0" tIns="0" rIns="0" bIns="0" rtlCol="0" anchor="ctr"/>
           <a:lstStyle/>
           <a:p>
-            <a:pPr indent="0" marL="0">
+            <a:pPr marL="0" indent="0">
               <a:buNone/>
             </a:pPr>
             <a:r>
@@ -3884,14 +3566,14 @@
       </p:sp>
       <p:pic>
         <p:nvPicPr>
-          <p:cNvPr id="4" name="Image 0" descr="preencoded.png">    </p:cNvPr>
+          <p:cNvPr id="4" name="Image 0" descr="preencoded.png"/>
           <p:cNvPicPr>
             <a:picLocks noChangeAspect="1"/>
           </p:cNvPicPr>
           <p:nvPr/>
         </p:nvPicPr>
         <p:blipFill>
-          <a:blip r:embed="rId1"/>
+          <a:blip r:embed="rId2"/>
           <a:stretch>
             <a:fillRect/>
           </a:stretch>
@@ -3932,6 +3614,13 @@
             <a:prstDash val="solid"/>
           </a:ln>
         </p:spPr>
+        <p:txBody>
+          <a:bodyPr/>
+          <a:lstStyle/>
+          <a:p>
+            <a:endParaRPr lang="en-US"/>
+          </a:p>
+        </p:txBody>
       </p:sp>
       <p:sp>
         <p:nvSpPr>
@@ -3954,7 +3643,7 @@
           <a:bodyPr wrap="square" lIns="0" tIns="0" rIns="0" bIns="0" rtlCol="0" anchor="ctr"/>
           <a:lstStyle/>
           <a:p>
-            <a:pPr indent="0" marL="0">
+            <a:pPr marL="0" indent="0">
               <a:buNone/>
             </a:pPr>
             <a:r>
@@ -3993,7 +3682,7 @@
           <a:bodyPr wrap="square" lIns="0" tIns="0" rIns="0" bIns="0" rtlCol="0" anchor="ctr"/>
           <a:lstStyle/>
           <a:p>
-            <a:pPr indent="0" marL="0">
+            <a:pPr marL="0" indent="0">
               <a:buNone/>
             </a:pPr>
             <a:r>
@@ -4032,7 +3721,7 @@
           <a:bodyPr wrap="square" lIns="0" tIns="0" rIns="0" bIns="0" rtlCol="0" anchor="ctr"/>
           <a:lstStyle/>
           <a:p>
-            <a:pPr algn="ctr" indent="0" marL="0">
+            <a:pPr marL="0" indent="0" algn="ctr">
               <a:buNone/>
             </a:pPr>
             <a:r>
@@ -4071,7 +3760,7 @@
           <a:bodyPr wrap="square" lIns="0" tIns="0" rIns="0" bIns="0" rtlCol="0" anchor="ctr"/>
           <a:lstStyle/>
           <a:p>
-            <a:pPr indent="0" marL="0">
+            <a:pPr marL="0" indent="0">
               <a:buNone/>
             </a:pPr>
             <a:r>
@@ -4115,6 +3804,13 @@
             <a:prstDash val="solid"/>
           </a:ln>
         </p:spPr>
+        <p:txBody>
+          <a:bodyPr/>
+          <a:lstStyle/>
+          <a:p>
+            <a:endParaRPr lang="en-US"/>
+          </a:p>
+        </p:txBody>
       </p:sp>
       <p:sp>
         <p:nvSpPr>
@@ -4137,7 +3833,7 @@
           <a:bodyPr wrap="square" lIns="0" tIns="0" rIns="0" bIns="0" rtlCol="0" anchor="ctr"/>
           <a:lstStyle/>
           <a:p>
-            <a:pPr indent="0" marL="0">
+            <a:pPr marL="0" indent="0">
               <a:buNone/>
             </a:pPr>
             <a:r>
@@ -4176,7 +3872,7 @@
           <a:bodyPr wrap="square" lIns="0" tIns="0" rIns="0" bIns="0" rtlCol="0" anchor="ctr"/>
           <a:lstStyle/>
           <a:p>
-            <a:pPr indent="0" marL="0">
+            <a:pPr marL="0" indent="0">
               <a:buNone/>
             </a:pPr>
             <a:r>
@@ -4215,7 +3911,7 @@
           <a:bodyPr wrap="square" lIns="0" tIns="0" rIns="0" bIns="0" rtlCol="0" anchor="ctr"/>
           <a:lstStyle/>
           <a:p>
-            <a:pPr algn="ctr" indent="0" marL="0">
+            <a:pPr marL="0" indent="0" algn="ctr">
               <a:buNone/>
             </a:pPr>
             <a:r>
@@ -4254,7 +3950,7 @@
           <a:bodyPr wrap="square" lIns="0" tIns="0" rIns="0" bIns="0" rtlCol="0" anchor="ctr"/>
           <a:lstStyle/>
           <a:p>
-            <a:pPr indent="0" marL="0">
+            <a:pPr marL="0" indent="0">
               <a:buNone/>
             </a:pPr>
             <a:r>
@@ -4298,6 +3994,13 @@
             <a:prstDash val="solid"/>
           </a:ln>
         </p:spPr>
+        <p:txBody>
+          <a:bodyPr/>
+          <a:lstStyle/>
+          <a:p>
+            <a:endParaRPr lang="en-US"/>
+          </a:p>
+        </p:txBody>
       </p:sp>
       <p:sp>
         <p:nvSpPr>
@@ -4320,7 +4023,7 @@
           <a:bodyPr wrap="square" lIns="0" tIns="0" rIns="0" bIns="0" rtlCol="0" anchor="ctr"/>
           <a:lstStyle/>
           <a:p>
-            <a:pPr indent="0" marL="0">
+            <a:pPr marL="0" indent="0">
               <a:buNone/>
             </a:pPr>
             <a:r>
@@ -4359,7 +4062,7 @@
           <a:bodyPr wrap="square" lIns="0" tIns="0" rIns="0" bIns="0" rtlCol="0" anchor="ctr"/>
           <a:lstStyle/>
           <a:p>
-            <a:pPr indent="0" marL="0">
+            <a:pPr marL="0" indent="0">
               <a:buNone/>
             </a:pPr>
             <a:r>
@@ -4398,7 +4101,7 @@
           <a:bodyPr wrap="square" lIns="0" tIns="0" rIns="0" bIns="0" rtlCol="0" anchor="ctr"/>
           <a:lstStyle/>
           <a:p>
-            <a:pPr algn="ctr" indent="0" marL="0">
+            <a:pPr marL="0" indent="0" algn="ctr">
               <a:buNone/>
             </a:pPr>
             <a:r>
@@ -4437,7 +4140,7 @@
           <a:bodyPr wrap="square" lIns="0" tIns="0" rIns="0" bIns="0" rtlCol="0" anchor="ctr"/>
           <a:lstStyle/>
           <a:p>
-            <a:pPr indent="0" marL="0">
+            <a:pPr marL="0" indent="0">
               <a:buNone/>
             </a:pPr>
             <a:r>
@@ -4481,6 +4184,13 @@
             <a:prstDash val="solid"/>
           </a:ln>
         </p:spPr>
+        <p:txBody>
+          <a:bodyPr/>
+          <a:lstStyle/>
+          <a:p>
+            <a:endParaRPr lang="en-US"/>
+          </a:p>
+        </p:txBody>
       </p:sp>
       <p:sp>
         <p:nvSpPr>
@@ -4503,7 +4213,7 @@
           <a:bodyPr wrap="square" lIns="0" tIns="0" rIns="0" bIns="0" rtlCol="0" anchor="ctr"/>
           <a:lstStyle/>
           <a:p>
-            <a:pPr indent="0" marL="0">
+            <a:pPr marL="0" indent="0">
               <a:buNone/>
             </a:pPr>
             <a:r>
@@ -4542,7 +4252,7 @@
           <a:bodyPr wrap="square" lIns="0" tIns="0" rIns="0" bIns="0" rtlCol="0" anchor="ctr"/>
           <a:lstStyle/>
           <a:p>
-            <a:pPr indent="0" marL="0">
+            <a:pPr marL="0" indent="0">
               <a:buNone/>
             </a:pPr>
             <a:r>
@@ -4581,7 +4291,7 @@
           <a:bodyPr wrap="square" lIns="0" tIns="0" rIns="0" bIns="0" rtlCol="0" anchor="ctr"/>
           <a:lstStyle/>
           <a:p>
-            <a:pPr algn="ctr" indent="0" marL="0">
+            <a:pPr marL="0" indent="0" algn="ctr">
               <a:buNone/>
             </a:pPr>
             <a:r>
@@ -4620,7 +4330,7 @@
           <a:bodyPr wrap="square" lIns="0" tIns="0" rIns="0" bIns="0" rtlCol="0" anchor="ctr"/>
           <a:lstStyle/>
           <a:p>
-            <a:pPr indent="0" marL="0">
+            <a:pPr marL="0" indent="0">
               <a:buNone/>
             </a:pPr>
             <a:r>
@@ -4659,7 +4369,7 @@
           <a:bodyPr wrap="square" rtlCol="0" anchor="ctr"/>
           <a:lstStyle/>
           <a:p>
-            <a:pPr indent="0" marL="0">
+            <a:pPr marL="0" indent="0">
               <a:buNone/>
             </a:pPr>
             <a:r>
@@ -4698,7 +4408,7 @@
           <a:bodyPr wrap="square" rtlCol="0" anchor="ctr"/>
           <a:lstStyle/>
           <a:p>
-            <a:pPr algn="r" indent="0" marL="0">
+            <a:pPr marL="0" indent="0" algn="r">
               <a:buNone/>
             </a:pPr>
             <a:r>
@@ -4713,45 +4423,6 @@
               <a:t>Section 2  ·  13/14</a:t>
             </a:r>
             <a:endParaRPr lang="en-US" sz="900" dirty="0"/>
-          </a:p>
-        </p:txBody>
-      </p:sp>
-      <p:sp>
-        <p:nvSpPr>
-          <p:cNvPr id="27" name="Text 24"/>
-          <p:cNvSpPr/>
-          <p:nvPr/>
-        </p:nvSpPr>
-        <p:spPr>
-          <a:xfrm>
-            <a:off x="548640" y="4462272"/>
-            <a:ext cx="8046720" cy="274320"/>
-          </a:xfrm>
-          <a:prstGeom prst="rect">
-            <a:avLst/>
-          </a:prstGeom>
-          <a:noFill/>
-          <a:ln/>
-        </p:spPr>
-        <p:txBody>
-          <a:bodyPr wrap="square" lIns="0" tIns="0" rIns="0" bIns="0" rtlCol="0" anchor="ctr"/>
-          <a:lstStyle/>
-          <a:p>
-            <a:pPr indent="0" marL="0">
-              <a:buNone/>
-            </a:pPr>
-            <a:r>
-              <a:rPr lang="en-US" sz="1000" i="1" dirty="0">
-                <a:solidFill>
-                  <a:srgbClr val="615C52"/>
-                </a:solidFill>
-                <a:latin typeface="Inter" pitchFamily="34" charset="0"/>
-                <a:ea typeface="Inter" pitchFamily="34" charset="-122"/>
-                <a:cs typeface="Inter" pitchFamily="34" charset="-120"/>
-              </a:rPr>
-              <a:t>▸ If you took this before: these four are the changes that matter most.</a:t>
-            </a:r>
-            <a:endParaRPr lang="en-US" sz="1000" dirty="0"/>
           </a:p>
         </p:txBody>
       </p:sp>
@@ -4771,6 +4442,7 @@
         <a:solidFill>
           <a:srgbClr val="F0EEE6"/>
         </a:solidFill>
+        <a:effectLst/>
       </p:bgPr>
     </p:bg>
     <p:spTree>
@@ -4789,60 +4461,7 @@
       </p:grpSpPr>
       <p:pic>
         <p:nvPicPr>
-          <p:cNvPr id="2" name="Image 0" descr="preencoded.png">    </p:cNvPr>
-          <p:cNvPicPr>
-            <a:picLocks noChangeAspect="1"/>
-          </p:cNvPicPr>
-          <p:nvPr/>
-        </p:nvPicPr>
-        <p:blipFill>
-          <a:blip r:embed="rId1"/>
-          <a:stretch>
-            <a:fillRect/>
-          </a:stretch>
-        </p:blipFill>
-        <p:spPr>
-          <a:xfrm>
-            <a:off x="8339328" y="402336"/>
-            <a:ext cx="310896" cy="310896"/>
-          </a:xfrm>
-          <a:prstGeom prst="rect">
-            <a:avLst/>
-          </a:prstGeom>
-        </p:spPr>
-      </p:pic>
-      <p:sp>
-        <p:nvSpPr>
-          <p:cNvPr id="3" name="Shape 0"/>
-          <p:cNvSpPr/>
-          <p:nvPr/>
-        </p:nvSpPr>
-        <p:spPr>
-          <a:xfrm>
-            <a:off x="548640" y="822960"/>
-            <a:ext cx="3154680" cy="3383280"/>
-          </a:xfrm>
-          <a:prstGeom prst="roundRect">
-            <a:avLst>
-              <a:gd name="adj" fmla="val 3478"/>
-            </a:avLst>
-          </a:prstGeom>
-          <a:solidFill>
-            <a:srgbClr val="D97757"/>
-          </a:solidFill>
-          <a:ln/>
-          <a:effectLst>
-            <a:outerShdw sx="100000" sy="100000" kx="0" ky="0" algn="bl" rotWithShape="0" blurRad="88900" dist="38100" dir="5400000">
-              <a:srgbClr val="000000">
-                <a:alpha val="10000"/>
-              </a:srgbClr>
-            </a:outerShdw>
-          </a:effectLst>
-        </p:spPr>
-      </p:sp>
-      <p:pic>
-        <p:nvPicPr>
-          <p:cNvPr id="4" name="Image 1" descr="preencoded.png">    </p:cNvPr>
+          <p:cNvPr id="2" name="Image 0" descr="preencoded.png"/>
           <p:cNvPicPr>
             <a:picLocks noChangeAspect="1"/>
           </p:cNvPicPr>
@@ -4856,6 +4475,66 @@
         </p:blipFill>
         <p:spPr>
           <a:xfrm>
+            <a:off x="8339328" y="402336"/>
+            <a:ext cx="310896" cy="310896"/>
+          </a:xfrm>
+          <a:prstGeom prst="rect">
+            <a:avLst/>
+          </a:prstGeom>
+        </p:spPr>
+      </p:pic>
+      <p:sp>
+        <p:nvSpPr>
+          <p:cNvPr id="3" name="Shape 0"/>
+          <p:cNvSpPr/>
+          <p:nvPr/>
+        </p:nvSpPr>
+        <p:spPr>
+          <a:xfrm>
+            <a:off x="548640" y="822960"/>
+            <a:ext cx="3154680" cy="3383280"/>
+          </a:xfrm>
+          <a:prstGeom prst="roundRect">
+            <a:avLst>
+              <a:gd name="adj" fmla="val 3478"/>
+            </a:avLst>
+          </a:prstGeom>
+          <a:solidFill>
+            <a:srgbClr val="D97757"/>
+          </a:solidFill>
+          <a:ln/>
+          <a:effectLst>
+            <a:outerShdw blurRad="88900" dist="38100" dir="5400000" algn="bl" rotWithShape="0">
+              <a:srgbClr val="000000">
+                <a:alpha val="10000"/>
+              </a:srgbClr>
+            </a:outerShdw>
+          </a:effectLst>
+        </p:spPr>
+        <p:txBody>
+          <a:bodyPr/>
+          <a:lstStyle/>
+          <a:p>
+            <a:endParaRPr lang="en-US"/>
+          </a:p>
+        </p:txBody>
+      </p:sp>
+      <p:pic>
+        <p:nvPicPr>
+          <p:cNvPr id="4" name="Image 1" descr="preencoded.png"/>
+          <p:cNvPicPr>
+            <a:picLocks noChangeAspect="1"/>
+          </p:cNvPicPr>
+          <p:nvPr/>
+        </p:nvPicPr>
+        <p:blipFill>
+          <a:blip r:embed="rId3"/>
+          <a:stretch>
+            <a:fillRect/>
+          </a:stretch>
+        </p:blipFill>
+        <p:spPr>
+          <a:xfrm>
             <a:off x="868680" y="1152144"/>
             <a:ext cx="548640" cy="548640"/>
           </a:xfrm>
@@ -4885,7 +4564,7 @@
           <a:bodyPr wrap="square" lIns="0" tIns="0" rIns="0" bIns="0" rtlCol="0" anchor="ctr"/>
           <a:lstStyle/>
           <a:p>
-            <a:pPr indent="0" marL="0">
+            <a:pPr marL="0" indent="0">
               <a:buNone/>
             </a:pPr>
             <a:r>
@@ -4924,7 +4603,7 @@
           <a:bodyPr wrap="square" lIns="0" tIns="0" rIns="0" bIns="0" rtlCol="0" anchor="ctr"/>
           <a:lstStyle/>
           <a:p>
-            <a:pPr indent="0" marL="0">
+            <a:pPr marL="0" indent="0">
               <a:buNone/>
             </a:pPr>
             <a:r>
@@ -4964,6 +4643,13 @@
             <a:prstDash val="solid"/>
           </a:ln>
         </p:spPr>
+        <p:txBody>
+          <a:bodyPr/>
+          <a:lstStyle/>
+          <a:p>
+            <a:endParaRPr lang="en-US"/>
+          </a:p>
+        </p:txBody>
       </p:sp>
       <p:sp>
         <p:nvSpPr>
@@ -4986,11 +4672,11 @@
           <a:bodyPr wrap="square" lIns="0" tIns="0" rIns="0" bIns="0" rtlCol="0" anchor="ctr"/>
           <a:lstStyle/>
           <a:p>
-            <a:pPr indent="0" marL="0">
-              <a:buNone/>
-            </a:pPr>
-            <a:r>
-              <a:rPr lang="en-US" sz="1100" b="1" spc="100" kern="0" dirty="0">
+            <a:pPr marL="0" indent="0">
+              <a:buNone/>
+            </a:pPr>
+            <a:r>
+              <a:rPr lang="en-US" sz="1100" b="1" kern="0" spc="100" dirty="0">
                 <a:solidFill>
                   <a:srgbClr val="FBE9E2"/>
                 </a:solidFill>
@@ -5025,7 +4711,7 @@
           <a:bodyPr wrap="square" lIns="0" tIns="0" rIns="0" bIns="0" rtlCol="0" anchor="ctr"/>
           <a:lstStyle/>
           <a:p>
-            <a:pPr indent="0" marL="0">
+            <a:pPr marL="0" indent="0">
               <a:buNone/>
             </a:pPr>
             <a:r>
@@ -5064,11 +4750,11 @@
           <a:bodyPr wrap="square" lIns="0" tIns="0" rIns="0" bIns="0" rtlCol="0" anchor="ctr"/>
           <a:lstStyle/>
           <a:p>
-            <a:pPr indent="0" marL="0">
-              <a:buNone/>
-            </a:pPr>
-            <a:r>
-              <a:rPr lang="en-US" sz="1100" b="1" spc="200" kern="0" dirty="0">
+            <a:pPr marL="0" indent="0">
+              <a:buNone/>
+            </a:pPr>
+            <a:r>
+              <a:rPr lang="en-US" sz="1100" b="1" kern="0" spc="200" dirty="0">
                 <a:solidFill>
                   <a:srgbClr val="D97757"/>
                 </a:solidFill>
@@ -5101,6 +4787,13 @@
           </a:solidFill>
           <a:ln/>
         </p:spPr>
+        <p:txBody>
+          <a:bodyPr/>
+          <a:lstStyle/>
+          <a:p>
+            <a:endParaRPr lang="en-US"/>
+          </a:p>
+        </p:txBody>
       </p:sp>
       <p:sp>
         <p:nvSpPr>
@@ -5123,7 +4816,7 @@
           <a:bodyPr wrap="square" lIns="0" tIns="0" rIns="0" bIns="0" rtlCol="0" anchor="ctr"/>
           <a:lstStyle/>
           <a:p>
-            <a:pPr algn="ctr" indent="0" marL="0">
+            <a:pPr marL="0" indent="0" algn="ctr">
               <a:buNone/>
             </a:pPr>
             <a:r>
@@ -5162,7 +4855,7 @@
           <a:bodyPr wrap="square" lIns="0" tIns="0" rIns="0" bIns="0" rtlCol="0" anchor="ctr"/>
           <a:lstStyle/>
           <a:p>
-            <a:pPr indent="0" marL="0">
+            <a:pPr marL="0" indent="0">
               <a:buNone/>
             </a:pPr>
             <a:r>
@@ -5199,6 +4892,13 @@
           </a:solidFill>
           <a:ln/>
         </p:spPr>
+        <p:txBody>
+          <a:bodyPr/>
+          <a:lstStyle/>
+          <a:p>
+            <a:endParaRPr lang="en-US"/>
+          </a:p>
+        </p:txBody>
       </p:sp>
       <p:sp>
         <p:nvSpPr>
@@ -5221,7 +4921,7 @@
           <a:bodyPr wrap="square" lIns="0" tIns="0" rIns="0" bIns="0" rtlCol="0" anchor="ctr"/>
           <a:lstStyle/>
           <a:p>
-            <a:pPr algn="ctr" indent="0" marL="0">
+            <a:pPr marL="0" indent="0" algn="ctr">
               <a:buNone/>
             </a:pPr>
             <a:r>
@@ -5260,7 +4960,7 @@
           <a:bodyPr wrap="square" lIns="0" tIns="0" rIns="0" bIns="0" rtlCol="0" anchor="ctr"/>
           <a:lstStyle/>
           <a:p>
-            <a:pPr indent="0" marL="0">
+            <a:pPr marL="0" indent="0">
               <a:buNone/>
             </a:pPr>
             <a:r>
@@ -5297,6 +4997,13 @@
           </a:solidFill>
           <a:ln/>
         </p:spPr>
+        <p:txBody>
+          <a:bodyPr/>
+          <a:lstStyle/>
+          <a:p>
+            <a:endParaRPr lang="en-US"/>
+          </a:p>
+        </p:txBody>
       </p:sp>
       <p:sp>
         <p:nvSpPr>
@@ -5319,7 +5026,7 @@
           <a:bodyPr wrap="square" lIns="0" tIns="0" rIns="0" bIns="0" rtlCol="0" anchor="ctr"/>
           <a:lstStyle/>
           <a:p>
-            <a:pPr algn="ctr" indent="0" marL="0">
+            <a:pPr marL="0" indent="0" algn="ctr">
               <a:buNone/>
             </a:pPr>
             <a:r>
@@ -5358,7 +5065,7 @@
           <a:bodyPr wrap="square" lIns="0" tIns="0" rIns="0" bIns="0" rtlCol="0" anchor="ctr"/>
           <a:lstStyle/>
           <a:p>
-            <a:pPr indent="0" marL="0">
+            <a:pPr marL="0" indent="0">
               <a:buNone/>
             </a:pPr>
             <a:r>
@@ -5395,6 +5102,13 @@
           </a:solidFill>
           <a:ln/>
         </p:spPr>
+        <p:txBody>
+          <a:bodyPr/>
+          <a:lstStyle/>
+          <a:p>
+            <a:endParaRPr lang="en-US"/>
+          </a:p>
+        </p:txBody>
       </p:sp>
       <p:sp>
         <p:nvSpPr>
@@ -5417,7 +5131,7 @@
           <a:bodyPr wrap="square" lIns="0" tIns="0" rIns="0" bIns="0" rtlCol="0" anchor="ctr"/>
           <a:lstStyle/>
           <a:p>
-            <a:pPr algn="ctr" indent="0" marL="0">
+            <a:pPr marL="0" indent="0" algn="ctr">
               <a:buNone/>
             </a:pPr>
             <a:r>
@@ -5456,7 +5170,7 @@
           <a:bodyPr wrap="square" lIns="0" tIns="0" rIns="0" bIns="0" rtlCol="0" anchor="ctr"/>
           <a:lstStyle/>
           <a:p>
-            <a:pPr indent="0" marL="0">
+            <a:pPr marL="0" indent="0">
               <a:buNone/>
             </a:pPr>
             <a:r>
@@ -5500,6 +5214,13 @@
             <a:prstDash val="solid"/>
           </a:ln>
         </p:spPr>
+        <p:txBody>
+          <a:bodyPr/>
+          <a:lstStyle/>
+          <a:p>
+            <a:endParaRPr lang="en-US"/>
+          </a:p>
+        </p:txBody>
       </p:sp>
       <p:sp>
         <p:nvSpPr>
@@ -5522,11 +5243,11 @@
           <a:bodyPr wrap="square" lIns="0" tIns="0" rIns="0" bIns="0" rtlCol="0" anchor="ctr"/>
           <a:lstStyle/>
           <a:p>
-            <a:pPr indent="0" marL="0">
-              <a:buNone/>
-            </a:pPr>
-            <a:r>
-              <a:rPr lang="en-US" sz="1050" b="1" spc="100" kern="0" dirty="0">
+            <a:pPr marL="0" indent="0">
+              <a:buNone/>
+            </a:pPr>
+            <a:r>
+              <a:rPr lang="en-US" sz="1050" b="1" kern="0" spc="100" dirty="0">
                 <a:solidFill>
                   <a:srgbClr val="615C52"/>
                 </a:solidFill>
@@ -5542,70 +5263,7 @@
       </p:sp>
       <p:pic>
         <p:nvPicPr>
-          <p:cNvPr id="25" name="Image 2" descr="preencoded.png">    </p:cNvPr>
-          <p:cNvPicPr>
-            <a:picLocks noChangeAspect="1"/>
-          </p:cNvPicPr>
-          <p:nvPr/>
-        </p:nvPicPr>
-        <p:blipFill>
-          <a:blip r:embed="rId3"/>
-          <a:stretch>
-            <a:fillRect/>
-          </a:stretch>
-        </p:blipFill>
-        <p:spPr>
-          <a:xfrm>
-            <a:off x="4297680" y="3346704"/>
-            <a:ext cx="182880" cy="182880"/>
-          </a:xfrm>
-          <a:prstGeom prst="rect">
-            <a:avLst/>
-          </a:prstGeom>
-        </p:spPr>
-      </p:pic>
-      <p:sp>
-        <p:nvSpPr>
-          <p:cNvPr id="26" name="Text 21"/>
-          <p:cNvSpPr/>
-          <p:nvPr/>
-        </p:nvSpPr>
-        <p:spPr>
-          <a:xfrm>
-            <a:off x="4572000" y="3300984"/>
-            <a:ext cx="3931920" cy="256032"/>
-          </a:xfrm>
-          <a:prstGeom prst="rect">
-            <a:avLst/>
-          </a:prstGeom>
-          <a:noFill/>
-          <a:ln/>
-        </p:spPr>
-        <p:txBody>
-          <a:bodyPr wrap="square" lIns="0" tIns="0" rIns="0" bIns="0" rtlCol="0" anchor="ctr"/>
-          <a:lstStyle/>
-          <a:p>
-            <a:pPr indent="0" marL="0">
-              <a:buNone/>
-            </a:pPr>
-            <a:r>
-              <a:rPr lang="en-US" sz="1250" dirty="0">
-                <a:solidFill>
-                  <a:srgbClr val="141413"/>
-                </a:solidFill>
-                <a:latin typeface="Inter" pitchFamily="34" charset="0"/>
-                <a:ea typeface="Inter" pitchFamily="34" charset="-122"/>
-                <a:cs typeface="Inter" pitchFamily="34" charset="-120"/>
-              </a:rPr>
-              <a:t>Rule loads on a matching .cs file</a:t>
-            </a:r>
-            <a:endParaRPr lang="en-US" sz="1250" dirty="0"/>
-          </a:p>
-        </p:txBody>
-      </p:sp>
-      <p:pic>
-        <p:nvPicPr>
-          <p:cNvPr id="27" name="Image 3" descr="preencoded.png">    </p:cNvPr>
+          <p:cNvPr id="25" name="Image 2" descr="preencoded.png"/>
           <p:cNvPicPr>
             <a:picLocks noChangeAspect="1"/>
           </p:cNvPicPr>
@@ -5619,7 +5277,7 @@
         </p:blipFill>
         <p:spPr>
           <a:xfrm>
-            <a:off x="4297680" y="3611880"/>
+            <a:off x="4297680" y="3346704"/>
             <a:ext cx="182880" cy="182880"/>
           </a:xfrm>
           <a:prstGeom prst="rect">
@@ -5629,13 +5287,13 @@
       </p:pic>
       <p:sp>
         <p:nvSpPr>
-          <p:cNvPr id="28" name="Text 22"/>
-          <p:cNvSpPr/>
-          <p:nvPr/>
-        </p:nvSpPr>
-        <p:spPr>
-          <a:xfrm>
-            <a:off x="4572000" y="3566160"/>
+          <p:cNvPr id="26" name="Text 21"/>
+          <p:cNvSpPr/>
+          <p:nvPr/>
+        </p:nvSpPr>
+        <p:spPr>
+          <a:xfrm>
+            <a:off x="4572000" y="3300984"/>
             <a:ext cx="3931920" cy="256032"/>
           </a:xfrm>
           <a:prstGeom prst="rect">
@@ -5648,7 +5306,7 @@
           <a:bodyPr wrap="square" lIns="0" tIns="0" rIns="0" bIns="0" rtlCol="0" anchor="ctr"/>
           <a:lstStyle/>
           <a:p>
-            <a:pPr indent="0" marL="0">
+            <a:pPr marL="0" indent="0">
               <a:buNone/>
             </a:pPr>
             <a:r>
@@ -5660,7 +5318,7 @@
                 <a:ea typeface="Inter" pitchFamily="34" charset="-122"/>
                 <a:cs typeface="Inter" pitchFamily="34" charset="-120"/>
               </a:rPr>
-              <a:t>Skill triggers from its description</a:t>
+              <a:t>Rule loads on a matching .cs file</a:t>
             </a:r>
             <a:endParaRPr lang="en-US" sz="1250" dirty="0"/>
           </a:p>
@@ -5668,21 +5326,21 @@
       </p:sp>
       <p:pic>
         <p:nvPicPr>
-          <p:cNvPr id="29" name="Image 4" descr="preencoded.png">    </p:cNvPr>
+          <p:cNvPr id="27" name="Image 3" descr="preencoded.png"/>
           <p:cNvPicPr>
             <a:picLocks noChangeAspect="1"/>
           </p:cNvPicPr>
           <p:nvPr/>
         </p:nvPicPr>
         <p:blipFill>
-          <a:blip r:embed="rId5"/>
+          <a:blip r:embed="rId4"/>
           <a:stretch>
             <a:fillRect/>
           </a:stretch>
         </p:blipFill>
         <p:spPr>
           <a:xfrm>
-            <a:off x="4297680" y="3877056"/>
+            <a:off x="4297680" y="3611880"/>
             <a:ext cx="182880" cy="182880"/>
           </a:xfrm>
           <a:prstGeom prst="rect">
@@ -5692,13 +5350,13 @@
       </p:pic>
       <p:sp>
         <p:nvSpPr>
-          <p:cNvPr id="30" name="Text 23"/>
-          <p:cNvSpPr/>
-          <p:nvPr/>
-        </p:nvSpPr>
-        <p:spPr>
-          <a:xfrm>
-            <a:off x="4572000" y="3831336"/>
+          <p:cNvPr id="28" name="Text 22"/>
+          <p:cNvSpPr/>
+          <p:nvPr/>
+        </p:nvSpPr>
+        <p:spPr>
+          <a:xfrm>
+            <a:off x="4572000" y="3566160"/>
             <a:ext cx="3931920" cy="256032"/>
           </a:xfrm>
           <a:prstGeom prst="rect">
@@ -5711,7 +5369,7 @@
           <a:bodyPr wrap="square" lIns="0" tIns="0" rIns="0" bIns="0" rtlCol="0" anchor="ctr"/>
           <a:lstStyle/>
           <a:p>
-            <a:pPr indent="0" marL="0">
+            <a:pPr marL="0" indent="0">
               <a:buNone/>
             </a:pPr>
             <a:r>
@@ -5723,7 +5381,7 @@
                 <a:ea typeface="Inter" pitchFamily="34" charset="-122"/>
                 <a:cs typeface="Inter" pitchFamily="34" charset="-120"/>
               </a:rPr>
-              <a:t>Hook blocks a disallowed action</a:t>
+              <a:t>Skill triggers from its description</a:t>
             </a:r>
             <a:endParaRPr lang="en-US" sz="1250" dirty="0"/>
           </a:p>
@@ -5731,20 +5389,83 @@
       </p:sp>
       <p:pic>
         <p:nvPicPr>
-          <p:cNvPr id="31" name="Image 5" descr="preencoded.png">    </p:cNvPr>
+          <p:cNvPr id="29" name="Image 4" descr="preencoded.png"/>
           <p:cNvPicPr>
             <a:picLocks noChangeAspect="1"/>
           </p:cNvPicPr>
           <p:nvPr/>
         </p:nvPicPr>
         <p:blipFill>
-          <a:blip r:embed="rId6"/>
+          <a:blip r:embed="rId4"/>
           <a:stretch>
             <a:fillRect/>
           </a:stretch>
         </p:blipFill>
         <p:spPr>
           <a:xfrm>
+            <a:off x="4297680" y="3877056"/>
+            <a:ext cx="182880" cy="182880"/>
+          </a:xfrm>
+          <a:prstGeom prst="rect">
+            <a:avLst/>
+          </a:prstGeom>
+        </p:spPr>
+      </p:pic>
+      <p:sp>
+        <p:nvSpPr>
+          <p:cNvPr id="30" name="Text 23"/>
+          <p:cNvSpPr/>
+          <p:nvPr/>
+        </p:nvSpPr>
+        <p:spPr>
+          <a:xfrm>
+            <a:off x="4572000" y="3831336"/>
+            <a:ext cx="3931920" cy="256032"/>
+          </a:xfrm>
+          <a:prstGeom prst="rect">
+            <a:avLst/>
+          </a:prstGeom>
+          <a:noFill/>
+          <a:ln/>
+        </p:spPr>
+        <p:txBody>
+          <a:bodyPr wrap="square" lIns="0" tIns="0" rIns="0" bIns="0" rtlCol="0" anchor="ctr"/>
+          <a:lstStyle/>
+          <a:p>
+            <a:pPr marL="0" indent="0">
+              <a:buNone/>
+            </a:pPr>
+            <a:r>
+              <a:rPr lang="en-US" sz="1250" dirty="0">
+                <a:solidFill>
+                  <a:srgbClr val="141413"/>
+                </a:solidFill>
+                <a:latin typeface="Inter" pitchFamily="34" charset="0"/>
+                <a:ea typeface="Inter" pitchFamily="34" charset="-122"/>
+                <a:cs typeface="Inter" pitchFamily="34" charset="-120"/>
+              </a:rPr>
+              <a:t>Hook blocks a disallowed action</a:t>
+            </a:r>
+            <a:endParaRPr lang="en-US" sz="1250" dirty="0"/>
+          </a:p>
+        </p:txBody>
+      </p:sp>
+      <p:pic>
+        <p:nvPicPr>
+          <p:cNvPr id="31" name="Image 5" descr="preencoded.png"/>
+          <p:cNvPicPr>
+            <a:picLocks noChangeAspect="1"/>
+          </p:cNvPicPr>
+          <p:nvPr/>
+        </p:nvPicPr>
+        <p:blipFill>
+          <a:blip r:embed="rId4"/>
+          <a:stretch>
+            <a:fillRect/>
+          </a:stretch>
+        </p:blipFill>
+        <p:spPr>
+          <a:xfrm>
             <a:off x="4297680" y="4142232"/>
             <a:ext cx="182880" cy="182880"/>
           </a:xfrm>
@@ -5774,7 +5495,7 @@
           <a:bodyPr wrap="square" lIns="0" tIns="0" rIns="0" bIns="0" rtlCol="0" anchor="ctr"/>
           <a:lstStyle/>
           <a:p>
-            <a:pPr indent="0" marL="0">
+            <a:pPr marL="0" indent="0">
               <a:buNone/>
             </a:pPr>
             <a:r>
@@ -5813,7 +5534,7 @@
           <a:bodyPr wrap="square" rtlCol="0" anchor="ctr"/>
           <a:lstStyle/>
           <a:p>
-            <a:pPr indent="0" marL="0">
+            <a:pPr marL="0" indent="0">
               <a:buNone/>
             </a:pPr>
             <a:r>
@@ -5852,7 +5573,7 @@
           <a:bodyPr wrap="square" rtlCol="0" anchor="ctr"/>
           <a:lstStyle/>
           <a:p>
-            <a:pPr algn="r" indent="0" marL="0">
+            <a:pPr marL="0" indent="0" algn="r">
               <a:buNone/>
             </a:pPr>
             <a:r>
@@ -5867,45 +5588,6 @@
               <a:t>Section 2  ·  14/14</a:t>
             </a:r>
             <a:endParaRPr lang="en-US" sz="900" dirty="0"/>
-          </a:p>
-        </p:txBody>
-      </p:sp>
-      <p:sp>
-        <p:nvSpPr>
-          <p:cNvPr id="35" name="Text 27"/>
-          <p:cNvSpPr/>
-          <p:nvPr/>
-        </p:nvSpPr>
-        <p:spPr>
-          <a:xfrm>
-            <a:off x="548640" y="4462272"/>
-            <a:ext cx="8046720" cy="274320"/>
-          </a:xfrm>
-          <a:prstGeom prst="rect">
-            <a:avLst/>
-          </a:prstGeom>
-          <a:noFill/>
-          <a:ln/>
-        </p:spPr>
-        <p:txBody>
-          <a:bodyPr wrap="square" lIns="0" tIns="0" rIns="0" bIns="0" rtlCol="0" anchor="ctr"/>
-          <a:lstStyle/>
-          <a:p>
-            <a:pPr indent="0" marL="0">
-              <a:buNone/>
-            </a:pPr>
-            <a:r>
-              <a:rPr lang="en-US" sz="1000" i="1" dirty="0">
-                <a:solidFill>
-                  <a:srgbClr val="615C52"/>
-                </a:solidFill>
-                <a:latin typeface="Inter" pitchFamily="34" charset="0"/>
-                <a:ea typeface="Inter" pitchFamily="34" charset="-122"/>
-                <a:cs typeface="Inter" pitchFamily="34" charset="-120"/>
-              </a:rPr>
-              <a:t>▸ Definition of done: a working .claude/ they could commit to BookTracker today.</a:t>
-            </a:r>
-            <a:endParaRPr lang="en-US" sz="1000" dirty="0"/>
           </a:p>
         </p:txBody>
       </p:sp>
@@ -5925,6 +5607,7 @@
         <a:solidFill>
           <a:srgbClr val="1F1E1D"/>
         </a:solidFill>
+        <a:effectLst/>
       </p:bgPr>
     </p:bg>
     <p:spTree>
@@ -5943,14 +5626,14 @@
       </p:grpSpPr>
       <p:pic>
         <p:nvPicPr>
-          <p:cNvPr id="2" name="Image 0" descr="preencoded.png">    </p:cNvPr>
+          <p:cNvPr id="2" name="Image 0" descr="preencoded.png"/>
           <p:cNvPicPr>
             <a:picLocks noChangeAspect="1"/>
           </p:cNvPicPr>
           <p:nvPr/>
         </p:nvPicPr>
         <p:blipFill>
-          <a:blip r:embed="rId1"/>
+          <a:blip r:embed="rId2"/>
           <a:stretch>
             <a:fillRect/>
           </a:stretch>
@@ -5986,11 +5669,11 @@
           <a:bodyPr wrap="square" lIns="0" tIns="0" rIns="0" bIns="0" rtlCol="0" anchor="ctr"/>
           <a:lstStyle/>
           <a:p>
-            <a:pPr indent="0" marL="0">
-              <a:buNone/>
-            </a:pPr>
-            <a:r>
-              <a:rPr lang="en-US" sz="1300" b="1" spc="300" kern="0" dirty="0">
+            <a:pPr marL="0" indent="0">
+              <a:buNone/>
+            </a:pPr>
+            <a:r>
+              <a:rPr lang="en-US" sz="1300" b="1" kern="0" spc="300" dirty="0">
                 <a:solidFill>
                   <a:srgbClr val="D97757"/>
                 </a:solidFill>
@@ -6025,7 +5708,7 @@
           <a:bodyPr wrap="square" lIns="0" tIns="0" rIns="0" bIns="0" rtlCol="0" anchor="ctr"/>
           <a:lstStyle/>
           <a:p>
-            <a:pPr indent="0" marL="0">
+            <a:pPr marL="0" indent="0">
               <a:lnSpc>
                 <a:spcPct val="98000"/>
               </a:lnSpc>
@@ -6045,7 +5728,7 @@
             <a:endParaRPr lang="en-US" sz="4600" dirty="0"/>
           </a:p>
           <a:p>
-            <a:pPr indent="0" marL="0">
+            <a:pPr marL="0" indent="0">
               <a:lnSpc>
                 <a:spcPct val="98000"/>
               </a:lnSpc>
@@ -6087,7 +5770,7 @@
           <a:bodyPr wrap="square" lIns="0" tIns="0" rIns="0" bIns="0" rtlCol="0" anchor="ctr"/>
           <a:lstStyle/>
           <a:p>
-            <a:pPr indent="0" marL="0">
+            <a:pPr marL="0" indent="0">
               <a:buNone/>
             </a:pPr>
             <a:r>
@@ -6131,6 +5814,13 @@
             <a:prstDash val="solid"/>
           </a:ln>
         </p:spPr>
+        <p:txBody>
+          <a:bodyPr/>
+          <a:lstStyle/>
+          <a:p>
+            <a:endParaRPr lang="en-US"/>
+          </a:p>
+        </p:txBody>
       </p:sp>
       <p:sp>
         <p:nvSpPr>
@@ -6153,7 +5843,7 @@
           <a:bodyPr wrap="square" lIns="0" tIns="0" rIns="0" bIns="0" rtlCol="0" anchor="ctr"/>
           <a:lstStyle/>
           <a:p>
-            <a:pPr algn="ctr" indent="0" marL="0">
+            <a:pPr marL="0" indent="0" algn="ctr">
               <a:buNone/>
             </a:pPr>
             <a:r>
@@ -6197,6 +5887,13 @@
             <a:prstDash val="solid"/>
           </a:ln>
         </p:spPr>
+        <p:txBody>
+          <a:bodyPr/>
+          <a:lstStyle/>
+          <a:p>
+            <a:endParaRPr lang="en-US"/>
+          </a:p>
+        </p:txBody>
       </p:sp>
       <p:sp>
         <p:nvSpPr>
@@ -6219,7 +5916,7 @@
           <a:bodyPr wrap="square" lIns="0" tIns="0" rIns="0" bIns="0" rtlCol="0" anchor="ctr"/>
           <a:lstStyle/>
           <a:p>
-            <a:pPr algn="ctr" indent="0" marL="0">
+            <a:pPr marL="0" indent="0" algn="ctr">
               <a:buNone/>
             </a:pPr>
             <a:r>
@@ -6263,6 +5960,13 @@
             <a:prstDash val="solid"/>
           </a:ln>
         </p:spPr>
+        <p:txBody>
+          <a:bodyPr/>
+          <a:lstStyle/>
+          <a:p>
+            <a:endParaRPr lang="en-US"/>
+          </a:p>
+        </p:txBody>
       </p:sp>
       <p:sp>
         <p:nvSpPr>
@@ -6285,7 +5989,7 @@
           <a:bodyPr wrap="square" lIns="0" tIns="0" rIns="0" bIns="0" rtlCol="0" anchor="ctr"/>
           <a:lstStyle/>
           <a:p>
-            <a:pPr algn="ctr" indent="0" marL="0">
+            <a:pPr marL="0" indent="0" algn="ctr">
               <a:buNone/>
             </a:pPr>
             <a:r>
@@ -6329,6 +6033,13 @@
             <a:prstDash val="solid"/>
           </a:ln>
         </p:spPr>
+        <p:txBody>
+          <a:bodyPr/>
+          <a:lstStyle/>
+          <a:p>
+            <a:endParaRPr lang="en-US"/>
+          </a:p>
+        </p:txBody>
       </p:sp>
       <p:sp>
         <p:nvSpPr>
@@ -6351,7 +6062,7 @@
           <a:bodyPr wrap="square" lIns="0" tIns="0" rIns="0" bIns="0" rtlCol="0" anchor="ctr"/>
           <a:lstStyle/>
           <a:p>
-            <a:pPr algn="ctr" indent="0" marL="0">
+            <a:pPr marL="0" indent="0" algn="ctr">
               <a:buNone/>
             </a:pPr>
             <a:r>
@@ -6390,7 +6101,7 @@
           <a:bodyPr wrap="square" rtlCol="0" anchor="ctr"/>
           <a:lstStyle/>
           <a:p>
-            <a:pPr indent="0" marL="0">
+            <a:pPr marL="0" indent="0">
               <a:buNone/>
             </a:pPr>
             <a:r>
@@ -6429,7 +6140,7 @@
           <a:bodyPr wrap="square" rtlCol="0" anchor="ctr"/>
           <a:lstStyle/>
           <a:p>
-            <a:pPr algn="r" indent="0" marL="0">
+            <a:pPr marL="0" indent="0" algn="r">
               <a:buNone/>
             </a:pPr>
             <a:r>
@@ -6463,6 +6174,7 @@
         <a:solidFill>
           <a:srgbClr val="F0EEE6"/>
         </a:solidFill>
+        <a:effectLst/>
       </p:bgPr>
     </p:bg>
     <p:spTree>
@@ -6500,11 +6212,11 @@
           <a:bodyPr wrap="square" lIns="0" tIns="0" rIns="0" bIns="0" rtlCol="0" anchor="ctr"/>
           <a:lstStyle/>
           <a:p>
-            <a:pPr indent="0" marL="0">
-              <a:buNone/>
-            </a:pPr>
-            <a:r>
-              <a:rPr lang="en-US" sz="1100" b="1" spc="200" kern="0" dirty="0">
+            <a:pPr marL="0" indent="0">
+              <a:buNone/>
+            </a:pPr>
+            <a:r>
+              <a:rPr lang="en-US" sz="1100" b="1" kern="0" spc="200" dirty="0">
                 <a:solidFill>
                   <a:srgbClr val="D97757"/>
                 </a:solidFill>
@@ -6539,7 +6251,7 @@
           <a:bodyPr wrap="square" lIns="0" tIns="0" rIns="0" bIns="0" rtlCol="0" anchor="ctr"/>
           <a:lstStyle/>
           <a:p>
-            <a:pPr indent="0" marL="0">
+            <a:pPr marL="0" indent="0">
               <a:buNone/>
             </a:pPr>
             <a:r>
@@ -6559,14 +6271,14 @@
       </p:sp>
       <p:pic>
         <p:nvPicPr>
-          <p:cNvPr id="4" name="Image 0" descr="preencoded.png">    </p:cNvPr>
+          <p:cNvPr id="4" name="Image 0" descr="preencoded.png"/>
           <p:cNvPicPr>
             <a:picLocks noChangeAspect="1"/>
           </p:cNvPicPr>
           <p:nvPr/>
         </p:nvPicPr>
         <p:blipFill>
-          <a:blip r:embed="rId1"/>
+          <a:blip r:embed="rId2"/>
           <a:stretch>
             <a:fillRect/>
           </a:stretch>
@@ -6583,7 +6295,7 @@
       </p:pic>
       <p:graphicFrame>
         <p:nvGraphicFramePr>
-          <p:cNvPr id="4" name="Table 0"/>
+          <p:cNvPr id="5" name="Table 0"/>
           <p:cNvGraphicFramePr>
             <a:graphicFrameLocks noGrp="1"/>
           </p:cNvGraphicFramePr>
@@ -6597,18 +6309,48 @@
         </p:nvGraphicFramePr>
         <p:xfrm>
           <a:off x="365760" y="1325880"/>
-          <a:ext cx="8412480" cy="914400"/>
+          <a:ext cx="8412480" cy="2858008"/>
         </p:xfrm>
         <a:graphic>
           <a:graphicData uri="http://schemas.openxmlformats.org/drawingml/2006/table">
             <a:tbl>
               <a:tblPr/>
               <a:tblGrid>
-                <a:gridCol w="1783080"/>
-                <a:gridCol w="1600200"/>
-                <a:gridCol w="1371600"/>
-                <a:gridCol w="1280160"/>
-                <a:gridCol w="2377440"/>
+                <a:gridCol w="1783080">
+                  <a:extLst>
+                    <a:ext uri="{9D8B030D-6E8A-4147-A177-3AD203B41FA5}">
+                      <a16:colId xmlns:a16="http://schemas.microsoft.com/office/drawing/2014/main" val="20000"/>
+                    </a:ext>
+                  </a:extLst>
+                </a:gridCol>
+                <a:gridCol w="1600200">
+                  <a:extLst>
+                    <a:ext uri="{9D8B030D-6E8A-4147-A177-3AD203B41FA5}">
+                      <a16:colId xmlns:a16="http://schemas.microsoft.com/office/drawing/2014/main" val="20001"/>
+                    </a:ext>
+                  </a:extLst>
+                </a:gridCol>
+                <a:gridCol w="1371600">
+                  <a:extLst>
+                    <a:ext uri="{9D8B030D-6E8A-4147-A177-3AD203B41FA5}">
+                      <a16:colId xmlns:a16="http://schemas.microsoft.com/office/drawing/2014/main" val="20002"/>
+                    </a:ext>
+                  </a:extLst>
+                </a:gridCol>
+                <a:gridCol w="1280160">
+                  <a:extLst>
+                    <a:ext uri="{9D8B030D-6E8A-4147-A177-3AD203B41FA5}">
+                      <a16:colId xmlns:a16="http://schemas.microsoft.com/office/drawing/2014/main" val="20003"/>
+                    </a:ext>
+                  </a:extLst>
+                </a:gridCol>
+                <a:gridCol w="2377440">
+                  <a:extLst>
+                    <a:ext uri="{9D8B030D-6E8A-4147-A177-3AD203B41FA5}">
+                      <a16:colId xmlns:a16="http://schemas.microsoft.com/office/drawing/2014/main" val="20004"/>
+                    </a:ext>
+                  </a:extLst>
+                </a:gridCol>
               </a:tblGrid>
               <a:tr h="365760">
                 <a:tc>
@@ -6616,7 +6358,7 @@
                     <a:bodyPr/>
                     <a:lstStyle/>
                     <a:p>
-                      <a:pPr algn="l" indent="0" marL="0">
+                      <a:pPr marL="0" indent="0" algn="l">
                         <a:buNone/>
                       </a:pPr>
                       <a:r>
@@ -6677,7 +6419,7 @@
                     <a:bodyPr/>
                     <a:lstStyle/>
                     <a:p>
-                      <a:pPr algn="l" indent="0" marL="0">
+                      <a:pPr marL="0" indent="0" algn="l">
                         <a:buNone/>
                       </a:pPr>
                       <a:r>
@@ -6738,7 +6480,7 @@
                     <a:bodyPr/>
                     <a:lstStyle/>
                     <a:p>
-                      <a:pPr algn="l" indent="0" marL="0">
+                      <a:pPr marL="0" indent="0" algn="l">
                         <a:buNone/>
                       </a:pPr>
                       <a:r>
@@ -6752,7 +6494,7 @@
                       <a:endParaRPr lang="en-US" sz="1050" dirty="0"/>
                     </a:p>
                     <a:p>
-                      <a:pPr algn="l" indent="0" marL="0">
+                      <a:pPr marL="0" indent="0" algn="l">
                         <a:buNone/>
                       </a:pPr>
                       <a:r>
@@ -6813,7 +6555,7 @@
                     <a:bodyPr/>
                     <a:lstStyle/>
                     <a:p>
-                      <a:pPr algn="l" indent="0" marL="0">
+                      <a:pPr marL="0" indent="0" algn="l">
                         <a:buNone/>
                       </a:pPr>
                       <a:r>
@@ -6874,7 +6616,7 @@
                     <a:bodyPr/>
                     <a:lstStyle/>
                     <a:p>
-                      <a:pPr algn="l" indent="0" marL="0">
+                      <a:pPr marL="0" indent="0" algn="l">
                         <a:buNone/>
                       </a:pPr>
                       <a:r>
@@ -6930,6 +6672,11 @@
                     </a:solidFill>
                   </a:tcPr>
                 </a:tc>
+                <a:extLst>
+                  <a:ext uri="{0D108BD9-81ED-4DB2-BD59-A6C34878D82A}">
+                    <a16:rowId xmlns:a16="http://schemas.microsoft.com/office/drawing/2014/main" val="10000"/>
+                  </a:ext>
+                </a:extLst>
               </a:tr>
               <a:tr h="310896">
                 <a:tc>
@@ -6937,7 +6684,7 @@
                     <a:bodyPr/>
                     <a:lstStyle/>
                     <a:p>
-                      <a:pPr indent="0" marL="0">
+                      <a:pPr marL="0" indent="0">
                         <a:buNone/>
                       </a:pPr>
                       <a:r>
@@ -6998,7 +6745,7 @@
                     <a:bodyPr/>
                     <a:lstStyle/>
                     <a:p>
-                      <a:pPr indent="0" marL="0">
+                      <a:pPr marL="0" indent="0">
                         <a:buNone/>
                       </a:pPr>
                       <a:r>
@@ -7059,7 +6806,7 @@
                     <a:bodyPr/>
                     <a:lstStyle/>
                     <a:p>
-                      <a:pPr indent="0" marL="0">
+                      <a:pPr marL="0" indent="0">
                         <a:buNone/>
                       </a:pPr>
                       <a:r>
@@ -7120,7 +6867,7 @@
                     <a:bodyPr/>
                     <a:lstStyle/>
                     <a:p>
-                      <a:pPr indent="0" marL="0">
+                      <a:pPr marL="0" indent="0">
                         <a:buNone/>
                       </a:pPr>
                       <a:r>
@@ -7181,7 +6928,7 @@
                     <a:bodyPr/>
                     <a:lstStyle/>
                     <a:p>
-                      <a:pPr indent="0" marL="0">
+                      <a:pPr marL="0" indent="0">
                         <a:buNone/>
                       </a:pPr>
                       <a:r>
@@ -7237,6 +6984,11 @@
                     </a:solidFill>
                   </a:tcPr>
                 </a:tc>
+                <a:extLst>
+                  <a:ext uri="{0D108BD9-81ED-4DB2-BD59-A6C34878D82A}">
+                    <a16:rowId xmlns:a16="http://schemas.microsoft.com/office/drawing/2014/main" val="10001"/>
+                  </a:ext>
+                </a:extLst>
               </a:tr>
               <a:tr h="310896">
                 <a:tc>
@@ -7244,7 +6996,7 @@
                     <a:bodyPr/>
                     <a:lstStyle/>
                     <a:p>
-                      <a:pPr indent="0" marL="0">
+                      <a:pPr marL="0" indent="0">
                         <a:buNone/>
                       </a:pPr>
                       <a:r>
@@ -7305,7 +7057,7 @@
                     <a:bodyPr/>
                     <a:lstStyle/>
                     <a:p>
-                      <a:pPr indent="0" marL="0">
+                      <a:pPr marL="0" indent="0">
                         <a:buNone/>
                       </a:pPr>
                       <a:r>
@@ -7366,7 +7118,7 @@
                     <a:bodyPr/>
                     <a:lstStyle/>
                     <a:p>
-                      <a:pPr indent="0" marL="0">
+                      <a:pPr marL="0" indent="0">
                         <a:buNone/>
                       </a:pPr>
                       <a:r>
@@ -7427,7 +7179,7 @@
                     <a:bodyPr/>
                     <a:lstStyle/>
                     <a:p>
-                      <a:pPr indent="0" marL="0">
+                      <a:pPr marL="0" indent="0">
                         <a:buNone/>
                       </a:pPr>
                       <a:r>
@@ -7488,7 +7240,7 @@
                     <a:bodyPr/>
                     <a:lstStyle/>
                     <a:p>
-                      <a:pPr indent="0" marL="0">
+                      <a:pPr marL="0" indent="0">
                         <a:buNone/>
                       </a:pPr>
                       <a:r>
@@ -7544,6 +7296,11 @@
                     </a:solidFill>
                   </a:tcPr>
                 </a:tc>
+                <a:extLst>
+                  <a:ext uri="{0D108BD9-81ED-4DB2-BD59-A6C34878D82A}">
+                    <a16:rowId xmlns:a16="http://schemas.microsoft.com/office/drawing/2014/main" val="10002"/>
+                  </a:ext>
+                </a:extLst>
               </a:tr>
               <a:tr h="310896">
                 <a:tc>
@@ -7551,7 +7308,7 @@
                     <a:bodyPr/>
                     <a:lstStyle/>
                     <a:p>
-                      <a:pPr indent="0" marL="0">
+                      <a:pPr marL="0" indent="0">
                         <a:buNone/>
                       </a:pPr>
                       <a:r>
@@ -7612,7 +7369,7 @@
                     <a:bodyPr/>
                     <a:lstStyle/>
                     <a:p>
-                      <a:pPr indent="0" marL="0">
+                      <a:pPr marL="0" indent="0">
                         <a:buNone/>
                       </a:pPr>
                       <a:r>
@@ -7673,7 +7430,7 @@
                     <a:bodyPr/>
                     <a:lstStyle/>
                     <a:p>
-                      <a:pPr indent="0" marL="0">
+                      <a:pPr marL="0" indent="0">
                         <a:buNone/>
                       </a:pPr>
                       <a:r>
@@ -7734,7 +7491,7 @@
                     <a:bodyPr/>
                     <a:lstStyle/>
                     <a:p>
-                      <a:pPr indent="0" marL="0">
+                      <a:pPr marL="0" indent="0">
                         <a:buNone/>
                       </a:pPr>
                       <a:r>
@@ -7795,7 +7552,7 @@
                     <a:bodyPr/>
                     <a:lstStyle/>
                     <a:p>
-                      <a:pPr indent="0" marL="0">
+                      <a:pPr marL="0" indent="0">
                         <a:buNone/>
                       </a:pPr>
                       <a:r>
@@ -7851,6 +7608,11 @@
                     </a:solidFill>
                   </a:tcPr>
                 </a:tc>
+                <a:extLst>
+                  <a:ext uri="{0D108BD9-81ED-4DB2-BD59-A6C34878D82A}">
+                    <a16:rowId xmlns:a16="http://schemas.microsoft.com/office/drawing/2014/main" val="10003"/>
+                  </a:ext>
+                </a:extLst>
               </a:tr>
               <a:tr h="310896">
                 <a:tc>
@@ -7858,7 +7620,7 @@
                     <a:bodyPr/>
                     <a:lstStyle/>
                     <a:p>
-                      <a:pPr indent="0" marL="0">
+                      <a:pPr marL="0" indent="0">
                         <a:buNone/>
                       </a:pPr>
                       <a:r>
@@ -7919,7 +7681,7 @@
                     <a:bodyPr/>
                     <a:lstStyle/>
                     <a:p>
-                      <a:pPr indent="0" marL="0">
+                      <a:pPr marL="0" indent="0">
                         <a:buNone/>
                       </a:pPr>
                       <a:r>
@@ -7980,7 +7742,7 @@
                     <a:bodyPr/>
                     <a:lstStyle/>
                     <a:p>
-                      <a:pPr indent="0" marL="0">
+                      <a:pPr marL="0" indent="0">
                         <a:buNone/>
                       </a:pPr>
                       <a:r>
@@ -8041,7 +7803,7 @@
                     <a:bodyPr/>
                     <a:lstStyle/>
                     <a:p>
-                      <a:pPr indent="0" marL="0">
+                      <a:pPr marL="0" indent="0">
                         <a:buNone/>
                       </a:pPr>
                       <a:r>
@@ -8102,7 +7864,7 @@
                     <a:bodyPr/>
                     <a:lstStyle/>
                     <a:p>
-                      <a:pPr indent="0" marL="0">
+                      <a:pPr marL="0" indent="0">
                         <a:buNone/>
                       </a:pPr>
                       <a:r>
@@ -8158,6 +7920,11 @@
                     </a:solidFill>
                   </a:tcPr>
                 </a:tc>
+                <a:extLst>
+                  <a:ext uri="{0D108BD9-81ED-4DB2-BD59-A6C34878D82A}">
+                    <a16:rowId xmlns:a16="http://schemas.microsoft.com/office/drawing/2014/main" val="10004"/>
+                  </a:ext>
+                </a:extLst>
               </a:tr>
               <a:tr h="310896">
                 <a:tc>
@@ -8165,7 +7932,7 @@
                     <a:bodyPr/>
                     <a:lstStyle/>
                     <a:p>
-                      <a:pPr indent="0" marL="0">
+                      <a:pPr marL="0" indent="0">
                         <a:buNone/>
                       </a:pPr>
                       <a:r>
@@ -8226,7 +7993,7 @@
                     <a:bodyPr/>
                     <a:lstStyle/>
                     <a:p>
-                      <a:pPr indent="0" marL="0">
+                      <a:pPr marL="0" indent="0">
                         <a:buNone/>
                       </a:pPr>
                       <a:r>
@@ -8287,7 +8054,7 @@
                     <a:bodyPr/>
                     <a:lstStyle/>
                     <a:p>
-                      <a:pPr indent="0" marL="0">
+                      <a:pPr marL="0" indent="0">
                         <a:buNone/>
                       </a:pPr>
                       <a:r>
@@ -8348,7 +8115,7 @@
                     <a:bodyPr/>
                     <a:lstStyle/>
                     <a:p>
-                      <a:pPr indent="0" marL="0">
+                      <a:pPr marL="0" indent="0">
                         <a:buNone/>
                       </a:pPr>
                       <a:r>
@@ -8409,7 +8176,7 @@
                     <a:bodyPr/>
                     <a:lstStyle/>
                     <a:p>
-                      <a:pPr indent="0" marL="0">
+                      <a:pPr marL="0" indent="0">
                         <a:buNone/>
                       </a:pPr>
                       <a:r>
@@ -8465,6 +8232,11 @@
                     </a:solidFill>
                   </a:tcPr>
                 </a:tc>
+                <a:extLst>
+                  <a:ext uri="{0D108BD9-81ED-4DB2-BD59-A6C34878D82A}">
+                    <a16:rowId xmlns:a16="http://schemas.microsoft.com/office/drawing/2014/main" val="10005"/>
+                  </a:ext>
+                </a:extLst>
               </a:tr>
               <a:tr h="310896">
                 <a:tc>
@@ -8472,7 +8244,7 @@
                     <a:bodyPr/>
                     <a:lstStyle/>
                     <a:p>
-                      <a:pPr indent="0" marL="0">
+                      <a:pPr marL="0" indent="0">
                         <a:buNone/>
                       </a:pPr>
                       <a:r>
@@ -8533,7 +8305,7 @@
                     <a:bodyPr/>
                     <a:lstStyle/>
                     <a:p>
-                      <a:pPr indent="0" marL="0">
+                      <a:pPr marL="0" indent="0">
                         <a:buNone/>
                       </a:pPr>
                       <a:r>
@@ -8594,7 +8366,7 @@
                     <a:bodyPr/>
                     <a:lstStyle/>
                     <a:p>
-                      <a:pPr indent="0" marL="0">
+                      <a:pPr marL="0" indent="0">
                         <a:buNone/>
                       </a:pPr>
                       <a:r>
@@ -8655,7 +8427,7 @@
                     <a:bodyPr/>
                     <a:lstStyle/>
                     <a:p>
-                      <a:pPr indent="0" marL="0">
+                      <a:pPr marL="0" indent="0">
                         <a:buNone/>
                       </a:pPr>
                       <a:r>
@@ -8716,7 +8488,7 @@
                     <a:bodyPr/>
                     <a:lstStyle/>
                     <a:p>
-                      <a:pPr indent="0" marL="0">
+                      <a:pPr marL="0" indent="0">
                         <a:buNone/>
                       </a:pPr>
                       <a:r>
@@ -8772,6 +8544,11 @@
                     </a:solidFill>
                   </a:tcPr>
                 </a:tc>
+                <a:extLst>
+                  <a:ext uri="{0D108BD9-81ED-4DB2-BD59-A6C34878D82A}">
+                    <a16:rowId xmlns:a16="http://schemas.microsoft.com/office/drawing/2014/main" val="10006"/>
+                  </a:ext>
+                </a:extLst>
               </a:tr>
               <a:tr h="310896">
                 <a:tc>
@@ -8779,7 +8556,7 @@
                     <a:bodyPr/>
                     <a:lstStyle/>
                     <a:p>
-                      <a:pPr indent="0" marL="0">
+                      <a:pPr marL="0" indent="0">
                         <a:buNone/>
                       </a:pPr>
                       <a:r>
@@ -8840,7 +8617,7 @@
                     <a:bodyPr/>
                     <a:lstStyle/>
                     <a:p>
-                      <a:pPr indent="0" marL="0">
+                      <a:pPr marL="0" indent="0">
                         <a:buNone/>
                       </a:pPr>
                       <a:r>
@@ -8901,7 +8678,7 @@
                     <a:bodyPr/>
                     <a:lstStyle/>
                     <a:p>
-                      <a:pPr indent="0" marL="0">
+                      <a:pPr marL="0" indent="0">
                         <a:buNone/>
                       </a:pPr>
                       <a:r>
@@ -8962,7 +8739,7 @@
                     <a:bodyPr/>
                     <a:lstStyle/>
                     <a:p>
-                      <a:pPr indent="0" marL="0">
+                      <a:pPr marL="0" indent="0">
                         <a:buNone/>
                       </a:pPr>
                       <a:r>
@@ -9023,7 +8800,7 @@
                     <a:bodyPr/>
                     <a:lstStyle/>
                     <a:p>
-                      <a:pPr indent="0" marL="0">
+                      <a:pPr marL="0" indent="0">
                         <a:buNone/>
                       </a:pPr>
                       <a:r>
@@ -9079,6 +8856,11 @@
                     </a:solidFill>
                   </a:tcPr>
                 </a:tc>
+                <a:extLst>
+                  <a:ext uri="{0D108BD9-81ED-4DB2-BD59-A6C34878D82A}">
+                    <a16:rowId xmlns:a16="http://schemas.microsoft.com/office/drawing/2014/main" val="10007"/>
+                  </a:ext>
+                </a:extLst>
               </a:tr>
               <a:tr h="310896">
                 <a:tc>
@@ -9086,7 +8868,7 @@
                     <a:bodyPr/>
                     <a:lstStyle/>
                     <a:p>
-                      <a:pPr indent="0" marL="0">
+                      <a:pPr marL="0" indent="0">
                         <a:buNone/>
                       </a:pPr>
                       <a:r>
@@ -9147,7 +8929,7 @@
                     <a:bodyPr/>
                     <a:lstStyle/>
                     <a:p>
-                      <a:pPr indent="0" marL="0">
+                      <a:pPr marL="0" indent="0">
                         <a:buNone/>
                       </a:pPr>
                       <a:r>
@@ -9208,7 +8990,7 @@
                     <a:bodyPr/>
                     <a:lstStyle/>
                     <a:p>
-                      <a:pPr indent="0" marL="0">
+                      <a:pPr marL="0" indent="0">
                         <a:buNone/>
                       </a:pPr>
                       <a:r>
@@ -9269,7 +9051,7 @@
                     <a:bodyPr/>
                     <a:lstStyle/>
                     <a:p>
-                      <a:pPr indent="0" marL="0">
+                      <a:pPr marL="0" indent="0">
                         <a:buNone/>
                       </a:pPr>
                       <a:r>
@@ -9330,7 +9112,7 @@
                     <a:bodyPr/>
                     <a:lstStyle/>
                     <a:p>
-                      <a:pPr indent="0" marL="0">
+                      <a:pPr marL="0" indent="0">
                         <a:buNone/>
                       </a:pPr>
                       <a:r>
@@ -9386,6 +9168,11 @@
                     </a:solidFill>
                   </a:tcPr>
                 </a:tc>
+                <a:extLst>
+                  <a:ext uri="{0D108BD9-81ED-4DB2-BD59-A6C34878D82A}">
+                    <a16:rowId xmlns:a16="http://schemas.microsoft.com/office/drawing/2014/main" val="10008"/>
+                  </a:ext>
+                </a:extLst>
               </a:tr>
             </a:tbl>
           </a:graphicData>
@@ -9412,7 +9199,7 @@
           <a:bodyPr wrap="square" rtlCol="0" anchor="ctr"/>
           <a:lstStyle/>
           <a:p>
-            <a:pPr indent="0" marL="0">
+            <a:pPr marL="0" indent="0">
               <a:buNone/>
             </a:pPr>
             <a:r>
@@ -9451,7 +9238,7 @@
           <a:bodyPr wrap="square" rtlCol="0" anchor="ctr"/>
           <a:lstStyle/>
           <a:p>
-            <a:pPr algn="r" indent="0" marL="0">
+            <a:pPr marL="0" indent="0" algn="r">
               <a:buNone/>
             </a:pPr>
             <a:r>
@@ -9466,45 +9253,6 @@
               <a:t>Section 2  ·  3/14</a:t>
             </a:r>
             <a:endParaRPr lang="en-US" sz="900" dirty="0"/>
-          </a:p>
-        </p:txBody>
-      </p:sp>
-      <p:sp>
-        <p:nvSpPr>
-          <p:cNvPr id="8" name="Text 4"/>
-          <p:cNvSpPr/>
-          <p:nvPr/>
-        </p:nvSpPr>
-        <p:spPr>
-          <a:xfrm>
-            <a:off x="548640" y="4462272"/>
-            <a:ext cx="8046720" cy="274320"/>
-          </a:xfrm>
-          <a:prstGeom prst="rect">
-            <a:avLst/>
-          </a:prstGeom>
-          <a:noFill/>
-          <a:ln/>
-        </p:spPr>
-        <p:txBody>
-          <a:bodyPr wrap="square" lIns="0" tIns="0" rIns="0" bIns="0" rtlCol="0" anchor="ctr"/>
-          <a:lstStyle/>
-          <a:p>
-            <a:pPr indent="0" marL="0">
-              <a:buNone/>
-            </a:pPr>
-            <a:r>
-              <a:rPr lang="en-US" sz="1000" i="1" dirty="0">
-                <a:solidFill>
-                  <a:srgbClr val="615C52"/>
-                </a:solidFill>
-                <a:latin typeface="Inter" pitchFamily="34" charset="0"/>
-                <a:ea typeface="Inter" pitchFamily="34" charset="-122"/>
-                <a:cs typeface="Inter" pitchFamily="34" charset="-120"/>
-              </a:rPr>
-              <a:t>▸ Don't memorize — use it as a lookup: pick the row that matches your need.</a:t>
-            </a:r>
-            <a:endParaRPr lang="en-US" sz="1000" dirty="0"/>
           </a:p>
         </p:txBody>
       </p:sp>
@@ -9524,6 +9272,7 @@
         <a:solidFill>
           <a:srgbClr val="F0EEE6"/>
         </a:solidFill>
+        <a:effectLst/>
       </p:bgPr>
     </p:bg>
     <p:spTree>
@@ -9561,11 +9310,11 @@
           <a:bodyPr wrap="square" lIns="0" tIns="0" rIns="0" bIns="0" rtlCol="0" anchor="ctr"/>
           <a:lstStyle/>
           <a:p>
-            <a:pPr indent="0" marL="0">
-              <a:buNone/>
-            </a:pPr>
-            <a:r>
-              <a:rPr lang="en-US" sz="1100" b="1" spc="200" kern="0" dirty="0">
+            <a:pPr marL="0" indent="0">
+              <a:buNone/>
+            </a:pPr>
+            <a:r>
+              <a:rPr lang="en-US" sz="1100" b="1" kern="0" spc="200" dirty="0">
                 <a:solidFill>
                   <a:srgbClr val="D97757"/>
                 </a:solidFill>
@@ -9600,7 +9349,7 @@
           <a:bodyPr wrap="square" lIns="0" tIns="0" rIns="0" bIns="0" rtlCol="0" anchor="ctr"/>
           <a:lstStyle/>
           <a:p>
-            <a:pPr indent="0" marL="0">
+            <a:pPr marL="0" indent="0">
               <a:buNone/>
             </a:pPr>
             <a:r>
@@ -9620,14 +9369,14 @@
       </p:sp>
       <p:pic>
         <p:nvPicPr>
-          <p:cNvPr id="4" name="Image 0" descr="preencoded.png">    </p:cNvPr>
+          <p:cNvPr id="4" name="Image 0" descr="preencoded.png"/>
           <p:cNvPicPr>
             <a:picLocks noChangeAspect="1"/>
           </p:cNvPicPr>
           <p:nvPr/>
         </p:nvPicPr>
         <p:blipFill>
-          <a:blip r:embed="rId1"/>
+          <a:blip r:embed="rId2"/>
           <a:stretch>
             <a:fillRect/>
           </a:stretch>
@@ -9668,13 +9417,20 @@
             <a:prstDash val="solid"/>
           </a:ln>
           <a:effectLst>
-            <a:outerShdw sx="100000" sy="100000" kx="0" ky="0" algn="bl" rotWithShape="0" blurRad="88900" dist="38100" dir="5400000">
+            <a:outerShdw blurRad="88900" dist="38100" dir="5400000" algn="bl" rotWithShape="0">
               <a:srgbClr val="000000">
                 <a:alpha val="10000"/>
               </a:srgbClr>
             </a:outerShdw>
           </a:effectLst>
         </p:spPr>
+        <p:txBody>
+          <a:bodyPr/>
+          <a:lstStyle/>
+          <a:p>
+            <a:endParaRPr lang="en-US"/>
+          </a:p>
+        </p:txBody>
       </p:sp>
       <p:sp>
         <p:nvSpPr>
@@ -9695,17 +9451,24 @@
           </a:solidFill>
           <a:ln/>
         </p:spPr>
+        <p:txBody>
+          <a:bodyPr/>
+          <a:lstStyle/>
+          <a:p>
+            <a:endParaRPr lang="en-US"/>
+          </a:p>
+        </p:txBody>
       </p:sp>
       <p:pic>
         <p:nvPicPr>
-          <p:cNvPr id="7" name="Image 1" descr="preencoded.png">    </p:cNvPr>
+          <p:cNvPr id="7" name="Image 1" descr="preencoded.png"/>
           <p:cNvPicPr>
             <a:picLocks noChangeAspect="1"/>
           </p:cNvPicPr>
           <p:nvPr/>
         </p:nvPicPr>
         <p:blipFill>
-          <a:blip r:embed="rId2"/>
+          <a:blip r:embed="rId3"/>
           <a:stretch>
             <a:fillRect/>
           </a:stretch>
@@ -9741,7 +9504,7 @@
           <a:bodyPr wrap="square" lIns="0" tIns="0" rIns="0" bIns="0" rtlCol="0" anchor="t"/>
           <a:lstStyle/>
           <a:p>
-            <a:pPr indent="0" marL="0">
+            <a:pPr marL="0" indent="0">
               <a:buNone/>
             </a:pPr>
             <a:r>
@@ -9758,7 +9521,7 @@
             <a:endParaRPr lang="en-US" sz="1500" dirty="0"/>
           </a:p>
           <a:p>
-            <a:pPr indent="0" marL="0">
+            <a:pPr marL="0" indent="0">
               <a:buNone/>
             </a:pPr>
             <a:r>
@@ -9797,7 +9560,7 @@
           <a:bodyPr wrap="square" lIns="0" tIns="0" rIns="0" bIns="0" rtlCol="0" anchor="ctr"/>
           <a:lstStyle/>
           <a:p>
-            <a:pPr indent="0" marL="0">
+            <a:pPr marL="0" indent="0">
               <a:buNone/>
             </a:pPr>
             <a:r>
@@ -9836,7 +9599,7 @@
           <a:bodyPr wrap="square" lIns="0" tIns="0" rIns="0" bIns="0" rtlCol="0" anchor="ctr"/>
           <a:lstStyle/>
           <a:p>
-            <a:pPr indent="0" marL="0">
+            <a:pPr marL="0" indent="0">
               <a:buNone/>
             </a:pPr>
             <a:r>
@@ -9875,7 +9638,7 @@
           <a:bodyPr wrap="square" lIns="0" tIns="0" rIns="0" bIns="0" rtlCol="0" anchor="ctr"/>
           <a:lstStyle/>
           <a:p>
-            <a:pPr indent="0" marL="0">
+            <a:pPr marL="0" indent="0">
               <a:buNone/>
             </a:pPr>
             <a:r>
@@ -9919,13 +9682,20 @@
             <a:prstDash val="solid"/>
           </a:ln>
           <a:effectLst>
-            <a:outerShdw sx="100000" sy="100000" kx="0" ky="0" algn="bl" rotWithShape="0" blurRad="88900" dist="38100" dir="5400000">
+            <a:outerShdw blurRad="88900" dist="38100" dir="5400000" algn="bl" rotWithShape="0">
               <a:srgbClr val="000000">
                 <a:alpha val="10000"/>
               </a:srgbClr>
             </a:outerShdw>
           </a:effectLst>
         </p:spPr>
+        <p:txBody>
+          <a:bodyPr/>
+          <a:lstStyle/>
+          <a:p>
+            <a:endParaRPr lang="en-US"/>
+          </a:p>
+        </p:txBody>
       </p:sp>
       <p:sp>
         <p:nvSpPr>
@@ -9946,17 +9716,24 @@
           </a:solidFill>
           <a:ln/>
         </p:spPr>
+        <p:txBody>
+          <a:bodyPr/>
+          <a:lstStyle/>
+          <a:p>
+            <a:endParaRPr lang="en-US"/>
+          </a:p>
+        </p:txBody>
       </p:sp>
       <p:pic>
         <p:nvPicPr>
-          <p:cNvPr id="14" name="Image 2" descr="preencoded.png">    </p:cNvPr>
+          <p:cNvPr id="14" name="Image 2" descr="preencoded.png"/>
           <p:cNvPicPr>
             <a:picLocks noChangeAspect="1"/>
           </p:cNvPicPr>
           <p:nvPr/>
         </p:nvPicPr>
         <p:blipFill>
-          <a:blip r:embed="rId3"/>
+          <a:blip r:embed="rId4"/>
           <a:stretch>
             <a:fillRect/>
           </a:stretch>
@@ -9992,7 +9769,7 @@
           <a:bodyPr wrap="square" lIns="0" tIns="0" rIns="0" bIns="0" rtlCol="0" anchor="t"/>
           <a:lstStyle/>
           <a:p>
-            <a:pPr indent="0" marL="0">
+            <a:pPr marL="0" indent="0">
               <a:buNone/>
             </a:pPr>
             <a:r>
@@ -10031,7 +9808,7 @@
           <a:bodyPr wrap="square" lIns="0" tIns="0" rIns="0" bIns="0" rtlCol="0" anchor="ctr"/>
           <a:lstStyle/>
           <a:p>
-            <a:pPr indent="0" marL="0">
+            <a:pPr marL="0" indent="0">
               <a:buNone/>
             </a:pPr>
             <a:r>
@@ -10070,7 +9847,7 @@
           <a:bodyPr wrap="square" lIns="0" tIns="0" rIns="0" bIns="0" rtlCol="0" anchor="ctr"/>
           <a:lstStyle/>
           <a:p>
-            <a:pPr indent="0" marL="0">
+            <a:pPr marL="0" indent="0">
               <a:buNone/>
             </a:pPr>
             <a:r>
@@ -10109,7 +9886,7 @@
           <a:bodyPr wrap="square" lIns="0" tIns="0" rIns="0" bIns="0" rtlCol="0" anchor="ctr"/>
           <a:lstStyle/>
           <a:p>
-            <a:pPr indent="0" marL="0">
+            <a:pPr marL="0" indent="0">
               <a:buNone/>
             </a:pPr>
             <a:r>
@@ -10153,13 +9930,20 @@
             <a:prstDash val="solid"/>
           </a:ln>
           <a:effectLst>
-            <a:outerShdw sx="100000" sy="100000" kx="0" ky="0" algn="bl" rotWithShape="0" blurRad="88900" dist="38100" dir="5400000">
+            <a:outerShdw blurRad="88900" dist="38100" dir="5400000" algn="bl" rotWithShape="0">
               <a:srgbClr val="000000">
                 <a:alpha val="10000"/>
               </a:srgbClr>
             </a:outerShdw>
           </a:effectLst>
         </p:spPr>
+        <p:txBody>
+          <a:bodyPr/>
+          <a:lstStyle/>
+          <a:p>
+            <a:endParaRPr lang="en-US"/>
+          </a:p>
+        </p:txBody>
       </p:sp>
       <p:sp>
         <p:nvSpPr>
@@ -10180,17 +9964,24 @@
           </a:solidFill>
           <a:ln/>
         </p:spPr>
+        <p:txBody>
+          <a:bodyPr/>
+          <a:lstStyle/>
+          <a:p>
+            <a:endParaRPr lang="en-US"/>
+          </a:p>
+        </p:txBody>
       </p:sp>
       <p:pic>
         <p:nvPicPr>
-          <p:cNvPr id="21" name="Image 3" descr="preencoded.png">    </p:cNvPr>
+          <p:cNvPr id="21" name="Image 3" descr="preencoded.png"/>
           <p:cNvPicPr>
             <a:picLocks noChangeAspect="1"/>
           </p:cNvPicPr>
           <p:nvPr/>
         </p:nvPicPr>
         <p:blipFill>
-          <a:blip r:embed="rId4"/>
+          <a:blip r:embed="rId5"/>
           <a:stretch>
             <a:fillRect/>
           </a:stretch>
@@ -10226,7 +10017,7 @@
           <a:bodyPr wrap="square" lIns="0" tIns="0" rIns="0" bIns="0" rtlCol="0" anchor="t"/>
           <a:lstStyle/>
           <a:p>
-            <a:pPr indent="0" marL="0">
+            <a:pPr marL="0" indent="0">
               <a:buNone/>
             </a:pPr>
             <a:r>
@@ -10265,7 +10056,7 @@
           <a:bodyPr wrap="square" lIns="0" tIns="0" rIns="0" bIns="0" rtlCol="0" anchor="ctr"/>
           <a:lstStyle/>
           <a:p>
-            <a:pPr indent="0" marL="0">
+            <a:pPr marL="0" indent="0">
               <a:buNone/>
             </a:pPr>
             <a:r>
@@ -10304,7 +10095,7 @@
           <a:bodyPr wrap="square" lIns="0" tIns="0" rIns="0" bIns="0" rtlCol="0" anchor="ctr"/>
           <a:lstStyle/>
           <a:p>
-            <a:pPr indent="0" marL="0">
+            <a:pPr marL="0" indent="0">
               <a:buNone/>
             </a:pPr>
             <a:r>
@@ -10343,7 +10134,7 @@
           <a:bodyPr wrap="square" lIns="0" tIns="0" rIns="0" bIns="0" rtlCol="0" anchor="ctr"/>
           <a:lstStyle/>
           <a:p>
-            <a:pPr indent="0" marL="0">
+            <a:pPr marL="0" indent="0">
               <a:buNone/>
             </a:pPr>
             <a:r>
@@ -10382,7 +10173,7 @@
           <a:bodyPr wrap="square" rtlCol="0" anchor="ctr"/>
           <a:lstStyle/>
           <a:p>
-            <a:pPr indent="0" marL="0">
+            <a:pPr marL="0" indent="0">
               <a:buNone/>
             </a:pPr>
             <a:r>
@@ -10421,7 +10212,7 @@
           <a:bodyPr wrap="square" rtlCol="0" anchor="ctr"/>
           <a:lstStyle/>
           <a:p>
-            <a:pPr algn="r" indent="0" marL="0">
+            <a:pPr marL="0" indent="0" algn="r">
               <a:buNone/>
             </a:pPr>
             <a:r>
@@ -10436,45 +10227,6 @@
               <a:t>Section 2  ·  4/14</a:t>
             </a:r>
             <a:endParaRPr lang="en-US" sz="900" dirty="0"/>
-          </a:p>
-        </p:txBody>
-      </p:sp>
-      <p:sp>
-        <p:nvSpPr>
-          <p:cNvPr id="28" name="Text 22"/>
-          <p:cNvSpPr/>
-          <p:nvPr/>
-        </p:nvSpPr>
-        <p:spPr>
-          <a:xfrm>
-            <a:off x="548640" y="4462272"/>
-            <a:ext cx="8046720" cy="274320"/>
-          </a:xfrm>
-          <a:prstGeom prst="rect">
-            <a:avLst/>
-          </a:prstGeom>
-          <a:noFill/>
-          <a:ln/>
-        </p:spPr>
-        <p:txBody>
-          <a:bodyPr wrap="square" lIns="0" tIns="0" rIns="0" bIns="0" rtlCol="0" anchor="ctr"/>
-          <a:lstStyle/>
-          <a:p>
-            <a:pPr indent="0" marL="0">
-              <a:buNone/>
-            </a:pPr>
-            <a:r>
-              <a:rPr lang="en-US" sz="1000" i="1" dirty="0">
-                <a:solidFill>
-                  <a:srgbClr val="615C52"/>
-                </a:solidFill>
-                <a:latin typeface="Inter" pitchFamily="34" charset="0"/>
-                <a:ea typeface="Inter" pitchFamily="34" charset="-122"/>
-                <a:cs typeface="Inter" pitchFamily="34" charset="-120"/>
-              </a:rPr>
-              <a:t>▸ Reflex rules: each phrasing on the left points to exactly one mechanism.</a:t>
-            </a:r>
-            <a:endParaRPr lang="en-US" sz="1000" dirty="0"/>
           </a:p>
         </p:txBody>
       </p:sp>
@@ -10494,6 +10246,7 @@
         <a:solidFill>
           <a:srgbClr val="F0EEE6"/>
         </a:solidFill>
+        <a:effectLst/>
       </p:bgPr>
     </p:bg>
     <p:spTree>
@@ -10531,11 +10284,11 @@
           <a:bodyPr wrap="square" lIns="0" tIns="0" rIns="0" bIns="0" rtlCol="0" anchor="ctr"/>
           <a:lstStyle/>
           <a:p>
-            <a:pPr indent="0" marL="0">
-              <a:buNone/>
-            </a:pPr>
-            <a:r>
-              <a:rPr lang="en-US" sz="1100" b="1" spc="200" kern="0" dirty="0">
+            <a:pPr marL="0" indent="0">
+              <a:buNone/>
+            </a:pPr>
+            <a:r>
+              <a:rPr lang="en-US" sz="1100" b="1" kern="0" spc="200" dirty="0">
                 <a:solidFill>
                   <a:srgbClr val="D97757"/>
                 </a:solidFill>
@@ -10570,7 +10323,7 @@
           <a:bodyPr wrap="square" lIns="0" tIns="0" rIns="0" bIns="0" rtlCol="0" anchor="ctr"/>
           <a:lstStyle/>
           <a:p>
-            <a:pPr indent="0" marL="0">
+            <a:pPr marL="0" indent="0">
               <a:buNone/>
             </a:pPr>
             <a:r>
@@ -10590,14 +10343,14 @@
       </p:sp>
       <p:pic>
         <p:nvPicPr>
-          <p:cNvPr id="4" name="Image 0" descr="preencoded.png">    </p:cNvPr>
+          <p:cNvPr id="4" name="Image 0" descr="preencoded.png"/>
           <p:cNvPicPr>
             <a:picLocks noChangeAspect="1"/>
           </p:cNvPicPr>
           <p:nvPr/>
         </p:nvPicPr>
         <p:blipFill>
-          <a:blip r:embed="rId1"/>
+          <a:blip r:embed="rId2"/>
           <a:stretch>
             <a:fillRect/>
           </a:stretch>
@@ -10633,13 +10386,20 @@
           </a:solidFill>
           <a:ln/>
           <a:effectLst>
-            <a:outerShdw sx="100000" sy="100000" kx="0" ky="0" algn="bl" rotWithShape="0" blurRad="88900" dist="38100" dir="5400000">
+            <a:outerShdw blurRad="88900" dist="38100" dir="5400000" algn="bl" rotWithShape="0">
               <a:srgbClr val="000000">
                 <a:alpha val="10000"/>
               </a:srgbClr>
             </a:outerShdw>
           </a:effectLst>
         </p:spPr>
+        <p:txBody>
+          <a:bodyPr/>
+          <a:lstStyle/>
+          <a:p>
+            <a:endParaRPr lang="en-US"/>
+          </a:p>
+        </p:txBody>
       </p:sp>
       <p:sp>
         <p:nvSpPr>
@@ -10662,11 +10422,11 @@
           <a:bodyPr wrap="square" lIns="0" tIns="0" rIns="0" bIns="0" rtlCol="0" anchor="ctr"/>
           <a:lstStyle/>
           <a:p>
-            <a:pPr indent="0" marL="0">
-              <a:buNone/>
-            </a:pPr>
-            <a:r>
-              <a:rPr lang="en-US" sz="1300" b="1" spc="100" kern="0" dirty="0">
+            <a:pPr marL="0" indent="0">
+              <a:buNone/>
+            </a:pPr>
+            <a:r>
+              <a:rPr lang="en-US" sz="1300" b="1" kern="0" spc="100" dirty="0">
                 <a:solidFill>
                   <a:srgbClr val="D97757"/>
                 </a:solidFill>
@@ -10791,13 +10551,20 @@
             <a:prstDash val="solid"/>
           </a:ln>
           <a:effectLst>
-            <a:outerShdw sx="100000" sy="100000" kx="0" ky="0" algn="bl" rotWithShape="0" blurRad="88900" dist="38100" dir="5400000">
+            <a:outerShdw blurRad="88900" dist="38100" dir="5400000" algn="bl" rotWithShape="0">
               <a:srgbClr val="000000">
                 <a:alpha val="10000"/>
               </a:srgbClr>
             </a:outerShdw>
           </a:effectLst>
         </p:spPr>
+        <p:txBody>
+          <a:bodyPr/>
+          <a:lstStyle/>
+          <a:p>
+            <a:endParaRPr lang="en-US"/>
+          </a:p>
+        </p:txBody>
       </p:sp>
       <p:sp>
         <p:nvSpPr>
@@ -10820,11 +10587,11 @@
           <a:bodyPr wrap="square" lIns="0" tIns="0" rIns="0" bIns="0" rtlCol="0" anchor="ctr"/>
           <a:lstStyle/>
           <a:p>
-            <a:pPr indent="0" marL="0">
-              <a:buNone/>
-            </a:pPr>
-            <a:r>
-              <a:rPr lang="en-US" sz="1300" b="1" spc="100" kern="0" dirty="0">
+            <a:pPr marL="0" indent="0">
+              <a:buNone/>
+            </a:pPr>
+            <a:r>
+              <a:rPr lang="en-US" sz="1300" b="1" kern="0" spc="100" dirty="0">
                 <a:solidFill>
                   <a:srgbClr val="615C52"/>
                 </a:solidFill>
@@ -10949,73 +10716,17 @@
             <a:prstDash val="solid"/>
           </a:ln>
         </p:spPr>
+        <p:txBody>
+          <a:bodyPr/>
+          <a:lstStyle/>
+          <a:p>
+            <a:endParaRPr lang="en-US"/>
+          </a:p>
+        </p:txBody>
       </p:sp>
       <p:pic>
         <p:nvPicPr>
-          <p:cNvPr id="12" name="Image 1" descr="preencoded.png">    </p:cNvPr>
-          <p:cNvPicPr>
-            <a:picLocks noChangeAspect="1"/>
-          </p:cNvPicPr>
-          <p:nvPr/>
-        </p:nvPicPr>
-        <p:blipFill>
-          <a:blip r:embed="rId2"/>
-          <a:stretch>
-            <a:fillRect/>
-          </a:stretch>
-        </p:blipFill>
-        <p:spPr>
-          <a:xfrm>
-            <a:off x="868680" y="3767328"/>
-            <a:ext cx="201168" cy="201168"/>
-          </a:xfrm>
-          <a:prstGeom prst="rect">
-            <a:avLst/>
-          </a:prstGeom>
-        </p:spPr>
-      </p:pic>
-      <p:sp>
-        <p:nvSpPr>
-          <p:cNvPr id="13" name="Text 9"/>
-          <p:cNvSpPr/>
-          <p:nvPr/>
-        </p:nvSpPr>
-        <p:spPr>
-          <a:xfrm>
-            <a:off x="1143000" y="3703320"/>
-            <a:ext cx="1691640" cy="329184"/>
-          </a:xfrm>
-          <a:prstGeom prst="rect">
-            <a:avLst/>
-          </a:prstGeom>
-          <a:noFill/>
-          <a:ln/>
-        </p:spPr>
-        <p:txBody>
-          <a:bodyPr wrap="square" lIns="0" tIns="0" rIns="0" bIns="0" rtlCol="0" anchor="ctr"/>
-          <a:lstStyle/>
-          <a:p>
-            <a:pPr indent="0" marL="0">
-              <a:buNone/>
-            </a:pPr>
-            <a:r>
-              <a:rPr lang="en-US" sz="1200" dirty="0">
-                <a:solidFill>
-                  <a:srgbClr val="141413"/>
-                </a:solidFill>
-                <a:latin typeface="Inter" pitchFamily="34" charset="0"/>
-                <a:ea typeface="Inter" pitchFamily="34" charset="-122"/>
-                <a:cs typeface="Inter" pitchFamily="34" charset="-120"/>
-              </a:rPr>
-              <a:t>Keep under 200 lines</a:t>
-            </a:r>
-            <a:endParaRPr lang="en-US" sz="1200" dirty="0"/>
-          </a:p>
-        </p:txBody>
-      </p:sp>
-      <p:pic>
-        <p:nvPicPr>
-          <p:cNvPr id="14" name="Image 2" descr="preencoded.png">    </p:cNvPr>
+          <p:cNvPr id="12" name="Image 1" descr="preencoded.png"/>
           <p:cNvPicPr>
             <a:picLocks noChangeAspect="1"/>
           </p:cNvPicPr>
@@ -11029,7 +10740,7 @@
         </p:blipFill>
         <p:spPr>
           <a:xfrm>
-            <a:off x="2834640" y="3767328"/>
+            <a:off x="868680" y="3767328"/>
             <a:ext cx="201168" cy="201168"/>
           </a:xfrm>
           <a:prstGeom prst="rect">
@@ -11039,13 +10750,13 @@
       </p:pic>
       <p:sp>
         <p:nvSpPr>
-          <p:cNvPr id="15" name="Text 10"/>
-          <p:cNvSpPr/>
-          <p:nvPr/>
-        </p:nvSpPr>
-        <p:spPr>
-          <a:xfrm>
-            <a:off x="3108960" y="3703320"/>
+          <p:cNvPr id="13" name="Text 9"/>
+          <p:cNvSpPr/>
+          <p:nvPr/>
+        </p:nvSpPr>
+        <p:spPr>
+          <a:xfrm>
+            <a:off x="1143000" y="3703320"/>
             <a:ext cx="1691640" cy="329184"/>
           </a:xfrm>
           <a:prstGeom prst="rect">
@@ -11058,7 +10769,7 @@
           <a:bodyPr wrap="square" lIns="0" tIns="0" rIns="0" bIns="0" rtlCol="0" anchor="ctr"/>
           <a:lstStyle/>
           <a:p>
-            <a:pPr indent="0" marL="0">
+            <a:pPr marL="0" indent="0">
               <a:buNone/>
             </a:pPr>
             <a:r>
@@ -11070,7 +10781,7 @@
                 <a:ea typeface="Inter" pitchFamily="34" charset="-122"/>
                 <a:cs typeface="Inter" pitchFamily="34" charset="-120"/>
               </a:rPr>
-              <a:t>Bootstrap with /init</a:t>
+              <a:t>Keep under 200 lines</a:t>
             </a:r>
             <a:endParaRPr lang="en-US" sz="1200" dirty="0"/>
           </a:p>
@@ -11078,21 +10789,21 @@
       </p:sp>
       <p:pic>
         <p:nvPicPr>
-          <p:cNvPr id="16" name="Image 3" descr="preencoded.png">    </p:cNvPr>
+          <p:cNvPr id="14" name="Image 2" descr="preencoded.png"/>
           <p:cNvPicPr>
             <a:picLocks noChangeAspect="1"/>
           </p:cNvPicPr>
           <p:nvPr/>
         </p:nvPicPr>
         <p:blipFill>
-          <a:blip r:embed="rId4"/>
+          <a:blip r:embed="rId3"/>
           <a:stretch>
             <a:fillRect/>
           </a:stretch>
         </p:blipFill>
         <p:spPr>
           <a:xfrm>
-            <a:off x="4800600" y="3767328"/>
+            <a:off x="2834640" y="3767328"/>
             <a:ext cx="201168" cy="201168"/>
           </a:xfrm>
           <a:prstGeom prst="rect">
@@ -11102,13 +10813,13 @@
       </p:pic>
       <p:sp>
         <p:nvSpPr>
-          <p:cNvPr id="17" name="Text 11"/>
-          <p:cNvSpPr/>
-          <p:nvPr/>
-        </p:nvSpPr>
-        <p:spPr>
-          <a:xfrm>
-            <a:off x="5074920" y="3703320"/>
+          <p:cNvPr id="15" name="Text 10"/>
+          <p:cNvSpPr/>
+          <p:nvPr/>
+        </p:nvSpPr>
+        <p:spPr>
+          <a:xfrm>
+            <a:off x="3108960" y="3703320"/>
             <a:ext cx="1691640" cy="329184"/>
           </a:xfrm>
           <a:prstGeom prst="rect">
@@ -11121,7 +10832,7 @@
           <a:bodyPr wrap="square" lIns="0" tIns="0" rIns="0" bIns="0" rtlCol="0" anchor="ctr"/>
           <a:lstStyle/>
           <a:p>
-            <a:pPr indent="0" marL="0">
+            <a:pPr marL="0" indent="0">
               <a:buNone/>
             </a:pPr>
             <a:r>
@@ -11133,7 +10844,7 @@
                 <a:ea typeface="Inter" pitchFamily="34" charset="-122"/>
                 <a:cs typeface="Inter" pitchFamily="34" charset="-120"/>
               </a:rPr>
-              <a:t>Append with #</a:t>
+              <a:t>Bootstrap with /init</a:t>
             </a:r>
             <a:endParaRPr lang="en-US" sz="1200" dirty="0"/>
           </a:p>
@@ -11141,20 +10852,83 @@
       </p:sp>
       <p:pic>
         <p:nvPicPr>
-          <p:cNvPr id="18" name="Image 4" descr="preencoded.png">    </p:cNvPr>
+          <p:cNvPr id="16" name="Image 3" descr="preencoded.png"/>
           <p:cNvPicPr>
             <a:picLocks noChangeAspect="1"/>
           </p:cNvPicPr>
           <p:nvPr/>
         </p:nvPicPr>
         <p:blipFill>
-          <a:blip r:embed="rId5"/>
+          <a:blip r:embed="rId3"/>
           <a:stretch>
             <a:fillRect/>
           </a:stretch>
         </p:blipFill>
         <p:spPr>
           <a:xfrm>
+            <a:off x="4800600" y="3767328"/>
+            <a:ext cx="201168" cy="201168"/>
+          </a:xfrm>
+          <a:prstGeom prst="rect">
+            <a:avLst/>
+          </a:prstGeom>
+        </p:spPr>
+      </p:pic>
+      <p:sp>
+        <p:nvSpPr>
+          <p:cNvPr id="17" name="Text 11"/>
+          <p:cNvSpPr/>
+          <p:nvPr/>
+        </p:nvSpPr>
+        <p:spPr>
+          <a:xfrm>
+            <a:off x="5074920" y="3703320"/>
+            <a:ext cx="1691640" cy="329184"/>
+          </a:xfrm>
+          <a:prstGeom prst="rect">
+            <a:avLst/>
+          </a:prstGeom>
+          <a:noFill/>
+          <a:ln/>
+        </p:spPr>
+        <p:txBody>
+          <a:bodyPr wrap="square" lIns="0" tIns="0" rIns="0" bIns="0" rtlCol="0" anchor="ctr"/>
+          <a:lstStyle/>
+          <a:p>
+            <a:pPr marL="0" indent="0">
+              <a:buNone/>
+            </a:pPr>
+            <a:r>
+              <a:rPr lang="en-US" sz="1200" dirty="0">
+                <a:solidFill>
+                  <a:srgbClr val="141413"/>
+                </a:solidFill>
+                <a:latin typeface="Inter" pitchFamily="34" charset="0"/>
+                <a:ea typeface="Inter" pitchFamily="34" charset="-122"/>
+                <a:cs typeface="Inter" pitchFamily="34" charset="-120"/>
+              </a:rPr>
+              <a:t>Append with #</a:t>
+            </a:r>
+            <a:endParaRPr lang="en-US" sz="1200" dirty="0"/>
+          </a:p>
+        </p:txBody>
+      </p:sp>
+      <p:pic>
+        <p:nvPicPr>
+          <p:cNvPr id="18" name="Image 4" descr="preencoded.png"/>
+          <p:cNvPicPr>
+            <a:picLocks noChangeAspect="1"/>
+          </p:cNvPicPr>
+          <p:nvPr/>
+        </p:nvPicPr>
+        <p:blipFill>
+          <a:blip r:embed="rId3"/>
+          <a:stretch>
+            <a:fillRect/>
+          </a:stretch>
+        </p:blipFill>
+        <p:spPr>
+          <a:xfrm>
             <a:off x="6766560" y="3767328"/>
             <a:ext cx="201168" cy="201168"/>
           </a:xfrm>
@@ -11184,7 +10958,7 @@
           <a:bodyPr wrap="square" lIns="0" tIns="0" rIns="0" bIns="0" rtlCol="0" anchor="ctr"/>
           <a:lstStyle/>
           <a:p>
-            <a:pPr indent="0" marL="0">
+            <a:pPr marL="0" indent="0">
               <a:buNone/>
             </a:pPr>
             <a:r>
@@ -11223,7 +10997,7 @@
           <a:bodyPr wrap="square" rtlCol="0" anchor="ctr"/>
           <a:lstStyle/>
           <a:p>
-            <a:pPr indent="0" marL="0">
+            <a:pPr marL="0" indent="0">
               <a:buNone/>
             </a:pPr>
             <a:r>
@@ -11262,7 +11036,7 @@
           <a:bodyPr wrap="square" rtlCol="0" anchor="ctr"/>
           <a:lstStyle/>
           <a:p>
-            <a:pPr algn="r" indent="0" marL="0">
+            <a:pPr marL="0" indent="0" algn="r">
               <a:buNone/>
             </a:pPr>
             <a:r>
@@ -11277,45 +11051,6 @@
               <a:t>Section 2  ·  5/14</a:t>
             </a:r>
             <a:endParaRPr lang="en-US" sz="900" dirty="0"/>
-          </a:p>
-        </p:txBody>
-      </p:sp>
-      <p:sp>
-        <p:nvSpPr>
-          <p:cNvPr id="22" name="Text 15"/>
-          <p:cNvSpPr/>
-          <p:nvPr/>
-        </p:nvSpPr>
-        <p:spPr>
-          <a:xfrm>
-            <a:off x="548640" y="4462272"/>
-            <a:ext cx="8046720" cy="274320"/>
-          </a:xfrm>
-          <a:prstGeom prst="rect">
-            <a:avLst/>
-          </a:prstGeom>
-          <a:noFill/>
-          <a:ln/>
-        </p:spPr>
-        <p:txBody>
-          <a:bodyPr wrap="square" lIns="0" tIns="0" rIns="0" bIns="0" rtlCol="0" anchor="ctr"/>
-          <a:lstStyle/>
-          <a:p>
-            <a:pPr indent="0" marL="0">
-              <a:buNone/>
-            </a:pPr>
-            <a:r>
-              <a:rPr lang="en-US" sz="1000" i="1" dirty="0">
-                <a:solidFill>
-                  <a:srgbClr val="615C52"/>
-                </a:solidFill>
-                <a:latin typeface="Inter" pitchFamily="34" charset="0"/>
-                <a:ea typeface="Inter" pitchFamily="34" charset="-122"/>
-                <a:cs typeface="Inter" pitchFamily="34" charset="-120"/>
-              </a:rPr>
-              <a:t>▸ Root is the map; subdir files are the side notes. Hard rules live elsewhere.</a:t>
-            </a:r>
-            <a:endParaRPr lang="en-US" sz="1000" dirty="0"/>
           </a:p>
         </p:txBody>
       </p:sp>
@@ -11335,6 +11070,7 @@
         <a:solidFill>
           <a:srgbClr val="F0EEE6"/>
         </a:solidFill>
+        <a:effectLst/>
       </p:bgPr>
     </p:bg>
     <p:spTree>
@@ -11372,11 +11108,11 @@
           <a:bodyPr wrap="square" lIns="0" tIns="0" rIns="0" bIns="0" rtlCol="0" anchor="ctr"/>
           <a:lstStyle/>
           <a:p>
-            <a:pPr indent="0" marL="0">
-              <a:buNone/>
-            </a:pPr>
-            <a:r>
-              <a:rPr lang="en-US" sz="1100" b="1" spc="200" kern="0" dirty="0">
+            <a:pPr marL="0" indent="0">
+              <a:buNone/>
+            </a:pPr>
+            <a:r>
+              <a:rPr lang="en-US" sz="1100" b="1" kern="0" spc="200" dirty="0">
                 <a:solidFill>
                   <a:srgbClr val="D97757"/>
                 </a:solidFill>
@@ -11411,7 +11147,7 @@
           <a:bodyPr wrap="square" lIns="0" tIns="0" rIns="0" bIns="0" rtlCol="0" anchor="ctr"/>
           <a:lstStyle/>
           <a:p>
-            <a:pPr indent="0" marL="0">
+            <a:pPr marL="0" indent="0">
               <a:buNone/>
             </a:pPr>
             <a:r>
@@ -11431,14 +11167,14 @@
       </p:sp>
       <p:pic>
         <p:nvPicPr>
-          <p:cNvPr id="4" name="Image 0" descr="preencoded.png">    </p:cNvPr>
+          <p:cNvPr id="4" name="Image 0" descr="preencoded.png"/>
           <p:cNvPicPr>
             <a:picLocks noChangeAspect="1"/>
           </p:cNvPicPr>
           <p:nvPr/>
         </p:nvPicPr>
         <p:blipFill>
-          <a:blip r:embed="rId1"/>
+          <a:blip r:embed="rId2"/>
           <a:stretch>
             <a:fillRect/>
           </a:stretch>
@@ -11474,13 +11210,20 @@
           </a:solidFill>
           <a:ln/>
           <a:effectLst>
-            <a:outerShdw sx="100000" sy="100000" kx="0" ky="0" algn="bl" rotWithShape="0" blurRad="88900" dist="38100" dir="5400000">
+            <a:outerShdw blurRad="88900" dist="38100" dir="5400000" algn="bl" rotWithShape="0">
               <a:srgbClr val="000000">
                 <a:alpha val="10000"/>
               </a:srgbClr>
             </a:outerShdw>
           </a:effectLst>
         </p:spPr>
+        <p:txBody>
+          <a:bodyPr/>
+          <a:lstStyle/>
+          <a:p>
+            <a:endParaRPr lang="en-US"/>
+          </a:p>
+        </p:txBody>
       </p:sp>
       <p:sp>
         <p:nvSpPr>
@@ -11503,7 +11246,7 @@
           <a:bodyPr wrap="square" lIns="0" tIns="0" rIns="0" bIns="0" rtlCol="0" anchor="t"/>
           <a:lstStyle/>
           <a:p>
-            <a:pPr indent="0" marL="0">
+            <a:pPr marL="0" indent="0">
               <a:lnSpc>
                 <a:spcPct val="130000"/>
               </a:lnSpc>
@@ -11520,12 +11263,35 @@
               </a:rPr>
               <a:t>.claude/commands/</a:t>
             </a:r>
-            <a:pPr indent="0" marL="0">
+            <a:r>
+              <a:rPr lang="en-US" sz="1350" dirty="0">
+                <a:solidFill>
+                  <a:srgbClr val="E9E5DD"/>
+                </a:solidFill>
+                <a:latin typeface="Courier New" pitchFamily="34" charset="0"/>
+                <a:ea typeface="Courier New" pitchFamily="34" charset="-122"/>
+                <a:cs typeface="Courier New" pitchFamily="34" charset="-120"/>
+              </a:rPr>
+              <a:t>review.md</a:t>
+            </a:r>
+            <a:endParaRPr lang="en-US" sz="1350" dirty="0"/>
+          </a:p>
+          <a:p>
+            <a:pPr marL="0" indent="0">
               <a:lnSpc>
                 <a:spcPct val="130000"/>
               </a:lnSpc>
               <a:buNone/>
             </a:pPr>
+            <a:endParaRPr lang="en-US" sz="1350" dirty="0"/>
+          </a:p>
+          <a:p>
+            <a:pPr marL="0" indent="0">
+              <a:lnSpc>
+                <a:spcPct val="130000"/>
+              </a:lnSpc>
+              <a:buNone/>
+            </a:pPr>
             <a:r>
               <a:rPr lang="en-US" sz="1350" dirty="0">
                 <a:solidFill>
@@ -11535,124 +11301,77 @@
                 <a:ea typeface="Courier New" pitchFamily="34" charset="-122"/>
                 <a:cs typeface="Courier New" pitchFamily="34" charset="-120"/>
               </a:rPr>
-              <a:t>review.md</a:t>
+              <a:t>Review the diff for </a:t>
+            </a:r>
+            <a:r>
+              <a:rPr lang="en-US" sz="1350" dirty="0">
+                <a:solidFill>
+                  <a:srgbClr val="E0A04A"/>
+                </a:solidFill>
+                <a:latin typeface="Courier New" pitchFamily="34" charset="0"/>
+                <a:ea typeface="Courier New" pitchFamily="34" charset="-122"/>
+                <a:cs typeface="Courier New" pitchFamily="34" charset="-120"/>
+              </a:rPr>
+              <a:t>$ARGUMENTS</a:t>
             </a:r>
             <a:endParaRPr lang="en-US" sz="1350" dirty="0"/>
           </a:p>
           <a:p>
-            <a:pPr indent="0" marL="0">
+            <a:pPr marL="0" indent="0">
               <a:lnSpc>
                 <a:spcPct val="130000"/>
               </a:lnSpc>
               <a:buNone/>
             </a:pPr>
+            <a:r>
+              <a:rPr lang="en-US" sz="1350" dirty="0">
+                <a:solidFill>
+                  <a:srgbClr val="E9E5DD"/>
+                </a:solidFill>
+                <a:latin typeface="Courier New" pitchFamily="34" charset="0"/>
+                <a:ea typeface="Courier New" pitchFamily="34" charset="-122"/>
+                <a:cs typeface="Courier New" pitchFamily="34" charset="-120"/>
+              </a:rPr>
+              <a:t>and flag risky changes.</a:t>
+            </a:r>
             <a:endParaRPr lang="en-US" sz="1350" dirty="0"/>
           </a:p>
           <a:p>
-            <a:pPr indent="0" marL="0">
+            <a:pPr marL="0" indent="0">
               <a:lnSpc>
                 <a:spcPct val="130000"/>
               </a:lnSpc>
               <a:buNone/>
             </a:pPr>
-            <a:r>
-              <a:rPr lang="en-US" sz="1350" dirty="0">
-                <a:solidFill>
-                  <a:srgbClr val="E9E5DD"/>
+            <a:endParaRPr lang="en-US" sz="1350" dirty="0"/>
+          </a:p>
+          <a:p>
+            <a:pPr marL="0" indent="0">
+              <a:lnSpc>
+                <a:spcPct val="130000"/>
+              </a:lnSpc>
+              <a:buNone/>
+            </a:pPr>
+            <a:r>
+              <a:rPr lang="en-US" sz="1350" b="1" dirty="0">
+                <a:solidFill>
+                  <a:srgbClr val="D97757"/>
                 </a:solidFill>
                 <a:latin typeface="Courier New" pitchFamily="34" charset="0"/>
                 <a:ea typeface="Courier New" pitchFamily="34" charset="-122"/>
                 <a:cs typeface="Courier New" pitchFamily="34" charset="-120"/>
               </a:rPr>
-              <a:t>Review the diff for </a:t>
-            </a:r>
-            <a:pPr indent="0" marL="0">
-              <a:lnSpc>
-                <a:spcPct val="130000"/>
-              </a:lnSpc>
-              <a:buNone/>
-            </a:pPr>
+              <a:t>&gt; </a:t>
+            </a:r>
             <a:r>
               <a:rPr lang="en-US" sz="1350" dirty="0">
                 <a:solidFill>
-                  <a:srgbClr val="E0A04A"/>
+                  <a:srgbClr val="E9E5DD"/>
                 </a:solidFill>
                 <a:latin typeface="Courier New" pitchFamily="34" charset="0"/>
                 <a:ea typeface="Courier New" pitchFamily="34" charset="-122"/>
                 <a:cs typeface="Courier New" pitchFamily="34" charset="-120"/>
               </a:rPr>
-              <a:t>$ARGUMENTS</a:t>
-            </a:r>
-            <a:pPr indent="0" marL="0">
-              <a:lnSpc>
-                <a:spcPct val="130000"/>
-              </a:lnSpc>
-              <a:buNone/>
-            </a:pPr>
-            <a:endParaRPr lang="en-US" sz="1350" dirty="0"/>
-          </a:p>
-          <a:p>
-            <a:pPr indent="0" marL="0">
-              <a:lnSpc>
-                <a:spcPct val="130000"/>
-              </a:lnSpc>
-              <a:buNone/>
-            </a:pPr>
-            <a:r>
-              <a:rPr lang="en-US" sz="1350" dirty="0">
-                <a:solidFill>
-                  <a:srgbClr val="E9E5DD"/>
-                </a:solidFill>
-                <a:latin typeface="Courier New" pitchFamily="34" charset="0"/>
-                <a:ea typeface="Courier New" pitchFamily="34" charset="-122"/>
-                <a:cs typeface="Courier New" pitchFamily="34" charset="-120"/>
-              </a:rPr>
-              <a:t>and flag risky changes.</a:t>
-            </a:r>
-            <a:endParaRPr lang="en-US" sz="1350" dirty="0"/>
-          </a:p>
-          <a:p>
-            <a:pPr indent="0" marL="0">
-              <a:lnSpc>
-                <a:spcPct val="130000"/>
-              </a:lnSpc>
-              <a:buNone/>
-            </a:pPr>
-            <a:endParaRPr lang="en-US" sz="1350" dirty="0"/>
-          </a:p>
-          <a:p>
-            <a:pPr indent="0" marL="0">
-              <a:lnSpc>
-                <a:spcPct val="130000"/>
-              </a:lnSpc>
-              <a:buNone/>
-            </a:pPr>
-            <a:r>
-              <a:rPr lang="en-US" sz="1350" b="1" dirty="0">
-                <a:solidFill>
-                  <a:srgbClr val="D97757"/>
-                </a:solidFill>
-                <a:latin typeface="Courier New" pitchFamily="34" charset="0"/>
-                <a:ea typeface="Courier New" pitchFamily="34" charset="-122"/>
-                <a:cs typeface="Courier New" pitchFamily="34" charset="-120"/>
-              </a:rPr>
-              <a:t>&gt; </a:t>
-            </a:r>
-            <a:pPr indent="0" marL="0">
-              <a:lnSpc>
-                <a:spcPct val="130000"/>
-              </a:lnSpc>
-              <a:buNone/>
-            </a:pPr>
-            <a:r>
-              <a:rPr lang="en-US" sz="1350" dirty="0">
-                <a:solidFill>
-                  <a:srgbClr val="E9E5DD"/>
-                </a:solidFill>
-                <a:latin typeface="Courier New" pitchFamily="34" charset="0"/>
-                <a:ea typeface="Courier New" pitchFamily="34" charset="-122"/>
-                <a:cs typeface="Courier New" pitchFamily="34" charset="-120"/>
-              </a:rPr>
               <a:t>/review auth.cs</a:t>
             </a:r>
             <a:endParaRPr lang="en-US" sz="1350" dirty="0"/>
@@ -11680,7 +11399,7 @@
           <a:bodyPr wrap="square" lIns="0" tIns="0" rIns="0" bIns="0" rtlCol="0" anchor="t"/>
           <a:lstStyle/>
           <a:p>
-            <a:pPr indent="0" marL="0">
+            <a:pPr marL="0" indent="0">
               <a:buNone/>
             </a:pPr>
             <a:r>
@@ -11694,9 +11413,6 @@
               </a:rPr>
               <a:t>Markdown files in </a:t>
             </a:r>
-            <a:pPr indent="0" marL="0">
-              <a:buNone/>
-            </a:pPr>
             <a:r>
               <a:rPr lang="en-US" sz="1400" b="1" dirty="0">
                 <a:solidFill>
@@ -11733,7 +11449,7 @@
           <a:bodyPr wrap="square" lIns="0" tIns="0" rIns="0" bIns="0" rtlCol="0" anchor="t"/>
           <a:lstStyle/>
           <a:p>
-            <a:pPr indent="0" marL="0">
+            <a:pPr marL="0" indent="0">
               <a:buNone/>
             </a:pPr>
             <a:r>
@@ -11747,9 +11463,6 @@
               </a:rPr>
               <a:t>$ARGUMENTS</a:t>
             </a:r>
-            <a:pPr indent="0" marL="0">
-              <a:buNone/>
-            </a:pPr>
             <a:r>
               <a:rPr lang="en-US" sz="1400" dirty="0">
                 <a:solidFill>
@@ -11786,6 +11499,13 @@
           </a:solidFill>
           <a:ln/>
         </p:spPr>
+        <p:txBody>
+          <a:bodyPr/>
+          <a:lstStyle/>
+          <a:p>
+            <a:endParaRPr lang="en-US"/>
+          </a:p>
+        </p:txBody>
       </p:sp>
       <p:sp>
         <p:nvSpPr>
@@ -11808,7 +11528,7 @@
           <a:bodyPr wrap="square" lIns="0" tIns="0" rIns="0" bIns="0" rtlCol="0" anchor="ctr"/>
           <a:lstStyle/>
           <a:p>
-            <a:pPr indent="0" marL="0">
+            <a:pPr marL="0" indent="0">
               <a:buNone/>
             </a:pPr>
             <a:r>
@@ -11847,7 +11567,7 @@
           <a:bodyPr wrap="square" rtlCol="0" anchor="ctr"/>
           <a:lstStyle/>
           <a:p>
-            <a:pPr indent="0" marL="0">
+            <a:pPr marL="0" indent="0">
               <a:buNone/>
             </a:pPr>
             <a:r>
@@ -11886,7 +11606,7 @@
           <a:bodyPr wrap="square" rtlCol="0" anchor="ctr"/>
           <a:lstStyle/>
           <a:p>
-            <a:pPr algn="r" indent="0" marL="0">
+            <a:pPr marL="0" indent="0" algn="r">
               <a:buNone/>
             </a:pPr>
             <a:r>
@@ -11901,45 +11621,6 @@
               <a:t>Section 2  ·  6/14</a:t>
             </a:r>
             <a:endParaRPr lang="en-US" sz="900" dirty="0"/>
-          </a:p>
-        </p:txBody>
-      </p:sp>
-      <p:sp>
-        <p:nvSpPr>
-          <p:cNvPr id="13" name="Text 10"/>
-          <p:cNvSpPr/>
-          <p:nvPr/>
-        </p:nvSpPr>
-        <p:spPr>
-          <a:xfrm>
-            <a:off x="548640" y="4462272"/>
-            <a:ext cx="8046720" cy="274320"/>
-          </a:xfrm>
-          <a:prstGeom prst="rect">
-            <a:avLst/>
-          </a:prstGeom>
-          <a:noFill/>
-          <a:ln/>
-        </p:spPr>
-        <p:txBody>
-          <a:bodyPr wrap="square" lIns="0" tIns="0" rIns="0" bIns="0" rtlCol="0" anchor="ctr"/>
-          <a:lstStyle/>
-          <a:p>
-            <a:pPr indent="0" marL="0">
-              <a:buNone/>
-            </a:pPr>
-            <a:r>
-              <a:rPr lang="en-US" sz="1000" i="1" dirty="0">
-                <a:solidFill>
-                  <a:srgbClr val="615C52"/>
-                </a:solidFill>
-                <a:latin typeface="Inter" pitchFamily="34" charset="0"/>
-                <a:ea typeface="Inter" pitchFamily="34" charset="-122"/>
-                <a:cs typeface="Inter" pitchFamily="34" charset="-120"/>
-              </a:rPr>
-              <a:t>▸ Commands are one-shot prompts; the moment they branch, reach for a skill.</a:t>
-            </a:r>
-            <a:endParaRPr lang="en-US" sz="1000" dirty="0"/>
           </a:p>
         </p:txBody>
       </p:sp>
@@ -11959,6 +11640,7 @@
         <a:solidFill>
           <a:srgbClr val="F0EEE6"/>
         </a:solidFill>
+        <a:effectLst/>
       </p:bgPr>
     </p:bg>
     <p:spTree>
@@ -11996,11 +11678,11 @@
           <a:bodyPr wrap="square" lIns="0" tIns="0" rIns="0" bIns="0" rtlCol="0" anchor="ctr"/>
           <a:lstStyle/>
           <a:p>
-            <a:pPr indent="0" marL="0">
-              <a:buNone/>
-            </a:pPr>
-            <a:r>
-              <a:rPr lang="en-US" sz="1100" b="1" spc="200" kern="0" dirty="0">
+            <a:pPr marL="0" indent="0">
+              <a:buNone/>
+            </a:pPr>
+            <a:r>
+              <a:rPr lang="en-US" sz="1100" b="1" kern="0" spc="200" dirty="0">
                 <a:solidFill>
                   <a:srgbClr val="D97757"/>
                 </a:solidFill>
@@ -12035,7 +11717,7 @@
           <a:bodyPr wrap="square" lIns="0" tIns="0" rIns="0" bIns="0" rtlCol="0" anchor="ctr"/>
           <a:lstStyle/>
           <a:p>
-            <a:pPr indent="0" marL="0">
+            <a:pPr marL="0" indent="0">
               <a:buNone/>
             </a:pPr>
             <a:r>
@@ -12055,263 +11737,7 @@
       </p:sp>
       <p:pic>
         <p:nvPicPr>
-          <p:cNvPr id="4" name="Image 0" descr="preencoded.png">    </p:cNvPr>
-          <p:cNvPicPr>
-            <a:picLocks noChangeAspect="1"/>
-          </p:cNvPicPr>
-          <p:nvPr/>
-        </p:nvPicPr>
-        <p:blipFill>
-          <a:blip r:embed="rId1"/>
-          <a:stretch>
-            <a:fillRect/>
-          </a:stretch>
-        </p:blipFill>
-        <p:spPr>
-          <a:xfrm>
-            <a:off x="8339328" y="402336"/>
-            <a:ext cx="310896" cy="310896"/>
-          </a:xfrm>
-          <a:prstGeom prst="rect">
-            <a:avLst/>
-          </a:prstGeom>
-        </p:spPr>
-      </p:pic>
-      <p:sp>
-        <p:nvSpPr>
-          <p:cNvPr id="5" name="Shape 2"/>
-          <p:cNvSpPr/>
-          <p:nvPr/>
-        </p:nvSpPr>
-        <p:spPr>
-          <a:xfrm>
-            <a:off x="566928" y="1207008"/>
-            <a:ext cx="1417320" cy="329184"/>
-          </a:xfrm>
-          <a:prstGeom prst="roundRect">
-            <a:avLst>
-              <a:gd name="adj" fmla="val 50000"/>
-            </a:avLst>
-          </a:prstGeom>
-          <a:solidFill>
-            <a:srgbClr val="C0392B"/>
-          </a:solidFill>
-          <a:ln/>
-        </p:spPr>
-      </p:sp>
-      <p:sp>
-        <p:nvSpPr>
-          <p:cNvPr id="6" name="Text 3"/>
-          <p:cNvSpPr/>
-          <p:nvPr/>
-        </p:nvSpPr>
-        <p:spPr>
-          <a:xfrm>
-            <a:off x="566928" y="1207008"/>
-            <a:ext cx="1417320" cy="329184"/>
-          </a:xfrm>
-          <a:prstGeom prst="rect">
-            <a:avLst/>
-          </a:prstGeom>
-          <a:noFill/>
-          <a:ln/>
-        </p:spPr>
-        <p:txBody>
-          <a:bodyPr wrap="none" lIns="0" tIns="0" rIns="0" bIns="0" rtlCol="0" anchor="ctr"/>
-          <a:lstStyle/>
-          <a:p>
-            <a:pPr algn="ctr" indent="0" marL="0">
-              <a:buNone/>
-            </a:pPr>
-            <a:r>
-              <a:rPr lang="en-US" sz="1100" b="1" spc="100" kern="0" dirty="0">
-                <a:solidFill>
-                  <a:srgbClr val="FFFFFF"/>
-                </a:solidFill>
-                <a:latin typeface="Inter" pitchFamily="34" charset="0"/>
-                <a:ea typeface="Inter" pitchFamily="34" charset="-122"/>
-                <a:cs typeface="Inter" pitchFamily="34" charset="-120"/>
-              </a:rPr>
-              <a:t>CORRECTION</a:t>
-            </a:r>
-            <a:endParaRPr lang="en-US" sz="1100" dirty="0"/>
-          </a:p>
-        </p:txBody>
-      </p:sp>
-      <p:sp>
-        <p:nvSpPr>
-          <p:cNvPr id="7" name="Shape 4"/>
-          <p:cNvSpPr/>
-          <p:nvPr/>
-        </p:nvSpPr>
-        <p:spPr>
-          <a:xfrm>
-            <a:off x="548640" y="1691640"/>
-            <a:ext cx="4206240" cy="2240280"/>
-          </a:xfrm>
-          <a:prstGeom prst="roundRect">
-            <a:avLst>
-              <a:gd name="adj" fmla="val 3265"/>
-            </a:avLst>
-          </a:prstGeom>
-          <a:solidFill>
-            <a:srgbClr val="1F1E1D"/>
-          </a:solidFill>
-          <a:ln/>
-          <a:effectLst>
-            <a:outerShdw sx="100000" sy="100000" kx="0" ky="0" algn="bl" rotWithShape="0" blurRad="88900" dist="38100" dir="5400000">
-              <a:srgbClr val="000000">
-                <a:alpha val="10000"/>
-              </a:srgbClr>
-            </a:outerShdw>
-          </a:effectLst>
-        </p:spPr>
-      </p:sp>
-      <p:sp>
-        <p:nvSpPr>
-          <p:cNvPr id="8" name="Text 5"/>
-          <p:cNvSpPr/>
-          <p:nvPr/>
-        </p:nvSpPr>
-        <p:spPr>
-          <a:xfrm>
-            <a:off x="841248" y="1984248"/>
-            <a:ext cx="3657600" cy="1691640"/>
-          </a:xfrm>
-          <a:prstGeom prst="rect">
-            <a:avLst/>
-          </a:prstGeom>
-          <a:noFill/>
-          <a:ln/>
-        </p:spPr>
-        <p:txBody>
-          <a:bodyPr wrap="square" lIns="0" tIns="0" rIns="0" bIns="0" rtlCol="0" anchor="t"/>
-          <a:lstStyle/>
-          <a:p>
-            <a:pPr indent="0" marL="0">
-              <a:lnSpc>
-                <a:spcPct val="135000"/>
-              </a:lnSpc>
-              <a:buNone/>
-            </a:pPr>
-            <a:r>
-              <a:rPr lang="en-US" sz="1400" b="1" dirty="0">
-                <a:solidFill>
-                  <a:srgbClr val="D97757"/>
-                </a:solidFill>
-                <a:latin typeface="Courier New" pitchFamily="34" charset="0"/>
-                <a:ea typeface="Courier New" pitchFamily="34" charset="-122"/>
-                <a:cs typeface="Courier New" pitchFamily="34" charset="-120"/>
-              </a:rPr>
-              <a:t>.claude/skills/&lt;name&gt;/</a:t>
-            </a:r>
-            <a:endParaRPr lang="en-US" sz="1400" dirty="0"/>
-          </a:p>
-          <a:p>
-            <a:pPr indent="0" marL="0">
-              <a:lnSpc>
-                <a:spcPct val="135000"/>
-              </a:lnSpc>
-              <a:buNone/>
-            </a:pPr>
-            <a:r>
-              <a:rPr lang="en-US" sz="1400" dirty="0">
-                <a:solidFill>
-                  <a:srgbClr val="E9E5DD"/>
-                </a:solidFill>
-                <a:latin typeface="Courier New" pitchFamily="34" charset="0"/>
-                <a:ea typeface="Courier New" pitchFamily="34" charset="-122"/>
-                <a:cs typeface="Courier New" pitchFamily="34" charset="-120"/>
-              </a:rPr>
-              <a:t>├─ SKILL.md</a:t>
-            </a:r>
-            <a:endParaRPr lang="en-US" sz="1400" dirty="0"/>
-          </a:p>
-          <a:p>
-            <a:pPr indent="0" marL="0">
-              <a:lnSpc>
-                <a:spcPct val="135000"/>
-              </a:lnSpc>
-              <a:buNone/>
-            </a:pPr>
-            <a:r>
-              <a:rPr lang="en-US" sz="1400" dirty="0">
-                <a:solidFill>
-                  <a:srgbClr val="9A958B"/>
-                </a:solidFill>
-                <a:latin typeface="Courier New" pitchFamily="34" charset="0"/>
-                <a:ea typeface="Courier New" pitchFamily="34" charset="-122"/>
-                <a:cs typeface="Courier New" pitchFamily="34" charset="-120"/>
-              </a:rPr>
-              <a:t>│    description: trigger</a:t>
-            </a:r>
-            <a:endParaRPr lang="en-US" sz="1400" dirty="0"/>
-          </a:p>
-          <a:p>
-            <a:pPr indent="0" marL="0">
-              <a:lnSpc>
-                <a:spcPct val="135000"/>
-              </a:lnSpc>
-              <a:buNone/>
-            </a:pPr>
-            <a:r>
-              <a:rPr lang="en-US" sz="1400" dirty="0">
-                <a:solidFill>
-                  <a:srgbClr val="E9E5DD"/>
-                </a:solidFill>
-                <a:latin typeface="Courier New" pitchFamily="34" charset="0"/>
-                <a:ea typeface="Courier New" pitchFamily="34" charset="-122"/>
-                <a:cs typeface="Courier New" pitchFamily="34" charset="-120"/>
-              </a:rPr>
-              <a:t>├─ references/</a:t>
-            </a:r>
-            <a:endParaRPr lang="en-US" sz="1400" dirty="0"/>
-          </a:p>
-          <a:p>
-            <a:pPr indent="0" marL="0">
-              <a:lnSpc>
-                <a:spcPct val="135000"/>
-              </a:lnSpc>
-              <a:buNone/>
-            </a:pPr>
-            <a:r>
-              <a:rPr lang="en-US" sz="1400" dirty="0">
-                <a:solidFill>
-                  <a:srgbClr val="E9E5DD"/>
-                </a:solidFill>
-                <a:latin typeface="Courier New" pitchFamily="34" charset="0"/>
-                <a:ea typeface="Courier New" pitchFamily="34" charset="-122"/>
-                <a:cs typeface="Courier New" pitchFamily="34" charset="-120"/>
-              </a:rPr>
-              <a:t>└─ scripts/</a:t>
-            </a:r>
-            <a:endParaRPr lang="en-US" sz="1400" dirty="0"/>
-          </a:p>
-        </p:txBody>
-      </p:sp>
-      <p:sp>
-        <p:nvSpPr>
-          <p:cNvPr id="9" name="Shape 6"/>
-          <p:cNvSpPr/>
-          <p:nvPr/>
-        </p:nvSpPr>
-        <p:spPr>
-          <a:xfrm>
-            <a:off x="5029200" y="1737360"/>
-            <a:ext cx="420624" cy="420624"/>
-          </a:xfrm>
-          <a:prstGeom prst="ellipse">
-            <a:avLst/>
-          </a:prstGeom>
-          <a:solidFill>
-            <a:srgbClr val="D97757"/>
-          </a:solidFill>
-          <a:ln/>
-        </p:spPr>
-      </p:sp>
-      <p:pic>
-        <p:nvPicPr>
-          <p:cNvPr id="10" name="Image 1" descr="preencoded.png">    </p:cNvPr>
+          <p:cNvPr id="4" name="Image 0" descr="preencoded.png"/>
           <p:cNvPicPr>
             <a:picLocks noChangeAspect="1"/>
           </p:cNvPicPr>
@@ -12325,8 +11751,8 @@
         </p:blipFill>
         <p:spPr>
           <a:xfrm>
-            <a:off x="5138562" y="1846722"/>
-            <a:ext cx="201900" cy="201900"/>
+            <a:off x="8339328" y="402336"/>
+            <a:ext cx="310896" cy="310896"/>
           </a:xfrm>
           <a:prstGeom prst="rect">
             <a:avLst/>
@@ -12335,91 +11761,239 @@
       </p:pic>
       <p:sp>
         <p:nvSpPr>
-          <p:cNvPr id="11" name="Text 7"/>
-          <p:cNvSpPr/>
-          <p:nvPr/>
-        </p:nvSpPr>
-        <p:spPr>
-          <a:xfrm>
-            <a:off x="5596128" y="1700784"/>
-            <a:ext cx="3200400" cy="292608"/>
-          </a:xfrm>
-          <a:prstGeom prst="rect">
-            <a:avLst/>
-          </a:prstGeom>
-          <a:noFill/>
-          <a:ln/>
-        </p:spPr>
-        <p:txBody>
-          <a:bodyPr wrap="square" lIns="0" tIns="0" rIns="0" bIns="0" rtlCol="0" anchor="ctr"/>
-          <a:lstStyle/>
-          <a:p>
-            <a:pPr indent="0" marL="0">
-              <a:buNone/>
-            </a:pPr>
-            <a:r>
-              <a:rPr lang="en-US" sz="1450" b="1" dirty="0">
-                <a:solidFill>
-                  <a:srgbClr val="141413"/>
-                </a:solidFill>
-                <a:latin typeface="Inter" pitchFamily="34" charset="0"/>
-                <a:ea typeface="Inter" pitchFamily="34" charset="-122"/>
-                <a:cs typeface="Inter" pitchFamily="34" charset="-120"/>
-              </a:rPr>
-              <a:t>A folder, not a file</a:t>
-            </a:r>
-            <a:endParaRPr lang="en-US" sz="1450" dirty="0"/>
-          </a:p>
-        </p:txBody>
-      </p:sp>
-      <p:sp>
-        <p:nvSpPr>
-          <p:cNvPr id="12" name="Text 8"/>
-          <p:cNvSpPr/>
-          <p:nvPr/>
-        </p:nvSpPr>
-        <p:spPr>
-          <a:xfrm>
-            <a:off x="5596128" y="1984248"/>
-            <a:ext cx="3246120" cy="310896"/>
-          </a:xfrm>
-          <a:prstGeom prst="rect">
-            <a:avLst/>
-          </a:prstGeom>
-          <a:noFill/>
-          <a:ln/>
-        </p:spPr>
-        <p:txBody>
-          <a:bodyPr wrap="square" lIns="0" tIns="0" rIns="0" bIns="0" rtlCol="0" anchor="ctr"/>
-          <a:lstStyle/>
-          <a:p>
-            <a:pPr indent="0" marL="0">
-              <a:buNone/>
-            </a:pPr>
-            <a:r>
-              <a:rPr lang="en-US" sz="1200" dirty="0">
-                <a:solidFill>
-                  <a:srgbClr val="615C52"/>
-                </a:solidFill>
-                <a:latin typeface="Inter" pitchFamily="34" charset="0"/>
-                <a:ea typeface="Inter" pitchFamily="34" charset="-122"/>
-                <a:cs typeface="Inter" pitchFamily="34" charset="-120"/>
-              </a:rPr>
-              <a:t>SKILL.md + references/ + scripts/</a:t>
-            </a:r>
-            <a:endParaRPr lang="en-US" sz="1200" dirty="0"/>
-          </a:p>
-        </p:txBody>
-      </p:sp>
-      <p:sp>
-        <p:nvSpPr>
-          <p:cNvPr id="13" name="Shape 9"/>
-          <p:cNvSpPr/>
-          <p:nvPr/>
-        </p:nvSpPr>
-        <p:spPr>
-          <a:xfrm>
-            <a:off x="5029200" y="2487168"/>
+          <p:cNvPr id="5" name="Shape 2"/>
+          <p:cNvSpPr/>
+          <p:nvPr/>
+        </p:nvSpPr>
+        <p:spPr>
+          <a:xfrm>
+            <a:off x="566928" y="1207008"/>
+            <a:ext cx="1417320" cy="329184"/>
+          </a:xfrm>
+          <a:prstGeom prst="roundRect">
+            <a:avLst>
+              <a:gd name="adj" fmla="val 50000"/>
+            </a:avLst>
+          </a:prstGeom>
+          <a:solidFill>
+            <a:srgbClr val="C0392B"/>
+          </a:solidFill>
+          <a:ln/>
+        </p:spPr>
+        <p:txBody>
+          <a:bodyPr/>
+          <a:lstStyle/>
+          <a:p>
+            <a:endParaRPr lang="en-US"/>
+          </a:p>
+        </p:txBody>
+      </p:sp>
+      <p:sp>
+        <p:nvSpPr>
+          <p:cNvPr id="6" name="Text 3"/>
+          <p:cNvSpPr/>
+          <p:nvPr/>
+        </p:nvSpPr>
+        <p:spPr>
+          <a:xfrm>
+            <a:off x="566928" y="1207008"/>
+            <a:ext cx="1417320" cy="329184"/>
+          </a:xfrm>
+          <a:prstGeom prst="rect">
+            <a:avLst/>
+          </a:prstGeom>
+          <a:noFill/>
+          <a:ln/>
+        </p:spPr>
+        <p:txBody>
+          <a:bodyPr wrap="none" lIns="0" tIns="0" rIns="0" bIns="0" rtlCol="0" anchor="ctr"/>
+          <a:lstStyle/>
+          <a:p>
+            <a:pPr marL="0" indent="0" algn="ctr">
+              <a:buNone/>
+            </a:pPr>
+            <a:r>
+              <a:rPr lang="en-US" sz="1100" b="1" kern="0" spc="100" dirty="0">
+                <a:solidFill>
+                  <a:srgbClr val="FFFFFF"/>
+                </a:solidFill>
+                <a:latin typeface="Inter" pitchFamily="34" charset="0"/>
+                <a:ea typeface="Inter" pitchFamily="34" charset="-122"/>
+                <a:cs typeface="Inter" pitchFamily="34" charset="-120"/>
+              </a:rPr>
+              <a:t>CORRECTION</a:t>
+            </a:r>
+            <a:endParaRPr lang="en-US" sz="1100" dirty="0"/>
+          </a:p>
+        </p:txBody>
+      </p:sp>
+      <p:sp>
+        <p:nvSpPr>
+          <p:cNvPr id="7" name="Shape 4"/>
+          <p:cNvSpPr/>
+          <p:nvPr/>
+        </p:nvSpPr>
+        <p:spPr>
+          <a:xfrm>
+            <a:off x="548640" y="1691640"/>
+            <a:ext cx="4206240" cy="2240280"/>
+          </a:xfrm>
+          <a:prstGeom prst="roundRect">
+            <a:avLst>
+              <a:gd name="adj" fmla="val 3265"/>
+            </a:avLst>
+          </a:prstGeom>
+          <a:solidFill>
+            <a:srgbClr val="1F1E1D"/>
+          </a:solidFill>
+          <a:ln/>
+          <a:effectLst>
+            <a:outerShdw blurRad="88900" dist="38100" dir="5400000" algn="bl" rotWithShape="0">
+              <a:srgbClr val="000000">
+                <a:alpha val="10000"/>
+              </a:srgbClr>
+            </a:outerShdw>
+          </a:effectLst>
+        </p:spPr>
+        <p:txBody>
+          <a:bodyPr/>
+          <a:lstStyle/>
+          <a:p>
+            <a:endParaRPr lang="en-US"/>
+          </a:p>
+        </p:txBody>
+      </p:sp>
+      <p:sp>
+        <p:nvSpPr>
+          <p:cNvPr id="8" name="Text 5"/>
+          <p:cNvSpPr/>
+          <p:nvPr/>
+        </p:nvSpPr>
+        <p:spPr>
+          <a:xfrm>
+            <a:off x="841248" y="1984248"/>
+            <a:ext cx="3657600" cy="1691640"/>
+          </a:xfrm>
+          <a:prstGeom prst="rect">
+            <a:avLst/>
+          </a:prstGeom>
+          <a:noFill/>
+          <a:ln/>
+        </p:spPr>
+        <p:txBody>
+          <a:bodyPr wrap="square" lIns="0" tIns="0" rIns="0" bIns="0" rtlCol="0" anchor="t"/>
+          <a:lstStyle/>
+          <a:p>
+            <a:pPr marL="0" indent="0">
+              <a:lnSpc>
+                <a:spcPct val="135000"/>
+              </a:lnSpc>
+              <a:buNone/>
+            </a:pPr>
+            <a:r>
+              <a:rPr lang="en-US" sz="1400" b="1" dirty="0">
+                <a:solidFill>
+                  <a:srgbClr val="D97757"/>
+                </a:solidFill>
+                <a:latin typeface="Courier New" pitchFamily="34" charset="0"/>
+                <a:ea typeface="Courier New" pitchFamily="34" charset="-122"/>
+                <a:cs typeface="Courier New" pitchFamily="34" charset="-120"/>
+              </a:rPr>
+              <a:t>.claude/skills/&lt;name&gt;/</a:t>
+            </a:r>
+            <a:endParaRPr lang="en-US" sz="1400" dirty="0"/>
+          </a:p>
+          <a:p>
+            <a:pPr marL="0" indent="0">
+              <a:lnSpc>
+                <a:spcPct val="135000"/>
+              </a:lnSpc>
+              <a:buNone/>
+            </a:pPr>
+            <a:r>
+              <a:rPr lang="en-US" sz="1400" dirty="0">
+                <a:solidFill>
+                  <a:srgbClr val="E9E5DD"/>
+                </a:solidFill>
+                <a:latin typeface="Courier New" pitchFamily="34" charset="0"/>
+                <a:ea typeface="Courier New" pitchFamily="34" charset="-122"/>
+                <a:cs typeface="Courier New" pitchFamily="34" charset="-120"/>
+              </a:rPr>
+              <a:t>├─ SKILL.md</a:t>
+            </a:r>
+            <a:endParaRPr lang="en-US" sz="1400" dirty="0"/>
+          </a:p>
+          <a:p>
+            <a:pPr marL="0" indent="0">
+              <a:lnSpc>
+                <a:spcPct val="135000"/>
+              </a:lnSpc>
+              <a:buNone/>
+            </a:pPr>
+            <a:r>
+              <a:rPr lang="en-US" sz="1400" dirty="0">
+                <a:solidFill>
+                  <a:srgbClr val="9A958B"/>
+                </a:solidFill>
+                <a:latin typeface="Courier New" pitchFamily="34" charset="0"/>
+                <a:ea typeface="Courier New" pitchFamily="34" charset="-122"/>
+                <a:cs typeface="Courier New" pitchFamily="34" charset="-120"/>
+              </a:rPr>
+              <a:t>│    description: trigger</a:t>
+            </a:r>
+            <a:endParaRPr lang="en-US" sz="1400" dirty="0"/>
+          </a:p>
+          <a:p>
+            <a:pPr marL="0" indent="0">
+              <a:lnSpc>
+                <a:spcPct val="135000"/>
+              </a:lnSpc>
+              <a:buNone/>
+            </a:pPr>
+            <a:r>
+              <a:rPr lang="en-US" sz="1400" dirty="0">
+                <a:solidFill>
+                  <a:srgbClr val="E9E5DD"/>
+                </a:solidFill>
+                <a:latin typeface="Courier New" pitchFamily="34" charset="0"/>
+                <a:ea typeface="Courier New" pitchFamily="34" charset="-122"/>
+                <a:cs typeface="Courier New" pitchFamily="34" charset="-120"/>
+              </a:rPr>
+              <a:t>├─ references/</a:t>
+            </a:r>
+            <a:endParaRPr lang="en-US" sz="1400" dirty="0"/>
+          </a:p>
+          <a:p>
+            <a:pPr marL="0" indent="0">
+              <a:lnSpc>
+                <a:spcPct val="135000"/>
+              </a:lnSpc>
+              <a:buNone/>
+            </a:pPr>
+            <a:r>
+              <a:rPr lang="en-US" sz="1400" dirty="0">
+                <a:solidFill>
+                  <a:srgbClr val="E9E5DD"/>
+                </a:solidFill>
+                <a:latin typeface="Courier New" pitchFamily="34" charset="0"/>
+                <a:ea typeface="Courier New" pitchFamily="34" charset="-122"/>
+                <a:cs typeface="Courier New" pitchFamily="34" charset="-120"/>
+              </a:rPr>
+              <a:t>└─ scripts/</a:t>
+            </a:r>
+            <a:endParaRPr lang="en-US" sz="1400" dirty="0"/>
+          </a:p>
+        </p:txBody>
+      </p:sp>
+      <p:sp>
+        <p:nvSpPr>
+          <p:cNvPr id="9" name="Shape 6"/>
+          <p:cNvSpPr/>
+          <p:nvPr/>
+        </p:nvSpPr>
+        <p:spPr>
+          <a:xfrm>
+            <a:off x="5029200" y="1737360"/>
             <a:ext cx="420624" cy="420624"/>
           </a:xfrm>
           <a:prstGeom prst="ellipse">
@@ -12430,10 +12004,17 @@
           </a:solidFill>
           <a:ln/>
         </p:spPr>
+        <p:txBody>
+          <a:bodyPr/>
+          <a:lstStyle/>
+          <a:p>
+            <a:endParaRPr lang="en-US"/>
+          </a:p>
+        </p:txBody>
       </p:sp>
       <p:pic>
         <p:nvPicPr>
-          <p:cNvPr id="14" name="Image 2" descr="preencoded.png">    </p:cNvPr>
+          <p:cNvPr id="10" name="Image 1" descr="preencoded.png"/>
           <p:cNvPicPr>
             <a:picLocks noChangeAspect="1"/>
           </p:cNvPicPr>
@@ -12447,7 +12028,7 @@
         </p:blipFill>
         <p:spPr>
           <a:xfrm>
-            <a:off x="5138562" y="2596530"/>
+            <a:off x="5138562" y="1846722"/>
             <a:ext cx="201900" cy="201900"/>
           </a:xfrm>
           <a:prstGeom prst="rect">
@@ -12457,13 +12038,13 @@
       </p:pic>
       <p:sp>
         <p:nvSpPr>
-          <p:cNvPr id="15" name="Text 10"/>
-          <p:cNvSpPr/>
-          <p:nvPr/>
-        </p:nvSpPr>
-        <p:spPr>
-          <a:xfrm>
-            <a:off x="5596128" y="2450592"/>
+          <p:cNvPr id="11" name="Text 7"/>
+          <p:cNvSpPr/>
+          <p:nvPr/>
+        </p:nvSpPr>
+        <p:spPr>
+          <a:xfrm>
+            <a:off x="5596128" y="1700784"/>
             <a:ext cx="3200400" cy="292608"/>
           </a:xfrm>
           <a:prstGeom prst="rect">
@@ -12476,7 +12057,7 @@
           <a:bodyPr wrap="square" lIns="0" tIns="0" rIns="0" bIns="0" rtlCol="0" anchor="ctr"/>
           <a:lstStyle/>
           <a:p>
-            <a:pPr indent="0" marL="0">
+            <a:pPr marL="0" indent="0">
               <a:buNone/>
             </a:pPr>
             <a:r>
@@ -12488,7 +12069,7 @@
                 <a:ea typeface="Inter" pitchFamily="34" charset="-122"/>
                 <a:cs typeface="Inter" pitchFamily="34" charset="-120"/>
               </a:rPr>
-              <a:t>description = the trigger</a:t>
+              <a:t>A folder, not a file</a:t>
             </a:r>
             <a:endParaRPr lang="en-US" sz="1450" dirty="0"/>
           </a:p>
@@ -12496,13 +12077,13 @@
       </p:sp>
       <p:sp>
         <p:nvSpPr>
-          <p:cNvPr id="16" name="Text 11"/>
-          <p:cNvSpPr/>
-          <p:nvPr/>
-        </p:nvSpPr>
-        <p:spPr>
-          <a:xfrm>
-            <a:off x="5596128" y="2734056"/>
+          <p:cNvPr id="12" name="Text 8"/>
+          <p:cNvSpPr/>
+          <p:nvPr/>
+        </p:nvSpPr>
+        <p:spPr>
+          <a:xfrm>
+            <a:off x="5596128" y="1984248"/>
             <a:ext cx="3246120" cy="310896"/>
           </a:xfrm>
           <a:prstGeom prst="rect">
@@ -12515,7 +12096,7 @@
           <a:bodyPr wrap="square" lIns="0" tIns="0" rIns="0" bIns="0" rtlCol="0" anchor="ctr"/>
           <a:lstStyle/>
           <a:p>
-            <a:pPr indent="0" marL="0">
+            <a:pPr marL="0" indent="0">
               <a:buNone/>
             </a:pPr>
             <a:r>
@@ -12527,7 +12108,7 @@
                 <a:ea typeface="Inter" pitchFamily="34" charset="-122"/>
                 <a:cs typeface="Inter" pitchFamily="34" charset="-120"/>
               </a:rPr>
-              <a:t>Written for the model to match</a:t>
+              <a:t>SKILL.md + references/ + scripts/</a:t>
             </a:r>
             <a:endParaRPr lang="en-US" sz="1200" dirty="0"/>
           </a:p>
@@ -12535,13 +12116,13 @@
       </p:sp>
       <p:sp>
         <p:nvSpPr>
-          <p:cNvPr id="17" name="Shape 12"/>
-          <p:cNvSpPr/>
-          <p:nvPr/>
-        </p:nvSpPr>
-        <p:spPr>
-          <a:xfrm>
-            <a:off x="5029200" y="3236976"/>
+          <p:cNvPr id="13" name="Shape 9"/>
+          <p:cNvSpPr/>
+          <p:nvPr/>
+        </p:nvSpPr>
+        <p:spPr>
+          <a:xfrm>
+            <a:off x="5029200" y="2487168"/>
             <a:ext cx="420624" cy="420624"/>
           </a:xfrm>
           <a:prstGeom prst="ellipse">
@@ -12552,10 +12133,17 @@
           </a:solidFill>
           <a:ln/>
         </p:spPr>
+        <p:txBody>
+          <a:bodyPr/>
+          <a:lstStyle/>
+          <a:p>
+            <a:endParaRPr lang="en-US"/>
+          </a:p>
+        </p:txBody>
       </p:sp>
       <p:pic>
         <p:nvPicPr>
-          <p:cNvPr id="18" name="Image 3" descr="preencoded.png">    </p:cNvPr>
+          <p:cNvPr id="14" name="Image 2" descr="preencoded.png"/>
           <p:cNvPicPr>
             <a:picLocks noChangeAspect="1"/>
           </p:cNvPicPr>
@@ -12569,6 +12157,135 @@
         </p:blipFill>
         <p:spPr>
           <a:xfrm>
+            <a:off x="5138562" y="2596530"/>
+            <a:ext cx="201900" cy="201900"/>
+          </a:xfrm>
+          <a:prstGeom prst="rect">
+            <a:avLst/>
+          </a:prstGeom>
+        </p:spPr>
+      </p:pic>
+      <p:sp>
+        <p:nvSpPr>
+          <p:cNvPr id="15" name="Text 10"/>
+          <p:cNvSpPr/>
+          <p:nvPr/>
+        </p:nvSpPr>
+        <p:spPr>
+          <a:xfrm>
+            <a:off x="5596128" y="2450592"/>
+            <a:ext cx="3200400" cy="292608"/>
+          </a:xfrm>
+          <a:prstGeom prst="rect">
+            <a:avLst/>
+          </a:prstGeom>
+          <a:noFill/>
+          <a:ln/>
+        </p:spPr>
+        <p:txBody>
+          <a:bodyPr wrap="square" lIns="0" tIns="0" rIns="0" bIns="0" rtlCol="0" anchor="ctr"/>
+          <a:lstStyle/>
+          <a:p>
+            <a:pPr marL="0" indent="0">
+              <a:buNone/>
+            </a:pPr>
+            <a:r>
+              <a:rPr lang="en-US" sz="1450" b="1" dirty="0">
+                <a:solidFill>
+                  <a:srgbClr val="141413"/>
+                </a:solidFill>
+                <a:latin typeface="Inter" pitchFamily="34" charset="0"/>
+                <a:ea typeface="Inter" pitchFamily="34" charset="-122"/>
+                <a:cs typeface="Inter" pitchFamily="34" charset="-120"/>
+              </a:rPr>
+              <a:t>description = the trigger</a:t>
+            </a:r>
+            <a:endParaRPr lang="en-US" sz="1450" dirty="0"/>
+          </a:p>
+        </p:txBody>
+      </p:sp>
+      <p:sp>
+        <p:nvSpPr>
+          <p:cNvPr id="16" name="Text 11"/>
+          <p:cNvSpPr/>
+          <p:nvPr/>
+        </p:nvSpPr>
+        <p:spPr>
+          <a:xfrm>
+            <a:off x="5596128" y="2734056"/>
+            <a:ext cx="3246120" cy="310896"/>
+          </a:xfrm>
+          <a:prstGeom prst="rect">
+            <a:avLst/>
+          </a:prstGeom>
+          <a:noFill/>
+          <a:ln/>
+        </p:spPr>
+        <p:txBody>
+          <a:bodyPr wrap="square" lIns="0" tIns="0" rIns="0" bIns="0" rtlCol="0" anchor="ctr"/>
+          <a:lstStyle/>
+          <a:p>
+            <a:pPr marL="0" indent="0">
+              <a:buNone/>
+            </a:pPr>
+            <a:r>
+              <a:rPr lang="en-US" sz="1200" dirty="0">
+                <a:solidFill>
+                  <a:srgbClr val="615C52"/>
+                </a:solidFill>
+                <a:latin typeface="Inter" pitchFamily="34" charset="0"/>
+                <a:ea typeface="Inter" pitchFamily="34" charset="-122"/>
+                <a:cs typeface="Inter" pitchFamily="34" charset="-120"/>
+              </a:rPr>
+              <a:t>Written for the model to match</a:t>
+            </a:r>
+            <a:endParaRPr lang="en-US" sz="1200" dirty="0"/>
+          </a:p>
+        </p:txBody>
+      </p:sp>
+      <p:sp>
+        <p:nvSpPr>
+          <p:cNvPr id="17" name="Shape 12"/>
+          <p:cNvSpPr/>
+          <p:nvPr/>
+        </p:nvSpPr>
+        <p:spPr>
+          <a:xfrm>
+            <a:off x="5029200" y="3236976"/>
+            <a:ext cx="420624" cy="420624"/>
+          </a:xfrm>
+          <a:prstGeom prst="ellipse">
+            <a:avLst/>
+          </a:prstGeom>
+          <a:solidFill>
+            <a:srgbClr val="D97757"/>
+          </a:solidFill>
+          <a:ln/>
+        </p:spPr>
+        <p:txBody>
+          <a:bodyPr/>
+          <a:lstStyle/>
+          <a:p>
+            <a:endParaRPr lang="en-US"/>
+          </a:p>
+        </p:txBody>
+      </p:sp>
+      <p:pic>
+        <p:nvPicPr>
+          <p:cNvPr id="18" name="Image 3" descr="preencoded.png"/>
+          <p:cNvPicPr>
+            <a:picLocks noChangeAspect="1"/>
+          </p:cNvPicPr>
+          <p:nvPr/>
+        </p:nvPicPr>
+        <p:blipFill>
+          <a:blip r:embed="rId5"/>
+          <a:stretch>
+            <a:fillRect/>
+          </a:stretch>
+        </p:blipFill>
+        <p:spPr>
+          <a:xfrm>
             <a:off x="5138562" y="3346338"/>
             <a:ext cx="201900" cy="201900"/>
           </a:xfrm>
@@ -12598,7 +12315,7 @@
           <a:bodyPr wrap="square" lIns="0" tIns="0" rIns="0" bIns="0" rtlCol="0" anchor="ctr"/>
           <a:lstStyle/>
           <a:p>
-            <a:pPr indent="0" marL="0">
+            <a:pPr marL="0" indent="0">
               <a:buNone/>
             </a:pPr>
             <a:r>
@@ -12637,7 +12354,7 @@
           <a:bodyPr wrap="square" lIns="0" tIns="0" rIns="0" bIns="0" rtlCol="0" anchor="ctr"/>
           <a:lstStyle/>
           <a:p>
-            <a:pPr indent="0" marL="0">
+            <a:pPr marL="0" indent="0">
               <a:buNone/>
             </a:pPr>
             <a:r>
@@ -12676,7 +12393,7 @@
           <a:bodyPr wrap="square" rtlCol="0" anchor="ctr"/>
           <a:lstStyle/>
           <a:p>
-            <a:pPr indent="0" marL="0">
+            <a:pPr marL="0" indent="0">
               <a:buNone/>
             </a:pPr>
             <a:r>
@@ -12715,7 +12432,7 @@
           <a:bodyPr wrap="square" rtlCol="0" anchor="ctr"/>
           <a:lstStyle/>
           <a:p>
-            <a:pPr algn="r" indent="0" marL="0">
+            <a:pPr marL="0" indent="0" algn="r">
               <a:buNone/>
             </a:pPr>
             <a:r>
@@ -12730,45 +12447,6 @@
               <a:t>Section 2  ·  7/14</a:t>
             </a:r>
             <a:endParaRPr lang="en-US" sz="900" dirty="0"/>
-          </a:p>
-        </p:txBody>
-      </p:sp>
-      <p:sp>
-        <p:nvSpPr>
-          <p:cNvPr id="23" name="Text 17"/>
-          <p:cNvSpPr/>
-          <p:nvPr/>
-        </p:nvSpPr>
-        <p:spPr>
-          <a:xfrm>
-            <a:off x="548640" y="4462272"/>
-            <a:ext cx="8046720" cy="274320"/>
-          </a:xfrm>
-          <a:prstGeom prst="rect">
-            <a:avLst/>
-          </a:prstGeom>
-          <a:noFill/>
-          <a:ln/>
-        </p:spPr>
-        <p:txBody>
-          <a:bodyPr wrap="square" lIns="0" tIns="0" rIns="0" bIns="0" rtlCol="0" anchor="ctr"/>
-          <a:lstStyle/>
-          <a:p>
-            <a:pPr indent="0" marL="0">
-              <a:buNone/>
-            </a:pPr>
-            <a:r>
-              <a:rPr lang="en-US" sz="1000" i="1" dirty="0">
-                <a:solidFill>
-                  <a:srgbClr val="615C52"/>
-                </a:solidFill>
-                <a:latin typeface="Inter" pitchFamily="34" charset="0"/>
-                <a:ea typeface="Inter" pitchFamily="34" charset="-122"/>
-                <a:cs typeface="Inter" pitchFamily="34" charset="-120"/>
-              </a:rPr>
-              <a:t>▸ Correction from earlier guidance: a skill is a directory, not a single file.</a:t>
-            </a:r>
-            <a:endParaRPr lang="en-US" sz="1000" dirty="0"/>
           </a:p>
         </p:txBody>
       </p:sp>
@@ -12788,6 +12466,7 @@
         <a:solidFill>
           <a:srgbClr val="F0EEE6"/>
         </a:solidFill>
+        <a:effectLst/>
       </p:bgPr>
     </p:bg>
     <p:spTree>
@@ -12825,11 +12504,11 @@
           <a:bodyPr wrap="square" lIns="0" tIns="0" rIns="0" bIns="0" rtlCol="0" anchor="ctr"/>
           <a:lstStyle/>
           <a:p>
-            <a:pPr indent="0" marL="0">
-              <a:buNone/>
-            </a:pPr>
-            <a:r>
-              <a:rPr lang="en-US" sz="1100" b="1" spc="200" kern="0" dirty="0">
+            <a:pPr marL="0" indent="0">
+              <a:buNone/>
+            </a:pPr>
+            <a:r>
+              <a:rPr lang="en-US" sz="1100" b="1" kern="0" spc="200" dirty="0">
                 <a:solidFill>
                   <a:srgbClr val="D97757"/>
                 </a:solidFill>
@@ -12864,7 +12543,7 @@
           <a:bodyPr wrap="square" lIns="0" tIns="0" rIns="0" bIns="0" rtlCol="0" anchor="ctr"/>
           <a:lstStyle/>
           <a:p>
-            <a:pPr indent="0" marL="0">
+            <a:pPr marL="0" indent="0">
               <a:buNone/>
             </a:pPr>
             <a:r>
@@ -12884,300 +12563,7 @@
       </p:sp>
       <p:pic>
         <p:nvPicPr>
-          <p:cNvPr id="4" name="Image 0" descr="preencoded.png">    </p:cNvPr>
-          <p:cNvPicPr>
-            <a:picLocks noChangeAspect="1"/>
-          </p:cNvPicPr>
-          <p:nvPr/>
-        </p:nvPicPr>
-        <p:blipFill>
-          <a:blip r:embed="rId1"/>
-          <a:stretch>
-            <a:fillRect/>
-          </a:stretch>
-        </p:blipFill>
-        <p:spPr>
-          <a:xfrm>
-            <a:off x="8339328" y="402336"/>
-            <a:ext cx="310896" cy="310896"/>
-          </a:xfrm>
-          <a:prstGeom prst="rect">
-            <a:avLst/>
-          </a:prstGeom>
-        </p:spPr>
-      </p:pic>
-      <p:sp>
-        <p:nvSpPr>
-          <p:cNvPr id="5" name="Shape 2"/>
-          <p:cNvSpPr/>
-          <p:nvPr/>
-        </p:nvSpPr>
-        <p:spPr>
-          <a:xfrm>
-            <a:off x="566928" y="1207008"/>
-            <a:ext cx="681228" cy="329184"/>
-          </a:xfrm>
-          <a:prstGeom prst="roundRect">
-            <a:avLst>
-              <a:gd name="adj" fmla="val 50000"/>
-            </a:avLst>
-          </a:prstGeom>
-          <a:solidFill>
-            <a:srgbClr val="D97757"/>
-          </a:solidFill>
-          <a:ln/>
-        </p:spPr>
-      </p:sp>
-      <p:sp>
-        <p:nvSpPr>
-          <p:cNvPr id="6" name="Text 3"/>
-          <p:cNvSpPr/>
-          <p:nvPr/>
-        </p:nvSpPr>
-        <p:spPr>
-          <a:xfrm>
-            <a:off x="566928" y="1207008"/>
-            <a:ext cx="681228" cy="329184"/>
-          </a:xfrm>
-          <a:prstGeom prst="rect">
-            <a:avLst/>
-          </a:prstGeom>
-          <a:noFill/>
-          <a:ln/>
-        </p:spPr>
-        <p:txBody>
-          <a:bodyPr wrap="none" lIns="0" tIns="0" rIns="0" bIns="0" rtlCol="0" anchor="ctr"/>
-          <a:lstStyle/>
-          <a:p>
-            <a:pPr algn="ctr" indent="0" marL="0">
-              <a:buNone/>
-            </a:pPr>
-            <a:r>
-              <a:rPr lang="en-US" sz="1100" b="1" spc="100" kern="0" dirty="0">
-                <a:solidFill>
-                  <a:srgbClr val="FFFFFF"/>
-                </a:solidFill>
-                <a:latin typeface="Inter" pitchFamily="34" charset="0"/>
-                <a:ea typeface="Inter" pitchFamily="34" charset="-122"/>
-                <a:cs typeface="Inter" pitchFamily="34" charset="-120"/>
-              </a:rPr>
-              <a:t>NEW</a:t>
-            </a:r>
-            <a:endParaRPr lang="en-US" sz="1100" dirty="0"/>
-          </a:p>
-        </p:txBody>
-      </p:sp>
-      <p:sp>
-        <p:nvSpPr>
-          <p:cNvPr id="7" name="Shape 4"/>
-          <p:cNvSpPr/>
-          <p:nvPr/>
-        </p:nvSpPr>
-        <p:spPr>
-          <a:xfrm>
-            <a:off x="548640" y="1691640"/>
-            <a:ext cx="4206240" cy="2240280"/>
-          </a:xfrm>
-          <a:prstGeom prst="roundRect">
-            <a:avLst>
-              <a:gd name="adj" fmla="val 3265"/>
-            </a:avLst>
-          </a:prstGeom>
-          <a:solidFill>
-            <a:srgbClr val="1F1E1D"/>
-          </a:solidFill>
-          <a:ln/>
-          <a:effectLst>
-            <a:outerShdw sx="100000" sy="100000" kx="0" ky="0" algn="bl" rotWithShape="0" blurRad="88900" dist="38100" dir="5400000">
-              <a:srgbClr val="000000">
-                <a:alpha val="10000"/>
-              </a:srgbClr>
-            </a:outerShdw>
-          </a:effectLst>
-        </p:spPr>
-      </p:sp>
-      <p:sp>
-        <p:nvSpPr>
-          <p:cNvPr id="8" name="Text 5"/>
-          <p:cNvSpPr/>
-          <p:nvPr/>
-        </p:nvSpPr>
-        <p:spPr>
-          <a:xfrm>
-            <a:off x="841248" y="1984248"/>
-            <a:ext cx="3657600" cy="1691640"/>
-          </a:xfrm>
-          <a:prstGeom prst="rect">
-            <a:avLst/>
-          </a:prstGeom>
-          <a:noFill/>
-          <a:ln/>
-        </p:spPr>
-        <p:txBody>
-          <a:bodyPr wrap="square" lIns="0" tIns="0" rIns="0" bIns="0" rtlCol="0" anchor="t"/>
-          <a:lstStyle/>
-          <a:p>
-            <a:pPr indent="0" marL="0">
-              <a:lnSpc>
-                <a:spcPct val="128000"/>
-              </a:lnSpc>
-              <a:buNone/>
-            </a:pPr>
-            <a:r>
-              <a:rPr lang="en-US" sz="1300" b="1" dirty="0">
-                <a:solidFill>
-                  <a:srgbClr val="D97757"/>
-                </a:solidFill>
-                <a:latin typeface="Courier New" pitchFamily="34" charset="0"/>
-                <a:ea typeface="Courier New" pitchFamily="34" charset="-122"/>
-                <a:cs typeface="Courier New" pitchFamily="34" charset="-120"/>
-              </a:rPr>
-              <a:t>.claude/rules/</a:t>
-            </a:r>
-            <a:pPr indent="0" marL="0">
-              <a:lnSpc>
-                <a:spcPct val="128000"/>
-              </a:lnSpc>
-              <a:buNone/>
-            </a:pPr>
-            <a:r>
-              <a:rPr lang="en-US" sz="1300" dirty="0">
-                <a:solidFill>
-                  <a:srgbClr val="E9E5DD"/>
-                </a:solidFill>
-                <a:latin typeface="Courier New" pitchFamily="34" charset="0"/>
-                <a:ea typeface="Courier New" pitchFamily="34" charset="-122"/>
-                <a:cs typeface="Courier New" pitchFamily="34" charset="-120"/>
-              </a:rPr>
-              <a:t>data.md</a:t>
-            </a:r>
-            <a:endParaRPr lang="en-US" sz="1300" dirty="0"/>
-          </a:p>
-          <a:p>
-            <a:pPr indent="0" marL="0">
-              <a:lnSpc>
-                <a:spcPct val="128000"/>
-              </a:lnSpc>
-              <a:buNone/>
-            </a:pPr>
-            <a:r>
-              <a:rPr lang="en-US" sz="1300" dirty="0">
-                <a:solidFill>
-                  <a:srgbClr val="9A958B"/>
-                </a:solidFill>
-                <a:latin typeface="Courier New" pitchFamily="34" charset="0"/>
-                <a:ea typeface="Courier New" pitchFamily="34" charset="-122"/>
-                <a:cs typeface="Courier New" pitchFamily="34" charset="-120"/>
-              </a:rPr>
-              <a:t>---</a:t>
-            </a:r>
-            <a:endParaRPr lang="en-US" sz="1300" dirty="0"/>
-          </a:p>
-          <a:p>
-            <a:pPr indent="0" marL="0">
-              <a:lnSpc>
-                <a:spcPct val="128000"/>
-              </a:lnSpc>
-              <a:buNone/>
-            </a:pPr>
-            <a:r>
-              <a:rPr lang="en-US" sz="1300" dirty="0">
-                <a:solidFill>
-                  <a:srgbClr val="E0A04A"/>
-                </a:solidFill>
-                <a:latin typeface="Courier New" pitchFamily="34" charset="0"/>
-                <a:ea typeface="Courier New" pitchFamily="34" charset="-122"/>
-                <a:cs typeface="Courier New" pitchFamily="34" charset="-120"/>
-              </a:rPr>
-              <a:t>paths:</a:t>
-            </a:r>
-            <a:endParaRPr lang="en-US" sz="1300" dirty="0"/>
-          </a:p>
-          <a:p>
-            <a:pPr indent="0" marL="0">
-              <a:lnSpc>
-                <a:spcPct val="128000"/>
-              </a:lnSpc>
-              <a:buNone/>
-            </a:pPr>
-            <a:r>
-              <a:rPr lang="en-US" sz="1300" dirty="0">
-                <a:solidFill>
-                  <a:srgbClr val="E9E5DD"/>
-                </a:solidFill>
-                <a:latin typeface="Courier New" pitchFamily="34" charset="0"/>
-                <a:ea typeface="Courier New" pitchFamily="34" charset="-122"/>
-                <a:cs typeface="Courier New" pitchFamily="34" charset="-120"/>
-              </a:rPr>
-              <a:t>  - "**/*.cs"</a:t>
-            </a:r>
-            <a:endParaRPr lang="en-US" sz="1300" dirty="0"/>
-          </a:p>
-          <a:p>
-            <a:pPr indent="0" marL="0">
-              <a:lnSpc>
-                <a:spcPct val="128000"/>
-              </a:lnSpc>
-              <a:buNone/>
-            </a:pPr>
-            <a:r>
-              <a:rPr lang="en-US" sz="1300" dirty="0">
-                <a:solidFill>
-                  <a:srgbClr val="9A958B"/>
-                </a:solidFill>
-                <a:latin typeface="Courier New" pitchFamily="34" charset="0"/>
-                <a:ea typeface="Courier New" pitchFamily="34" charset="-122"/>
-                <a:cs typeface="Courier New" pitchFamily="34" charset="-120"/>
-              </a:rPr>
-              <a:t>---</a:t>
-            </a:r>
-            <a:endParaRPr lang="en-US" sz="1300" dirty="0"/>
-          </a:p>
-          <a:p>
-            <a:pPr indent="0" marL="0">
-              <a:lnSpc>
-                <a:spcPct val="128000"/>
-              </a:lnSpc>
-              <a:buNone/>
-            </a:pPr>
-            <a:r>
-              <a:rPr lang="en-US" sz="1300" dirty="0">
-                <a:solidFill>
-                  <a:srgbClr val="E9E5DD"/>
-                </a:solidFill>
-                <a:latin typeface="Courier New" pitchFamily="34" charset="0"/>
-                <a:ea typeface="Courier New" pitchFamily="34" charset="-122"/>
-                <a:cs typeface="Courier New" pitchFamily="34" charset="-120"/>
-              </a:rPr>
-              <a:t>Use async EF Core calls.</a:t>
-            </a:r>
-            <a:endParaRPr lang="en-US" sz="1300" dirty="0"/>
-          </a:p>
-        </p:txBody>
-      </p:sp>
-      <p:sp>
-        <p:nvSpPr>
-          <p:cNvPr id="9" name="Shape 6"/>
-          <p:cNvSpPr/>
-          <p:nvPr/>
-        </p:nvSpPr>
-        <p:spPr>
-          <a:xfrm>
-            <a:off x="5029200" y="1737360"/>
-            <a:ext cx="420624" cy="420624"/>
-          </a:xfrm>
-          <a:prstGeom prst="ellipse">
-            <a:avLst/>
-          </a:prstGeom>
-          <a:solidFill>
-            <a:srgbClr val="D97757"/>
-          </a:solidFill>
-          <a:ln/>
-        </p:spPr>
-      </p:sp>
-      <p:pic>
-        <p:nvPicPr>
-          <p:cNvPr id="10" name="Image 1" descr="preencoded.png">    </p:cNvPr>
+          <p:cNvPr id="4" name="Image 0" descr="preencoded.png"/>
           <p:cNvPicPr>
             <a:picLocks noChangeAspect="1"/>
           </p:cNvPicPr>
@@ -13191,8 +12577,8 @@
         </p:blipFill>
         <p:spPr>
           <a:xfrm>
-            <a:off x="5138562" y="1846722"/>
-            <a:ext cx="201900" cy="201900"/>
+            <a:off x="8339328" y="402336"/>
+            <a:ext cx="310896" cy="310896"/>
           </a:xfrm>
           <a:prstGeom prst="rect">
             <a:avLst/>
@@ -13201,105 +12587,291 @@
       </p:pic>
       <p:sp>
         <p:nvSpPr>
-          <p:cNvPr id="11" name="Text 7"/>
-          <p:cNvSpPr/>
-          <p:nvPr/>
-        </p:nvSpPr>
-        <p:spPr>
-          <a:xfrm>
-            <a:off x="5596128" y="1700784"/>
-            <a:ext cx="3200400" cy="292608"/>
-          </a:xfrm>
-          <a:prstGeom prst="rect">
-            <a:avLst/>
-          </a:prstGeom>
-          <a:noFill/>
-          <a:ln/>
-        </p:spPr>
-        <p:txBody>
-          <a:bodyPr wrap="square" lIns="0" tIns="0" rIns="0" bIns="0" rtlCol="0" anchor="ctr"/>
-          <a:lstStyle/>
-          <a:p>
-            <a:pPr indent="0" marL="0">
-              <a:buNone/>
-            </a:pPr>
-            <a:r>
-              <a:rPr lang="en-US" sz="1400" b="1" dirty="0">
-                <a:solidFill>
-                  <a:srgbClr val="141413"/>
-                </a:solidFill>
-                <a:latin typeface="Inter" pitchFamily="34" charset="0"/>
-                <a:ea typeface="Inter" pitchFamily="34" charset="-122"/>
-                <a:cs typeface="Inter" pitchFamily="34" charset="-120"/>
-              </a:rPr>
-              <a:t>Unscoped = always loaded</a:t>
-            </a:r>
-            <a:endParaRPr lang="en-US" sz="1400" dirty="0"/>
-          </a:p>
-        </p:txBody>
-      </p:sp>
-      <p:sp>
-        <p:nvSpPr>
-          <p:cNvPr id="12" name="Text 8"/>
-          <p:cNvSpPr/>
-          <p:nvPr/>
-        </p:nvSpPr>
-        <p:spPr>
-          <a:xfrm>
-            <a:off x="5596128" y="1984248"/>
-            <a:ext cx="3291840" cy="310896"/>
-          </a:xfrm>
-          <a:prstGeom prst="rect">
-            <a:avLst/>
-          </a:prstGeom>
-          <a:noFill/>
-          <a:ln/>
-        </p:spPr>
-        <p:txBody>
-          <a:bodyPr wrap="square" lIns="0" tIns="0" rIns="0" bIns="0" rtlCol="0" anchor="ctr"/>
-          <a:lstStyle/>
-          <a:p>
-            <a:pPr indent="0" marL="0">
-              <a:buNone/>
-            </a:pPr>
-            <a:r>
-              <a:rPr lang="en-US" sz="1150" dirty="0">
-                <a:solidFill>
-                  <a:srgbClr val="615C52"/>
-                </a:solidFill>
-                <a:latin typeface="Inter" pitchFamily="34" charset="0"/>
-                <a:ea typeface="Inter" pitchFamily="34" charset="-122"/>
-                <a:cs typeface="Inter" pitchFamily="34" charset="-120"/>
-              </a:rPr>
-              <a:t>Path-scoped loads on file-match</a:t>
-            </a:r>
-            <a:endParaRPr lang="en-US" sz="1150" dirty="0"/>
-          </a:p>
-        </p:txBody>
-      </p:sp>
-      <p:sp>
-        <p:nvSpPr>
-          <p:cNvPr id="13" name="Shape 9"/>
-          <p:cNvSpPr/>
-          <p:nvPr/>
-        </p:nvSpPr>
-        <p:spPr>
-          <a:xfrm>
-            <a:off x="5029200" y="2487168"/>
-            <a:ext cx="420624" cy="420624"/>
-          </a:xfrm>
-          <a:prstGeom prst="ellipse">
-            <a:avLst/>
+          <p:cNvPr id="5" name="Shape 2"/>
+          <p:cNvSpPr/>
+          <p:nvPr/>
+        </p:nvSpPr>
+        <p:spPr>
+          <a:xfrm>
+            <a:off x="566928" y="1207008"/>
+            <a:ext cx="681228" cy="329184"/>
+          </a:xfrm>
+          <a:prstGeom prst="roundRect">
+            <a:avLst>
+              <a:gd name="adj" fmla="val 50000"/>
+            </a:avLst>
           </a:prstGeom>
           <a:solidFill>
             <a:srgbClr val="D97757"/>
           </a:solidFill>
           <a:ln/>
         </p:spPr>
+        <p:txBody>
+          <a:bodyPr/>
+          <a:lstStyle/>
+          <a:p>
+            <a:endParaRPr lang="en-US"/>
+          </a:p>
+        </p:txBody>
+      </p:sp>
+      <p:sp>
+        <p:nvSpPr>
+          <p:cNvPr id="6" name="Text 3"/>
+          <p:cNvSpPr/>
+          <p:nvPr/>
+        </p:nvSpPr>
+        <p:spPr>
+          <a:xfrm>
+            <a:off x="566928" y="1207008"/>
+            <a:ext cx="681228" cy="329184"/>
+          </a:xfrm>
+          <a:prstGeom prst="rect">
+            <a:avLst/>
+          </a:prstGeom>
+          <a:noFill/>
+          <a:ln/>
+        </p:spPr>
+        <p:txBody>
+          <a:bodyPr wrap="none" lIns="0" tIns="0" rIns="0" bIns="0" rtlCol="0" anchor="ctr"/>
+          <a:lstStyle/>
+          <a:p>
+            <a:pPr marL="0" indent="0" algn="ctr">
+              <a:buNone/>
+            </a:pPr>
+            <a:r>
+              <a:rPr lang="en-US" sz="1100" b="1" kern="0" spc="100" dirty="0">
+                <a:solidFill>
+                  <a:srgbClr val="FFFFFF"/>
+                </a:solidFill>
+                <a:latin typeface="Inter" pitchFamily="34" charset="0"/>
+                <a:ea typeface="Inter" pitchFamily="34" charset="-122"/>
+                <a:cs typeface="Inter" pitchFamily="34" charset="-120"/>
+              </a:rPr>
+              <a:t>NEW</a:t>
+            </a:r>
+            <a:endParaRPr lang="en-US" sz="1100" dirty="0"/>
+          </a:p>
+        </p:txBody>
+      </p:sp>
+      <p:sp>
+        <p:nvSpPr>
+          <p:cNvPr id="7" name="Shape 4"/>
+          <p:cNvSpPr/>
+          <p:nvPr/>
+        </p:nvSpPr>
+        <p:spPr>
+          <a:xfrm>
+            <a:off x="548640" y="1691640"/>
+            <a:ext cx="4206240" cy="2240280"/>
+          </a:xfrm>
+          <a:prstGeom prst="roundRect">
+            <a:avLst>
+              <a:gd name="adj" fmla="val 3265"/>
+            </a:avLst>
+          </a:prstGeom>
+          <a:solidFill>
+            <a:srgbClr val="1F1E1D"/>
+          </a:solidFill>
+          <a:ln/>
+          <a:effectLst>
+            <a:outerShdw blurRad="88900" dist="38100" dir="5400000" algn="bl" rotWithShape="0">
+              <a:srgbClr val="000000">
+                <a:alpha val="10000"/>
+              </a:srgbClr>
+            </a:outerShdw>
+          </a:effectLst>
+        </p:spPr>
+        <p:txBody>
+          <a:bodyPr/>
+          <a:lstStyle/>
+          <a:p>
+            <a:endParaRPr lang="en-US"/>
+          </a:p>
+        </p:txBody>
+      </p:sp>
+      <p:sp>
+        <p:nvSpPr>
+          <p:cNvPr id="8" name="Text 5"/>
+          <p:cNvSpPr/>
+          <p:nvPr/>
+        </p:nvSpPr>
+        <p:spPr>
+          <a:xfrm>
+            <a:off x="841248" y="1984248"/>
+            <a:ext cx="3657600" cy="1691640"/>
+          </a:xfrm>
+          <a:prstGeom prst="rect">
+            <a:avLst/>
+          </a:prstGeom>
+          <a:noFill/>
+          <a:ln/>
+        </p:spPr>
+        <p:txBody>
+          <a:bodyPr wrap="square" lIns="0" tIns="0" rIns="0" bIns="0" rtlCol="0" anchor="t"/>
+          <a:lstStyle/>
+          <a:p>
+            <a:pPr marL="0" indent="0">
+              <a:lnSpc>
+                <a:spcPct val="128000"/>
+              </a:lnSpc>
+              <a:buNone/>
+            </a:pPr>
+            <a:r>
+              <a:rPr lang="en-US" sz="1300" b="1" dirty="0">
+                <a:solidFill>
+                  <a:srgbClr val="D97757"/>
+                </a:solidFill>
+                <a:latin typeface="Courier New" pitchFamily="34" charset="0"/>
+                <a:ea typeface="Courier New" pitchFamily="34" charset="-122"/>
+                <a:cs typeface="Courier New" pitchFamily="34" charset="-120"/>
+              </a:rPr>
+              <a:t>.claude/rules/</a:t>
+            </a:r>
+            <a:r>
+              <a:rPr lang="en-US" sz="1300" dirty="0">
+                <a:solidFill>
+                  <a:srgbClr val="E9E5DD"/>
+                </a:solidFill>
+                <a:latin typeface="Courier New" pitchFamily="34" charset="0"/>
+                <a:ea typeface="Courier New" pitchFamily="34" charset="-122"/>
+                <a:cs typeface="Courier New" pitchFamily="34" charset="-120"/>
+              </a:rPr>
+              <a:t>data.md</a:t>
+            </a:r>
+            <a:endParaRPr lang="en-US" sz="1300" dirty="0"/>
+          </a:p>
+          <a:p>
+            <a:pPr marL="0" indent="0">
+              <a:lnSpc>
+                <a:spcPct val="128000"/>
+              </a:lnSpc>
+              <a:buNone/>
+            </a:pPr>
+            <a:r>
+              <a:rPr lang="en-US" sz="1300" dirty="0">
+                <a:solidFill>
+                  <a:srgbClr val="9A958B"/>
+                </a:solidFill>
+                <a:latin typeface="Courier New" pitchFamily="34" charset="0"/>
+                <a:ea typeface="Courier New" pitchFamily="34" charset="-122"/>
+                <a:cs typeface="Courier New" pitchFamily="34" charset="-120"/>
+              </a:rPr>
+              <a:t>---</a:t>
+            </a:r>
+            <a:endParaRPr lang="en-US" sz="1300" dirty="0"/>
+          </a:p>
+          <a:p>
+            <a:pPr marL="0" indent="0">
+              <a:lnSpc>
+                <a:spcPct val="128000"/>
+              </a:lnSpc>
+              <a:buNone/>
+            </a:pPr>
+            <a:r>
+              <a:rPr lang="en-US" sz="1300" dirty="0">
+                <a:solidFill>
+                  <a:srgbClr val="E0A04A"/>
+                </a:solidFill>
+                <a:latin typeface="Courier New" pitchFamily="34" charset="0"/>
+                <a:ea typeface="Courier New" pitchFamily="34" charset="-122"/>
+                <a:cs typeface="Courier New" pitchFamily="34" charset="-120"/>
+              </a:rPr>
+              <a:t>paths:</a:t>
+            </a:r>
+            <a:endParaRPr lang="en-US" sz="1300" dirty="0"/>
+          </a:p>
+          <a:p>
+            <a:pPr marL="0" indent="0">
+              <a:lnSpc>
+                <a:spcPct val="128000"/>
+              </a:lnSpc>
+              <a:buNone/>
+            </a:pPr>
+            <a:r>
+              <a:rPr lang="en-US" sz="1300" dirty="0">
+                <a:solidFill>
+                  <a:srgbClr val="E9E5DD"/>
+                </a:solidFill>
+                <a:latin typeface="Courier New" pitchFamily="34" charset="0"/>
+                <a:ea typeface="Courier New" pitchFamily="34" charset="-122"/>
+                <a:cs typeface="Courier New" pitchFamily="34" charset="-120"/>
+              </a:rPr>
+              <a:t>  - "**/*.cs"</a:t>
+            </a:r>
+            <a:endParaRPr lang="en-US" sz="1300" dirty="0"/>
+          </a:p>
+          <a:p>
+            <a:pPr marL="0" indent="0">
+              <a:lnSpc>
+                <a:spcPct val="128000"/>
+              </a:lnSpc>
+              <a:buNone/>
+            </a:pPr>
+            <a:r>
+              <a:rPr lang="en-US" sz="1300" dirty="0">
+                <a:solidFill>
+                  <a:srgbClr val="9A958B"/>
+                </a:solidFill>
+                <a:latin typeface="Courier New" pitchFamily="34" charset="0"/>
+                <a:ea typeface="Courier New" pitchFamily="34" charset="-122"/>
+                <a:cs typeface="Courier New" pitchFamily="34" charset="-120"/>
+              </a:rPr>
+              <a:t>---</a:t>
+            </a:r>
+            <a:endParaRPr lang="en-US" sz="1300" dirty="0"/>
+          </a:p>
+          <a:p>
+            <a:pPr marL="0" indent="0">
+              <a:lnSpc>
+                <a:spcPct val="128000"/>
+              </a:lnSpc>
+              <a:buNone/>
+            </a:pPr>
+            <a:r>
+              <a:rPr lang="en-US" sz="1300" dirty="0">
+                <a:solidFill>
+                  <a:srgbClr val="E9E5DD"/>
+                </a:solidFill>
+                <a:latin typeface="Courier New" pitchFamily="34" charset="0"/>
+                <a:ea typeface="Courier New" pitchFamily="34" charset="-122"/>
+                <a:cs typeface="Courier New" pitchFamily="34" charset="-120"/>
+              </a:rPr>
+              <a:t>Use async EF Core calls.</a:t>
+            </a:r>
+            <a:endParaRPr lang="en-US" sz="1300" dirty="0"/>
+          </a:p>
+        </p:txBody>
+      </p:sp>
+      <p:sp>
+        <p:nvSpPr>
+          <p:cNvPr id="9" name="Shape 6"/>
+          <p:cNvSpPr/>
+          <p:nvPr/>
+        </p:nvSpPr>
+        <p:spPr>
+          <a:xfrm>
+            <a:off x="5029200" y="1737360"/>
+            <a:ext cx="420624" cy="420624"/>
+          </a:xfrm>
+          <a:prstGeom prst="ellipse">
+            <a:avLst/>
+          </a:prstGeom>
+          <a:solidFill>
+            <a:srgbClr val="D97757"/>
+          </a:solidFill>
+          <a:ln/>
+        </p:spPr>
+        <p:txBody>
+          <a:bodyPr/>
+          <a:lstStyle/>
+          <a:p>
+            <a:endParaRPr lang="en-US"/>
+          </a:p>
+        </p:txBody>
       </p:sp>
       <p:pic>
         <p:nvPicPr>
-          <p:cNvPr id="14" name="Image 2" descr="preencoded.png">    </p:cNvPr>
+          <p:cNvPr id="10" name="Image 1" descr="preencoded.png"/>
           <p:cNvPicPr>
             <a:picLocks noChangeAspect="1"/>
           </p:cNvPicPr>
@@ -13313,7 +12885,7 @@
         </p:blipFill>
         <p:spPr>
           <a:xfrm>
-            <a:off x="5138562" y="2596530"/>
+            <a:off x="5138562" y="1846722"/>
             <a:ext cx="201900" cy="201900"/>
           </a:xfrm>
           <a:prstGeom prst="rect">
@@ -13323,13 +12895,13 @@
       </p:pic>
       <p:sp>
         <p:nvSpPr>
-          <p:cNvPr id="15" name="Text 10"/>
-          <p:cNvSpPr/>
-          <p:nvPr/>
-        </p:nvSpPr>
-        <p:spPr>
-          <a:xfrm>
-            <a:off x="5596128" y="2450592"/>
+          <p:cNvPr id="11" name="Text 7"/>
+          <p:cNvSpPr/>
+          <p:nvPr/>
+        </p:nvSpPr>
+        <p:spPr>
+          <a:xfrm>
+            <a:off x="5596128" y="1700784"/>
             <a:ext cx="3200400" cy="292608"/>
           </a:xfrm>
           <a:prstGeom prst="rect">
@@ -13342,7 +12914,7 @@
           <a:bodyPr wrap="square" lIns="0" tIns="0" rIns="0" bIns="0" rtlCol="0" anchor="ctr"/>
           <a:lstStyle/>
           <a:p>
-            <a:pPr indent="0" marL="0">
+            <a:pPr marL="0" indent="0">
               <a:buNone/>
             </a:pPr>
             <a:r>
@@ -13354,7 +12926,7 @@
                 <a:ea typeface="Inter" pitchFamily="34" charset="-122"/>
                 <a:cs typeface="Inter" pitchFamily="34" charset="-120"/>
               </a:rPr>
-              <a:t>Gotcha: load on read</a:t>
+              <a:t>Unscoped = always loaded</a:t>
             </a:r>
             <a:endParaRPr lang="en-US" sz="1400" dirty="0"/>
           </a:p>
@@ -13362,13 +12934,13 @@
       </p:sp>
       <p:sp>
         <p:nvSpPr>
-          <p:cNvPr id="16" name="Text 11"/>
-          <p:cNvSpPr/>
-          <p:nvPr/>
-        </p:nvSpPr>
-        <p:spPr>
-          <a:xfrm>
-            <a:off x="5596128" y="2734056"/>
+          <p:cNvPr id="12" name="Text 8"/>
+          <p:cNvSpPr/>
+          <p:nvPr/>
+        </p:nvSpPr>
+        <p:spPr>
+          <a:xfrm>
+            <a:off x="5596128" y="1984248"/>
             <a:ext cx="3291840" cy="310896"/>
           </a:xfrm>
           <a:prstGeom prst="rect">
@@ -13381,7 +12953,7 @@
           <a:bodyPr wrap="square" lIns="0" tIns="0" rIns="0" bIns="0" rtlCol="0" anchor="ctr"/>
           <a:lstStyle/>
           <a:p>
-            <a:pPr indent="0" marL="0">
+            <a:pPr marL="0" indent="0">
               <a:buNone/>
             </a:pPr>
             <a:r>
@@ -13393,7 +12965,7 @@
                 <a:ea typeface="Inter" pitchFamily="34" charset="-122"/>
                 <a:cs typeface="Inter" pitchFamily="34" charset="-120"/>
               </a:rPr>
-              <a:t>Applies when a file is read, not created</a:t>
+              <a:t>Path-scoped loads on file-match</a:t>
             </a:r>
             <a:endParaRPr lang="en-US" sz="1150" dirty="0"/>
           </a:p>
@@ -13401,13 +12973,13 @@
       </p:sp>
       <p:sp>
         <p:nvSpPr>
-          <p:cNvPr id="17" name="Shape 12"/>
-          <p:cNvSpPr/>
-          <p:nvPr/>
-        </p:nvSpPr>
-        <p:spPr>
-          <a:xfrm>
-            <a:off x="5029200" y="3236976"/>
+          <p:cNvPr id="13" name="Shape 9"/>
+          <p:cNvSpPr/>
+          <p:nvPr/>
+        </p:nvSpPr>
+        <p:spPr>
+          <a:xfrm>
+            <a:off x="5029200" y="2487168"/>
             <a:ext cx="420624" cy="420624"/>
           </a:xfrm>
           <a:prstGeom prst="ellipse">
@@ -13418,10 +12990,17 @@
           </a:solidFill>
           <a:ln/>
         </p:spPr>
+        <p:txBody>
+          <a:bodyPr/>
+          <a:lstStyle/>
+          <a:p>
+            <a:endParaRPr lang="en-US"/>
+          </a:p>
+        </p:txBody>
       </p:sp>
       <p:pic>
         <p:nvPicPr>
-          <p:cNvPr id="18" name="Image 3" descr="preencoded.png">    </p:cNvPr>
+          <p:cNvPr id="14" name="Image 2" descr="preencoded.png"/>
           <p:cNvPicPr>
             <a:picLocks noChangeAspect="1"/>
           </p:cNvPicPr>
@@ -13435,6 +13014,135 @@
         </p:blipFill>
         <p:spPr>
           <a:xfrm>
+            <a:off x="5138562" y="2596530"/>
+            <a:ext cx="201900" cy="201900"/>
+          </a:xfrm>
+          <a:prstGeom prst="rect">
+            <a:avLst/>
+          </a:prstGeom>
+        </p:spPr>
+      </p:pic>
+      <p:sp>
+        <p:nvSpPr>
+          <p:cNvPr id="15" name="Text 10"/>
+          <p:cNvSpPr/>
+          <p:nvPr/>
+        </p:nvSpPr>
+        <p:spPr>
+          <a:xfrm>
+            <a:off x="5596128" y="2450592"/>
+            <a:ext cx="3200400" cy="292608"/>
+          </a:xfrm>
+          <a:prstGeom prst="rect">
+            <a:avLst/>
+          </a:prstGeom>
+          <a:noFill/>
+          <a:ln/>
+        </p:spPr>
+        <p:txBody>
+          <a:bodyPr wrap="square" lIns="0" tIns="0" rIns="0" bIns="0" rtlCol="0" anchor="ctr"/>
+          <a:lstStyle/>
+          <a:p>
+            <a:pPr marL="0" indent="0">
+              <a:buNone/>
+            </a:pPr>
+            <a:r>
+              <a:rPr lang="en-US" sz="1400" b="1" dirty="0">
+                <a:solidFill>
+                  <a:srgbClr val="141413"/>
+                </a:solidFill>
+                <a:latin typeface="Inter" pitchFamily="34" charset="0"/>
+                <a:ea typeface="Inter" pitchFamily="34" charset="-122"/>
+                <a:cs typeface="Inter" pitchFamily="34" charset="-120"/>
+              </a:rPr>
+              <a:t>Gotcha: load on read</a:t>
+            </a:r>
+            <a:endParaRPr lang="en-US" sz="1400" dirty="0"/>
+          </a:p>
+        </p:txBody>
+      </p:sp>
+      <p:sp>
+        <p:nvSpPr>
+          <p:cNvPr id="16" name="Text 11"/>
+          <p:cNvSpPr/>
+          <p:nvPr/>
+        </p:nvSpPr>
+        <p:spPr>
+          <a:xfrm>
+            <a:off x="5596128" y="2734056"/>
+            <a:ext cx="3291840" cy="310896"/>
+          </a:xfrm>
+          <a:prstGeom prst="rect">
+            <a:avLst/>
+          </a:prstGeom>
+          <a:noFill/>
+          <a:ln/>
+        </p:spPr>
+        <p:txBody>
+          <a:bodyPr wrap="square" lIns="0" tIns="0" rIns="0" bIns="0" rtlCol="0" anchor="ctr"/>
+          <a:lstStyle/>
+          <a:p>
+            <a:pPr marL="0" indent="0">
+              <a:buNone/>
+            </a:pPr>
+            <a:r>
+              <a:rPr lang="en-US" sz="1150" dirty="0">
+                <a:solidFill>
+                  <a:srgbClr val="615C52"/>
+                </a:solidFill>
+                <a:latin typeface="Inter" pitchFamily="34" charset="0"/>
+                <a:ea typeface="Inter" pitchFamily="34" charset="-122"/>
+                <a:cs typeface="Inter" pitchFamily="34" charset="-120"/>
+              </a:rPr>
+              <a:t>Applies when a file is read, not created</a:t>
+            </a:r>
+            <a:endParaRPr lang="en-US" sz="1150" dirty="0"/>
+          </a:p>
+        </p:txBody>
+      </p:sp>
+      <p:sp>
+        <p:nvSpPr>
+          <p:cNvPr id="17" name="Shape 12"/>
+          <p:cNvSpPr/>
+          <p:nvPr/>
+        </p:nvSpPr>
+        <p:spPr>
+          <a:xfrm>
+            <a:off x="5029200" y="3236976"/>
+            <a:ext cx="420624" cy="420624"/>
+          </a:xfrm>
+          <a:prstGeom prst="ellipse">
+            <a:avLst/>
+          </a:prstGeom>
+          <a:solidFill>
+            <a:srgbClr val="D97757"/>
+          </a:solidFill>
+          <a:ln/>
+        </p:spPr>
+        <p:txBody>
+          <a:bodyPr/>
+          <a:lstStyle/>
+          <a:p>
+            <a:endParaRPr lang="en-US"/>
+          </a:p>
+        </p:txBody>
+      </p:sp>
+      <p:pic>
+        <p:nvPicPr>
+          <p:cNvPr id="18" name="Image 3" descr="preencoded.png"/>
+          <p:cNvPicPr>
+            <a:picLocks noChangeAspect="1"/>
+          </p:cNvPicPr>
+          <p:nvPr/>
+        </p:nvPicPr>
+        <p:blipFill>
+          <a:blip r:embed="rId5"/>
+          <a:stretch>
+            <a:fillRect/>
+          </a:stretch>
+        </p:blipFill>
+        <p:spPr>
+          <a:xfrm>
             <a:off x="5138562" y="3346338"/>
             <a:ext cx="201900" cy="201900"/>
           </a:xfrm>
@@ -13464,7 +13172,7 @@
           <a:bodyPr wrap="square" lIns="0" tIns="0" rIns="0" bIns="0" rtlCol="0" anchor="ctr"/>
           <a:lstStyle/>
           <a:p>
-            <a:pPr indent="0" marL="0">
+            <a:pPr marL="0" indent="0">
               <a:buNone/>
             </a:pPr>
             <a:r>
@@ -13503,7 +13211,7 @@
           <a:bodyPr wrap="square" lIns="0" tIns="0" rIns="0" bIns="0" rtlCol="0" anchor="ctr"/>
           <a:lstStyle/>
           <a:p>
-            <a:pPr indent="0" marL="0">
+            <a:pPr marL="0" indent="0">
               <a:buNone/>
             </a:pPr>
             <a:r>
@@ -13542,7 +13250,7 @@
           <a:bodyPr wrap="square" rtlCol="0" anchor="ctr"/>
           <a:lstStyle/>
           <a:p>
-            <a:pPr indent="0" marL="0">
+            <a:pPr marL="0" indent="0">
               <a:buNone/>
             </a:pPr>
             <a:r>
@@ -13581,7 +13289,7 @@
           <a:bodyPr wrap="square" rtlCol="0" anchor="ctr"/>
           <a:lstStyle/>
           <a:p>
-            <a:pPr algn="r" indent="0" marL="0">
+            <a:pPr marL="0" indent="0" algn="r">
               <a:buNone/>
             </a:pPr>
             <a:r>
@@ -13596,45 +13304,6 @@
               <a:t>Section 2  ·  8/14</a:t>
             </a:r>
             <a:endParaRPr lang="en-US" sz="900" dirty="0"/>
-          </a:p>
-        </p:txBody>
-      </p:sp>
-      <p:sp>
-        <p:nvSpPr>
-          <p:cNvPr id="23" name="Text 17"/>
-          <p:cNvSpPr/>
-          <p:nvPr/>
-        </p:nvSpPr>
-        <p:spPr>
-          <a:xfrm>
-            <a:off x="548640" y="4462272"/>
-            <a:ext cx="8046720" cy="274320"/>
-          </a:xfrm>
-          <a:prstGeom prst="rect">
-            <a:avLst/>
-          </a:prstGeom>
-          <a:noFill/>
-          <a:ln/>
-        </p:spPr>
-        <p:txBody>
-          <a:bodyPr wrap="square" lIns="0" tIns="0" rIns="0" bIns="0" rtlCol="0" anchor="ctr"/>
-          <a:lstStyle/>
-          <a:p>
-            <a:pPr indent="0" marL="0">
-              <a:buNone/>
-            </a:pPr>
-            <a:r>
-              <a:rPr lang="en-US" sz="1000" i="1" dirty="0">
-                <a:solidFill>
-                  <a:srgbClr val="615C52"/>
-                </a:solidFill>
-                <a:latin typeface="Inter" pitchFamily="34" charset="0"/>
-                <a:ea typeface="Inter" pitchFamily="34" charset="-122"/>
-                <a:cs typeface="Inter" pitchFamily="34" charset="-120"/>
-              </a:rPr>
-              <a:t>▸ Brand-new mechanism: scoped standards that attach to matching file paths.</a:t>
-            </a:r>
-            <a:endParaRPr lang="en-US" sz="1000" dirty="0"/>
           </a:p>
         </p:txBody>
       </p:sp>
@@ -13654,6 +13323,7 @@
         <a:solidFill>
           <a:srgbClr val="F0EEE6"/>
         </a:solidFill>
+        <a:effectLst/>
       </p:bgPr>
     </p:bg>
     <p:spTree>
@@ -13691,11 +13361,11 @@
           <a:bodyPr wrap="square" lIns="0" tIns="0" rIns="0" bIns="0" rtlCol="0" anchor="ctr"/>
           <a:lstStyle/>
           <a:p>
-            <a:pPr indent="0" marL="0">
-              <a:buNone/>
-            </a:pPr>
-            <a:r>
-              <a:rPr lang="en-US" sz="1100" b="1" spc="200" kern="0" dirty="0">
+            <a:pPr marL="0" indent="0">
+              <a:buNone/>
+            </a:pPr>
+            <a:r>
+              <a:rPr lang="en-US" sz="1100" b="1" kern="0" spc="200" dirty="0">
                 <a:solidFill>
                   <a:srgbClr val="D97757"/>
                 </a:solidFill>
@@ -13730,7 +13400,7 @@
           <a:bodyPr wrap="square" lIns="0" tIns="0" rIns="0" bIns="0" rtlCol="0" anchor="ctr"/>
           <a:lstStyle/>
           <a:p>
-            <a:pPr indent="0" marL="0">
+            <a:pPr marL="0" indent="0">
               <a:buNone/>
             </a:pPr>
             <a:r>
@@ -13750,277 +13420,7 @@
       </p:sp>
       <p:pic>
         <p:nvPicPr>
-          <p:cNvPr id="4" name="Image 0" descr="preencoded.png">    </p:cNvPr>
-          <p:cNvPicPr>
-            <a:picLocks noChangeAspect="1"/>
-          </p:cNvPicPr>
-          <p:nvPr/>
-        </p:nvPicPr>
-        <p:blipFill>
-          <a:blip r:embed="rId1"/>
-          <a:stretch>
-            <a:fillRect/>
-          </a:stretch>
-        </p:blipFill>
-        <p:spPr>
-          <a:xfrm>
-            <a:off x="8339328" y="402336"/>
-            <a:ext cx="310896" cy="310896"/>
-          </a:xfrm>
-          <a:prstGeom prst="rect">
-            <a:avLst/>
-          </a:prstGeom>
-        </p:spPr>
-      </p:pic>
-      <p:sp>
-        <p:nvSpPr>
-          <p:cNvPr id="5" name="Shape 2"/>
-          <p:cNvSpPr/>
-          <p:nvPr/>
-        </p:nvSpPr>
-        <p:spPr>
-          <a:xfrm>
-            <a:off x="566928" y="1207008"/>
-            <a:ext cx="1417320" cy="329184"/>
-          </a:xfrm>
-          <a:prstGeom prst="roundRect">
-            <a:avLst>
-              <a:gd name="adj" fmla="val 50000"/>
-            </a:avLst>
-          </a:prstGeom>
-          <a:solidFill>
-            <a:srgbClr val="C0392B"/>
-          </a:solidFill>
-          <a:ln/>
-        </p:spPr>
-      </p:sp>
-      <p:sp>
-        <p:nvSpPr>
-          <p:cNvPr id="6" name="Text 3"/>
-          <p:cNvSpPr/>
-          <p:nvPr/>
-        </p:nvSpPr>
-        <p:spPr>
-          <a:xfrm>
-            <a:off x="566928" y="1207008"/>
-            <a:ext cx="1417320" cy="329184"/>
-          </a:xfrm>
-          <a:prstGeom prst="rect">
-            <a:avLst/>
-          </a:prstGeom>
-          <a:noFill/>
-          <a:ln/>
-        </p:spPr>
-        <p:txBody>
-          <a:bodyPr wrap="none" lIns="0" tIns="0" rIns="0" bIns="0" rtlCol="0" anchor="ctr"/>
-          <a:lstStyle/>
-          <a:p>
-            <a:pPr algn="ctr" indent="0" marL="0">
-              <a:buNone/>
-            </a:pPr>
-            <a:r>
-              <a:rPr lang="en-US" sz="1100" b="1" spc="100" kern="0" dirty="0">
-                <a:solidFill>
-                  <a:srgbClr val="FFFFFF"/>
-                </a:solidFill>
-                <a:latin typeface="Inter" pitchFamily="34" charset="0"/>
-                <a:ea typeface="Inter" pitchFamily="34" charset="-122"/>
-                <a:cs typeface="Inter" pitchFamily="34" charset="-120"/>
-              </a:rPr>
-              <a:t>CORRECTION</a:t>
-            </a:r>
-            <a:endParaRPr lang="en-US" sz="1100" dirty="0"/>
-          </a:p>
-        </p:txBody>
-      </p:sp>
-      <p:sp>
-        <p:nvSpPr>
-          <p:cNvPr id="7" name="Shape 4"/>
-          <p:cNvSpPr/>
-          <p:nvPr/>
-        </p:nvSpPr>
-        <p:spPr>
-          <a:xfrm>
-            <a:off x="548640" y="1691640"/>
-            <a:ext cx="4206240" cy="1783080"/>
-          </a:xfrm>
-          <a:prstGeom prst="roundRect">
-            <a:avLst>
-              <a:gd name="adj" fmla="val 4103"/>
-            </a:avLst>
-          </a:prstGeom>
-          <a:solidFill>
-            <a:srgbClr val="1F1E1D"/>
-          </a:solidFill>
-          <a:ln/>
-          <a:effectLst>
-            <a:outerShdw sx="100000" sy="100000" kx="0" ky="0" algn="bl" rotWithShape="0" blurRad="88900" dist="38100" dir="5400000">
-              <a:srgbClr val="000000">
-                <a:alpha val="10000"/>
-              </a:srgbClr>
-            </a:outerShdw>
-          </a:effectLst>
-        </p:spPr>
-      </p:sp>
-      <p:sp>
-        <p:nvSpPr>
-          <p:cNvPr id="8" name="Text 5"/>
-          <p:cNvSpPr/>
-          <p:nvPr/>
-        </p:nvSpPr>
-        <p:spPr>
-          <a:xfrm>
-            <a:off x="841248" y="1965960"/>
-            <a:ext cx="3657600" cy="1280160"/>
-          </a:xfrm>
-          <a:prstGeom prst="rect">
-            <a:avLst/>
-          </a:prstGeom>
-          <a:noFill/>
-          <a:ln/>
-        </p:spPr>
-        <p:txBody>
-          <a:bodyPr wrap="square" lIns="0" tIns="0" rIns="0" bIns="0" rtlCol="0" anchor="t"/>
-          <a:lstStyle/>
-          <a:p>
-            <a:pPr indent="0" marL="0">
-              <a:lnSpc>
-                <a:spcPct val="122000"/>
-              </a:lnSpc>
-              <a:buNone/>
-            </a:pPr>
-            <a:r>
-              <a:rPr lang="en-US" sz="1250" b="1" dirty="0">
-                <a:solidFill>
-                  <a:srgbClr val="D97757"/>
-                </a:solidFill>
-                <a:latin typeface="Courier New" pitchFamily="34" charset="0"/>
-                <a:ea typeface="Courier New" pitchFamily="34" charset="-122"/>
-                <a:cs typeface="Courier New" pitchFamily="34" charset="-120"/>
-              </a:rPr>
-              <a:t>.claude/agents/</a:t>
-            </a:r>
-            <a:pPr indent="0" marL="0">
-              <a:lnSpc>
-                <a:spcPct val="122000"/>
-              </a:lnSpc>
-              <a:buNone/>
-            </a:pPr>
-            <a:r>
-              <a:rPr lang="en-US" sz="1250" dirty="0">
-                <a:solidFill>
-                  <a:srgbClr val="E9E5DD"/>
-                </a:solidFill>
-                <a:latin typeface="Courier New" pitchFamily="34" charset="0"/>
-                <a:ea typeface="Courier New" pitchFamily="34" charset="-122"/>
-                <a:cs typeface="Courier New" pitchFamily="34" charset="-120"/>
-              </a:rPr>
-              <a:t>explorer.md</a:t>
-            </a:r>
-            <a:endParaRPr lang="en-US" sz="1250" dirty="0"/>
-          </a:p>
-          <a:p>
-            <a:pPr indent="0" marL="0">
-              <a:lnSpc>
-                <a:spcPct val="122000"/>
-              </a:lnSpc>
-              <a:buNone/>
-            </a:pPr>
-            <a:r>
-              <a:rPr lang="en-US" sz="1250" dirty="0">
-                <a:solidFill>
-                  <a:srgbClr val="9A958B"/>
-                </a:solidFill>
-                <a:latin typeface="Courier New" pitchFamily="34" charset="0"/>
-                <a:ea typeface="Courier New" pitchFamily="34" charset="-122"/>
-                <a:cs typeface="Courier New" pitchFamily="34" charset="-120"/>
-              </a:rPr>
-              <a:t>---</a:t>
-            </a:r>
-            <a:endParaRPr lang="en-US" sz="1250" dirty="0"/>
-          </a:p>
-          <a:p>
-            <a:pPr indent="0" marL="0">
-              <a:lnSpc>
-                <a:spcPct val="122000"/>
-              </a:lnSpc>
-              <a:buNone/>
-            </a:pPr>
-            <a:r>
-              <a:rPr lang="en-US" sz="1250" dirty="0">
-                <a:solidFill>
-                  <a:srgbClr val="E0A04A"/>
-                </a:solidFill>
-                <a:latin typeface="Courier New" pitchFamily="34" charset="0"/>
-                <a:ea typeface="Courier New" pitchFamily="34" charset="-122"/>
-                <a:cs typeface="Courier New" pitchFamily="34" charset="-120"/>
-              </a:rPr>
-              <a:t>model: </a:t>
-            </a:r>
-            <a:pPr indent="0" marL="0">
-              <a:lnSpc>
-                <a:spcPct val="122000"/>
-              </a:lnSpc>
-              <a:buNone/>
-            </a:pPr>
-            <a:r>
-              <a:rPr lang="en-US" sz="1250" dirty="0">
-                <a:solidFill>
-                  <a:srgbClr val="E9E5DD"/>
-                </a:solidFill>
-                <a:latin typeface="Courier New" pitchFamily="34" charset="0"/>
-                <a:ea typeface="Courier New" pitchFamily="34" charset="-122"/>
-                <a:cs typeface="Courier New" pitchFamily="34" charset="-120"/>
-              </a:rPr>
-              <a:t>claude-haiku-4-5</a:t>
-            </a:r>
-            <a:endParaRPr lang="en-US" sz="1250" dirty="0"/>
-          </a:p>
-          <a:p>
-            <a:pPr indent="0" marL="0">
-              <a:lnSpc>
-                <a:spcPct val="122000"/>
-              </a:lnSpc>
-              <a:buNone/>
-            </a:pPr>
-            <a:r>
-              <a:rPr lang="en-US" sz="1250" dirty="0">
-                <a:solidFill>
-                  <a:srgbClr val="9A958B"/>
-                </a:solidFill>
-                <a:latin typeface="Courier New" pitchFamily="34" charset="0"/>
-                <a:ea typeface="Courier New" pitchFamily="34" charset="-122"/>
-                <a:cs typeface="Courier New" pitchFamily="34" charset="-120"/>
-              </a:rPr>
-              <a:t>---</a:t>
-            </a:r>
-            <a:endParaRPr lang="en-US" sz="1250" dirty="0"/>
-          </a:p>
-          <a:p>
-            <a:pPr indent="0" marL="0">
-              <a:lnSpc>
-                <a:spcPct val="122000"/>
-              </a:lnSpc>
-              <a:buNone/>
-            </a:pPr>
-            <a:r>
-              <a:rPr lang="en-US" sz="1250" dirty="0">
-                <a:solidFill>
-                  <a:srgbClr val="9A958B"/>
-                </a:solidFill>
-                <a:latin typeface="Courier New" pitchFamily="34" charset="0"/>
-                <a:ea typeface="Courier New" pitchFamily="34" charset="-122"/>
-                <a:cs typeface="Courier New" pitchFamily="34" charset="-120"/>
-              </a:rPr>
-              <a:t>Markdown body = the brief</a:t>
-            </a:r>
-            <a:endParaRPr lang="en-US" sz="1250" dirty="0"/>
-          </a:p>
-        </p:txBody>
-      </p:sp>
-      <p:pic>
-        <p:nvPicPr>
-          <p:cNvPr id="9" name="Image 1" descr="preencoded.png">    </p:cNvPr>
+          <p:cNvPr id="4" name="Image 0" descr="preencoded.png"/>
           <p:cNvPicPr>
             <a:picLocks noChangeAspect="1"/>
           </p:cNvPicPr>
@@ -14034,8 +13434,8 @@
         </p:blipFill>
         <p:spPr>
           <a:xfrm>
-            <a:off x="5029200" y="1773936"/>
-            <a:ext cx="201168" cy="201168"/>
+            <a:off x="8339328" y="402336"/>
+            <a:ext cx="310896" cy="310896"/>
           </a:xfrm>
           <a:prstGeom prst="rect">
             <a:avLst/>
@@ -14044,46 +13444,255 @@
       </p:pic>
       <p:sp>
         <p:nvSpPr>
-          <p:cNvPr id="10" name="Text 6"/>
-          <p:cNvSpPr/>
-          <p:nvPr/>
-        </p:nvSpPr>
-        <p:spPr>
-          <a:xfrm>
-            <a:off x="5340096" y="1709928"/>
-            <a:ext cx="3520440" cy="365760"/>
-          </a:xfrm>
-          <a:prstGeom prst="rect">
-            <a:avLst/>
-          </a:prstGeom>
-          <a:noFill/>
-          <a:ln/>
-        </p:spPr>
-        <p:txBody>
-          <a:bodyPr wrap="square" lIns="0" tIns="0" rIns="0" bIns="0" rtlCol="0" anchor="ctr"/>
-          <a:lstStyle/>
-          <a:p>
-            <a:pPr indent="0" marL="0">
-              <a:buNone/>
-            </a:pPr>
-            <a:r>
-              <a:rPr lang="en-US" sz="1350" dirty="0">
-                <a:solidFill>
-                  <a:srgbClr val="141413"/>
-                </a:solidFill>
-                <a:latin typeface="Inter" pitchFamily="34" charset="0"/>
-                <a:ea typeface="Inter" pitchFamily="34" charset="-122"/>
-                <a:cs typeface="Inter" pitchFamily="34" charset="-120"/>
-              </a:rPr>
-              <a:t>.md + YAML frontmatter (not .yaml)</a:t>
-            </a:r>
-            <a:endParaRPr lang="en-US" sz="1350" dirty="0"/>
+          <p:cNvPr id="5" name="Shape 2"/>
+          <p:cNvSpPr/>
+          <p:nvPr/>
+        </p:nvSpPr>
+        <p:spPr>
+          <a:xfrm>
+            <a:off x="566928" y="1207008"/>
+            <a:ext cx="1417320" cy="329184"/>
+          </a:xfrm>
+          <a:prstGeom prst="roundRect">
+            <a:avLst>
+              <a:gd name="adj" fmla="val 50000"/>
+            </a:avLst>
+          </a:prstGeom>
+          <a:solidFill>
+            <a:srgbClr val="C0392B"/>
+          </a:solidFill>
+          <a:ln/>
+        </p:spPr>
+        <p:txBody>
+          <a:bodyPr/>
+          <a:lstStyle/>
+          <a:p>
+            <a:endParaRPr lang="en-US"/>
+          </a:p>
+        </p:txBody>
+      </p:sp>
+      <p:sp>
+        <p:nvSpPr>
+          <p:cNvPr id="6" name="Text 3"/>
+          <p:cNvSpPr/>
+          <p:nvPr/>
+        </p:nvSpPr>
+        <p:spPr>
+          <a:xfrm>
+            <a:off x="566928" y="1207008"/>
+            <a:ext cx="1417320" cy="329184"/>
+          </a:xfrm>
+          <a:prstGeom prst="rect">
+            <a:avLst/>
+          </a:prstGeom>
+          <a:noFill/>
+          <a:ln/>
+        </p:spPr>
+        <p:txBody>
+          <a:bodyPr wrap="none" lIns="0" tIns="0" rIns="0" bIns="0" rtlCol="0" anchor="ctr"/>
+          <a:lstStyle/>
+          <a:p>
+            <a:pPr marL="0" indent="0" algn="ctr">
+              <a:buNone/>
+            </a:pPr>
+            <a:r>
+              <a:rPr lang="en-US" sz="1100" b="1" kern="0" spc="100" dirty="0">
+                <a:solidFill>
+                  <a:srgbClr val="FFFFFF"/>
+                </a:solidFill>
+                <a:latin typeface="Inter" pitchFamily="34" charset="0"/>
+                <a:ea typeface="Inter" pitchFamily="34" charset="-122"/>
+                <a:cs typeface="Inter" pitchFamily="34" charset="-120"/>
+              </a:rPr>
+              <a:t>CORRECTION</a:t>
+            </a:r>
+            <a:endParaRPr lang="en-US" sz="1100" dirty="0"/>
+          </a:p>
+        </p:txBody>
+      </p:sp>
+      <p:sp>
+        <p:nvSpPr>
+          <p:cNvPr id="7" name="Shape 4"/>
+          <p:cNvSpPr/>
+          <p:nvPr/>
+        </p:nvSpPr>
+        <p:spPr>
+          <a:xfrm>
+            <a:off x="548640" y="1691640"/>
+            <a:ext cx="4206240" cy="1783080"/>
+          </a:xfrm>
+          <a:prstGeom prst="roundRect">
+            <a:avLst>
+              <a:gd name="adj" fmla="val 4103"/>
+            </a:avLst>
+          </a:prstGeom>
+          <a:solidFill>
+            <a:srgbClr val="1F1E1D"/>
+          </a:solidFill>
+          <a:ln/>
+          <a:effectLst>
+            <a:outerShdw blurRad="88900" dist="38100" dir="5400000" algn="bl" rotWithShape="0">
+              <a:srgbClr val="000000">
+                <a:alpha val="10000"/>
+              </a:srgbClr>
+            </a:outerShdw>
+          </a:effectLst>
+        </p:spPr>
+        <p:txBody>
+          <a:bodyPr/>
+          <a:lstStyle/>
+          <a:p>
+            <a:endParaRPr lang="en-US"/>
+          </a:p>
+        </p:txBody>
+      </p:sp>
+      <p:sp>
+        <p:nvSpPr>
+          <p:cNvPr id="8" name="Text 5"/>
+          <p:cNvSpPr/>
+          <p:nvPr/>
+        </p:nvSpPr>
+        <p:spPr>
+          <a:xfrm>
+            <a:off x="841248" y="1965960"/>
+            <a:ext cx="3657600" cy="1280160"/>
+          </a:xfrm>
+          <a:prstGeom prst="rect">
+            <a:avLst/>
+          </a:prstGeom>
+          <a:noFill/>
+          <a:ln/>
+        </p:spPr>
+        <p:txBody>
+          <a:bodyPr wrap="square" lIns="0" tIns="0" rIns="0" bIns="0" rtlCol="0" anchor="t"/>
+          <a:lstStyle/>
+          <a:p>
+            <a:pPr marL="0" indent="0">
+              <a:lnSpc>
+                <a:spcPct val="122000"/>
+              </a:lnSpc>
+              <a:buNone/>
+            </a:pPr>
+            <a:r>
+              <a:rPr lang="en-US" sz="1250" b="1" dirty="0">
+                <a:solidFill>
+                  <a:srgbClr val="D97757"/>
+                </a:solidFill>
+                <a:latin typeface="Courier New" pitchFamily="34" charset="0"/>
+                <a:ea typeface="Courier New" pitchFamily="34" charset="-122"/>
+                <a:cs typeface="Courier New" pitchFamily="34" charset="-120"/>
+              </a:rPr>
+              <a:t>.claude/agents/</a:t>
+            </a:r>
+            <a:r>
+              <a:rPr lang="en-US" sz="1250" dirty="0">
+                <a:solidFill>
+                  <a:srgbClr val="E9E5DD"/>
+                </a:solidFill>
+                <a:latin typeface="Courier New" pitchFamily="34" charset="0"/>
+                <a:ea typeface="Courier New" pitchFamily="34" charset="-122"/>
+                <a:cs typeface="Courier New" pitchFamily="34" charset="-120"/>
+              </a:rPr>
+              <a:t>explorer.md</a:t>
+            </a:r>
+            <a:endParaRPr lang="en-US" sz="1250" dirty="0"/>
+          </a:p>
+          <a:p>
+            <a:pPr marL="0" indent="0">
+              <a:lnSpc>
+                <a:spcPct val="122000"/>
+              </a:lnSpc>
+              <a:buNone/>
+            </a:pPr>
+            <a:r>
+              <a:rPr lang="en-US" sz="1250" dirty="0">
+                <a:solidFill>
+                  <a:srgbClr val="9A958B"/>
+                </a:solidFill>
+                <a:latin typeface="Courier New" pitchFamily="34" charset="0"/>
+                <a:ea typeface="Courier New" pitchFamily="34" charset="-122"/>
+                <a:cs typeface="Courier New" pitchFamily="34" charset="-120"/>
+              </a:rPr>
+              <a:t>---</a:t>
+            </a:r>
+            <a:endParaRPr lang="en-US" sz="1250" dirty="0"/>
+          </a:p>
+          <a:p>
+            <a:pPr marL="0" indent="0">
+              <a:lnSpc>
+                <a:spcPct val="122000"/>
+              </a:lnSpc>
+              <a:buNone/>
+            </a:pPr>
+            <a:r>
+              <a:rPr lang="en-US" sz="1250" dirty="0">
+                <a:solidFill>
+                  <a:srgbClr val="E0A04A"/>
+                </a:solidFill>
+                <a:latin typeface="Courier New" pitchFamily="34" charset="0"/>
+                <a:ea typeface="Courier New" pitchFamily="34" charset="-122"/>
+                <a:cs typeface="Courier New" pitchFamily="34" charset="-120"/>
+              </a:rPr>
+              <a:t>model: </a:t>
+            </a:r>
+            <a:r>
+              <a:rPr lang="en-US" sz="1250" dirty="0">
+                <a:solidFill>
+                  <a:srgbClr val="E9E5DD"/>
+                </a:solidFill>
+                <a:latin typeface="Courier New" pitchFamily="34" charset="0"/>
+                <a:ea typeface="Courier New" pitchFamily="34" charset="-122"/>
+                <a:cs typeface="Courier New" pitchFamily="34" charset="-120"/>
+              </a:rPr>
+              <a:t>claude-haiku-4-5</a:t>
+            </a:r>
+            <a:endParaRPr lang="en-US" sz="1250" dirty="0"/>
+          </a:p>
+          <a:p>
+            <a:pPr marL="0" indent="0">
+              <a:lnSpc>
+                <a:spcPct val="122000"/>
+              </a:lnSpc>
+              <a:buNone/>
+            </a:pPr>
+            <a:r>
+              <a:rPr lang="en-US" sz="1250" dirty="0">
+                <a:solidFill>
+                  <a:srgbClr val="9A958B"/>
+                </a:solidFill>
+                <a:latin typeface="Courier New" pitchFamily="34" charset="0"/>
+                <a:ea typeface="Courier New" pitchFamily="34" charset="-122"/>
+                <a:cs typeface="Courier New" pitchFamily="34" charset="-120"/>
+              </a:rPr>
+              <a:t>---</a:t>
+            </a:r>
+            <a:endParaRPr lang="en-US" sz="1250" dirty="0"/>
+          </a:p>
+          <a:p>
+            <a:pPr marL="0" indent="0">
+              <a:lnSpc>
+                <a:spcPct val="122000"/>
+              </a:lnSpc>
+              <a:buNone/>
+            </a:pPr>
+            <a:r>
+              <a:rPr lang="en-US" sz="1250" dirty="0">
+                <a:solidFill>
+                  <a:srgbClr val="9A958B"/>
+                </a:solidFill>
+                <a:latin typeface="Courier New" pitchFamily="34" charset="0"/>
+                <a:ea typeface="Courier New" pitchFamily="34" charset="-122"/>
+                <a:cs typeface="Courier New" pitchFamily="34" charset="-120"/>
+              </a:rPr>
+              <a:t>Markdown body = the brief</a:t>
+            </a:r>
+            <a:endParaRPr lang="en-US" sz="1250" dirty="0"/>
           </a:p>
         </p:txBody>
       </p:sp>
       <p:pic>
         <p:nvPicPr>
-          <p:cNvPr id="11" name="Image 2" descr="preencoded.png">    </p:cNvPr>
+          <p:cNvPr id="9" name="Image 1" descr="preencoded.png"/>
           <p:cNvPicPr>
             <a:picLocks noChangeAspect="1"/>
           </p:cNvPicPr>
@@ -14097,7 +13706,7 @@
         </p:blipFill>
         <p:spPr>
           <a:xfrm>
-            <a:off x="5029200" y="2304288"/>
+            <a:off x="5029200" y="1773936"/>
             <a:ext cx="201168" cy="201168"/>
           </a:xfrm>
           <a:prstGeom prst="rect">
@@ -14107,13 +13716,13 @@
       </p:pic>
       <p:sp>
         <p:nvSpPr>
-          <p:cNvPr id="12" name="Text 7"/>
-          <p:cNvSpPr/>
-          <p:nvPr/>
-        </p:nvSpPr>
-        <p:spPr>
-          <a:xfrm>
-            <a:off x="5340096" y="2240280"/>
+          <p:cNvPr id="10" name="Text 6"/>
+          <p:cNvSpPr/>
+          <p:nvPr/>
+        </p:nvSpPr>
+        <p:spPr>
+          <a:xfrm>
+            <a:off x="5340096" y="1709928"/>
             <a:ext cx="3520440" cy="365760"/>
           </a:xfrm>
           <a:prstGeom prst="rect">
@@ -14126,7 +13735,7 @@
           <a:bodyPr wrap="square" lIns="0" tIns="0" rIns="0" bIns="0" rtlCol="0" anchor="ctr"/>
           <a:lstStyle/>
           <a:p>
-            <a:pPr indent="0" marL="0">
+            <a:pPr marL="0" indent="0">
               <a:buNone/>
             </a:pPr>
             <a:r>
@@ -14138,7 +13747,7 @@
                 <a:ea typeface="Inter" pitchFamily="34" charset="-122"/>
                 <a:cs typeface="Inter" pitchFamily="34" charset="-120"/>
               </a:rPr>
-              <a:t>Isolated context — only a summary returns</a:t>
+              <a:t>.md + YAML frontmatter (not .yaml)</a:t>
             </a:r>
             <a:endParaRPr lang="en-US" sz="1350" dirty="0"/>
           </a:p>
@@ -14146,20 +13755,83 @@
       </p:sp>
       <p:pic>
         <p:nvPicPr>
-          <p:cNvPr id="13" name="Image 3" descr="preencoded.png">    </p:cNvPr>
+          <p:cNvPr id="11" name="Image 2" descr="preencoded.png"/>
           <p:cNvPicPr>
             <a:picLocks noChangeAspect="1"/>
           </p:cNvPicPr>
           <p:nvPr/>
         </p:nvPicPr>
         <p:blipFill>
-          <a:blip r:embed="rId4"/>
+          <a:blip r:embed="rId3"/>
           <a:stretch>
             <a:fillRect/>
           </a:stretch>
         </p:blipFill>
         <p:spPr>
           <a:xfrm>
+            <a:off x="5029200" y="2304288"/>
+            <a:ext cx="201168" cy="201168"/>
+          </a:xfrm>
+          <a:prstGeom prst="rect">
+            <a:avLst/>
+          </a:prstGeom>
+        </p:spPr>
+      </p:pic>
+      <p:sp>
+        <p:nvSpPr>
+          <p:cNvPr id="12" name="Text 7"/>
+          <p:cNvSpPr/>
+          <p:nvPr/>
+        </p:nvSpPr>
+        <p:spPr>
+          <a:xfrm>
+            <a:off x="5340096" y="2240280"/>
+            <a:ext cx="3520440" cy="365760"/>
+          </a:xfrm>
+          <a:prstGeom prst="rect">
+            <a:avLst/>
+          </a:prstGeom>
+          <a:noFill/>
+          <a:ln/>
+        </p:spPr>
+        <p:txBody>
+          <a:bodyPr wrap="square" lIns="0" tIns="0" rIns="0" bIns="0" rtlCol="0" anchor="ctr"/>
+          <a:lstStyle/>
+          <a:p>
+            <a:pPr marL="0" indent="0">
+              <a:buNone/>
+            </a:pPr>
+            <a:r>
+              <a:rPr lang="en-US" sz="1350" dirty="0">
+                <a:solidFill>
+                  <a:srgbClr val="141413"/>
+                </a:solidFill>
+                <a:latin typeface="Inter" pitchFamily="34" charset="0"/>
+                <a:ea typeface="Inter" pitchFamily="34" charset="-122"/>
+                <a:cs typeface="Inter" pitchFamily="34" charset="-120"/>
+              </a:rPr>
+              <a:t>Isolated context — only a summary returns</a:t>
+            </a:r>
+            <a:endParaRPr lang="en-US" sz="1350" dirty="0"/>
+          </a:p>
+        </p:txBody>
+      </p:sp>
+      <p:pic>
+        <p:nvPicPr>
+          <p:cNvPr id="13" name="Image 3" descr="preencoded.png"/>
+          <p:cNvPicPr>
+            <a:picLocks noChangeAspect="1"/>
+          </p:cNvPicPr>
+          <p:nvPr/>
+        </p:nvPicPr>
+        <p:blipFill>
+          <a:blip r:embed="rId3"/>
+          <a:stretch>
+            <a:fillRect/>
+          </a:stretch>
+        </p:blipFill>
+        <p:spPr>
+          <a:xfrm>
             <a:off x="5029200" y="2834640"/>
             <a:ext cx="201168" cy="201168"/>
           </a:xfrm>
@@ -14189,7 +13861,7 @@
           <a:bodyPr wrap="square" lIns="0" tIns="0" rIns="0" bIns="0" rtlCol="0" anchor="ctr"/>
           <a:lstStyle/>
           <a:p>
-            <a:pPr indent="0" marL="0">
+            <a:pPr marL="0" indent="0">
               <a:buNone/>
             </a:pPr>
             <a:r>
@@ -14228,6 +13900,13 @@
           </a:solidFill>
           <a:ln/>
         </p:spPr>
+        <p:txBody>
+          <a:bodyPr/>
+          <a:lstStyle/>
+          <a:p>
+            <a:endParaRPr lang="en-US"/>
+          </a:p>
+        </p:txBody>
       </p:sp>
       <p:sp>
         <p:nvSpPr>
@@ -14250,7 +13929,7 @@
           <a:bodyPr wrap="square" lIns="0" tIns="0" rIns="0" bIns="0" rtlCol="0" anchor="ctr"/>
           <a:lstStyle/>
           <a:p>
-            <a:pPr indent="0" marL="0">
+            <a:pPr marL="0" indent="0">
               <a:buNone/>
             </a:pPr>
             <a:r>
@@ -14264,9 +13943,6 @@
               </a:rPr>
               <a:t>Skill </a:t>
             </a:r>
-            <a:pPr indent="0" marL="0">
-              <a:buNone/>
-            </a:pPr>
             <a:r>
               <a:rPr lang="en-US" sz="1350" dirty="0">
                 <a:solidFill>
@@ -14278,9 +13954,6 @@
               </a:rPr>
               <a:t>= in-thread, steerable.   </a:t>
             </a:r>
-            <a:pPr indent="0" marL="0">
-              <a:buNone/>
-            </a:pPr>
             <a:r>
               <a:rPr lang="en-US" sz="1350" b="1" dirty="0">
                 <a:solidFill>
@@ -14292,9 +13965,6 @@
               </a:rPr>
               <a:t>Subagent </a:t>
             </a:r>
-            <a:pPr indent="0" marL="0">
-              <a:buNone/>
-            </a:pPr>
             <a:r>
               <a:rPr lang="en-US" sz="1350" dirty="0">
                 <a:solidFill>
@@ -14331,7 +14001,7 @@
           <a:bodyPr wrap="square" rtlCol="0" anchor="ctr"/>
           <a:lstStyle/>
           <a:p>
-            <a:pPr indent="0" marL="0">
+            <a:pPr marL="0" indent="0">
               <a:buNone/>
             </a:pPr>
             <a:r>
@@ -14370,7 +14040,7 @@
           <a:bodyPr wrap="square" rtlCol="0" anchor="ctr"/>
           <a:lstStyle/>
           <a:p>
-            <a:pPr algn="r" indent="0" marL="0">
+            <a:pPr marL="0" indent="0" algn="r">
               <a:buNone/>
             </a:pPr>
             <a:r>
@@ -14385,45 +14055,6 @@
               <a:t>Section 2  ·  9/14</a:t>
             </a:r>
             <a:endParaRPr lang="en-US" sz="900" dirty="0"/>
-          </a:p>
-        </p:txBody>
-      </p:sp>
-      <p:sp>
-        <p:nvSpPr>
-          <p:cNvPr id="19" name="Text 13"/>
-          <p:cNvSpPr/>
-          <p:nvPr/>
-        </p:nvSpPr>
-        <p:spPr>
-          <a:xfrm>
-            <a:off x="548640" y="4462272"/>
-            <a:ext cx="8046720" cy="274320"/>
-          </a:xfrm>
-          <a:prstGeom prst="rect">
-            <a:avLst/>
-          </a:prstGeom>
-          <a:noFill/>
-          <a:ln/>
-        </p:spPr>
-        <p:txBody>
-          <a:bodyPr wrap="square" lIns="0" tIns="0" rIns="0" bIns="0" rtlCol="0" anchor="ctr"/>
-          <a:lstStyle/>
-          <a:p>
-            <a:pPr indent="0" marL="0">
-              <a:buNone/>
-            </a:pPr>
-            <a:r>
-              <a:rPr lang="en-US" sz="1000" i="1" dirty="0">
-                <a:solidFill>
-                  <a:srgbClr val="615C52"/>
-                </a:solidFill>
-                <a:latin typeface="Inter" pitchFamily="34" charset="0"/>
-                <a:ea typeface="Inter" pitchFamily="34" charset="-122"/>
-                <a:cs typeface="Inter" pitchFamily="34" charset="-120"/>
-              </a:rPr>
-              <a:t>▸ Correction: subagents are markdown with frontmatter — not standalone YAML.</a:t>
-            </a:r>
-            <a:endParaRPr lang="en-US" sz="1000" dirty="0"/>
           </a:p>
         </p:txBody>
       </p:sp>

--- a/decks/Day 1/Section2-Steering-Claude-Code.pptx
+++ b/decks/Day 1/Section2-Steering-Claude-Code.pptx
@@ -671,45 +671,6 @@
           </a:p>
         </p:txBody>
       </p:sp>
-      <p:sp>
-        <p:nvSpPr>
-          <p:cNvPr id="8" name="Text 5"/>
-          <p:cNvSpPr/>
-          <p:nvPr/>
-        </p:nvSpPr>
-        <p:spPr>
-          <a:xfrm>
-            <a:off x="640080" y="3621024"/>
-            <a:ext cx="7315200" cy="365760"/>
-          </a:xfrm>
-          <a:prstGeom prst="rect">
-            <a:avLst/>
-          </a:prstGeom>
-          <a:noFill/>
-          <a:ln/>
-        </p:spPr>
-        <p:txBody>
-          <a:bodyPr wrap="square" lIns="0" tIns="0" rIns="0" bIns="0" rtlCol="0" anchor="ctr"/>
-          <a:lstStyle/>
-          <a:p>
-            <a:pPr marL="0" indent="0">
-              <a:buNone/>
-            </a:pPr>
-            <a:r>
-              <a:rPr lang="en-US" sz="1700" dirty="0">
-                <a:solidFill>
-                  <a:srgbClr val="615C52"/>
-                </a:solidFill>
-                <a:latin typeface="Inter" pitchFamily="34" charset="0"/>
-                <a:ea typeface="Inter" pitchFamily="34" charset="-122"/>
-                <a:cs typeface="Inter" pitchFamily="34" charset="-120"/>
-              </a:rPr>
-              <a:t>105 min  ·  50 lecture / demo  +  55 lab</a:t>
-            </a:r>
-            <a:endParaRPr lang="en-US" sz="1700" dirty="0"/>
-          </a:p>
-        </p:txBody>
-      </p:sp>
     </p:spTree>
   </p:cSld>
   <p:clrMapOvr>
